--- a/docs/PC2/PROES_PC2_2025_2026.pptx
+++ b/docs/PC2/PROES_PC2_2025_2026.pptx
@@ -6,17 +6,20 @@
     <p:sldMasterId id="2147483659" r:id="rId5"/>
   </p:sldMasterIdLst>
   <p:notesMasterIdLst>
-    <p:notesMasterId r:id="rId14"/>
+    <p:notesMasterId r:id="rId17"/>
   </p:notesMasterIdLst>
   <p:sldIdLst>
     <p:sldId id="256" r:id="rId6"/>
     <p:sldId id="327" r:id="rId7"/>
     <p:sldId id="368" r:id="rId8"/>
-    <p:sldId id="374" r:id="rId9"/>
-    <p:sldId id="369" r:id="rId10"/>
-    <p:sldId id="370" r:id="rId11"/>
-    <p:sldId id="373" r:id="rId12"/>
-    <p:sldId id="371" r:id="rId13"/>
+    <p:sldId id="375" r:id="rId9"/>
+    <p:sldId id="374" r:id="rId10"/>
+    <p:sldId id="376" r:id="rId11"/>
+    <p:sldId id="369" r:id="rId12"/>
+    <p:sldId id="377" r:id="rId13"/>
+    <p:sldId id="370" r:id="rId14"/>
+    <p:sldId id="373" r:id="rId15"/>
+    <p:sldId id="371" r:id="rId16"/>
   </p:sldIdLst>
   <p:sldSz cx="9906000" cy="6858000" type="A4"/>
   <p:notesSz cx="6858000" cy="9144000"/>
@@ -253,6 +256,199 @@
 </p:cmAuthorLst>
 </file>
 
+<file path=ppt/changesInfos/changesInfo1.xml><?xml version="1.0" encoding="utf-8"?>
+<pc:chgInfo xmlns:a="http://schemas.openxmlformats.org/drawingml/2006/main" xmlns:r="http://schemas.openxmlformats.org/officeDocument/2006/relationships" xmlns:ac="http://schemas.microsoft.com/office/drawing/2013/main/command" xmlns:pc="http://schemas.microsoft.com/office/powerpoint/2013/main/command">
+  <pc:docChgLst>
+    <pc:chgData name="Patrick Dias Mendes Da Costa" userId="dd66be79-1e31-41d8-9d64-5c1e0e105c49" providerId="ADAL" clId="{59228E5F-405D-45DB-AF19-9309866038C0}"/>
+    <pc:docChg chg="undo custSel addSld delSld modSld">
+      <pc:chgData name="Patrick Dias Mendes Da Costa" userId="dd66be79-1e31-41d8-9d64-5c1e0e105c49" providerId="ADAL" clId="{59228E5F-405D-45DB-AF19-9309866038C0}" dt="2026-04-29T08:48:28.857" v="41" actId="20577"/>
+      <pc:docMkLst>
+        <pc:docMk/>
+      </pc:docMkLst>
+      <pc:sldChg chg="modSp mod">
+        <pc:chgData name="Patrick Dias Mendes Da Costa" userId="dd66be79-1e31-41d8-9d64-5c1e0e105c49" providerId="ADAL" clId="{59228E5F-405D-45DB-AF19-9309866038C0}" dt="2026-04-29T08:38:37.330" v="0" actId="20577"/>
+        <pc:sldMkLst>
+          <pc:docMk/>
+          <pc:sldMk cId="0" sldId="256"/>
+        </pc:sldMkLst>
+        <pc:spChg chg="mod">
+          <ac:chgData name="Patrick Dias Mendes Da Costa" userId="dd66be79-1e31-41d8-9d64-5c1e0e105c49" providerId="ADAL" clId="{59228E5F-405D-45DB-AF19-9309866038C0}" dt="2026-04-29T08:38:37.330" v="0" actId="20577"/>
+          <ac:spMkLst>
+            <pc:docMk/>
+            <pc:sldMk cId="0" sldId="256"/>
+            <ac:spMk id="2" creationId="{E590B8BF-77A6-4C5C-8578-669C14DED000}"/>
+          </ac:spMkLst>
+        </pc:spChg>
+      </pc:sldChg>
+      <pc:sldChg chg="modSp mod">
+        <pc:chgData name="Patrick Dias Mendes Da Costa" userId="dd66be79-1e31-41d8-9d64-5c1e0e105c49" providerId="ADAL" clId="{59228E5F-405D-45DB-AF19-9309866038C0}" dt="2026-04-29T08:38:49.158" v="4" actId="20577"/>
+        <pc:sldMkLst>
+          <pc:docMk/>
+          <pc:sldMk cId="2268314253" sldId="327"/>
+        </pc:sldMkLst>
+        <pc:spChg chg="mod">
+          <ac:chgData name="Patrick Dias Mendes Da Costa" userId="dd66be79-1e31-41d8-9d64-5c1e0e105c49" providerId="ADAL" clId="{59228E5F-405D-45DB-AF19-9309866038C0}" dt="2026-04-29T08:38:49.158" v="4" actId="20577"/>
+          <ac:spMkLst>
+            <pc:docMk/>
+            <pc:sldMk cId="2268314253" sldId="327"/>
+            <ac:spMk id="3" creationId="{7B141FE6-FB25-4452-8E5F-1B75475DFD11}"/>
+          </ac:spMkLst>
+        </pc:spChg>
+      </pc:sldChg>
+      <pc:sldChg chg="modSp mod">
+        <pc:chgData name="Patrick Dias Mendes Da Costa" userId="dd66be79-1e31-41d8-9d64-5c1e0e105c49" providerId="ADAL" clId="{59228E5F-405D-45DB-AF19-9309866038C0}" dt="2026-04-29T08:39:34.019" v="8" actId="20577"/>
+        <pc:sldMkLst>
+          <pc:docMk/>
+          <pc:sldMk cId="4008698049" sldId="368"/>
+        </pc:sldMkLst>
+        <pc:spChg chg="mod">
+          <ac:chgData name="Patrick Dias Mendes Da Costa" userId="dd66be79-1e31-41d8-9d64-5c1e0e105c49" providerId="ADAL" clId="{59228E5F-405D-45DB-AF19-9309866038C0}" dt="2026-04-29T08:39:34.019" v="8" actId="20577"/>
+          <ac:spMkLst>
+            <pc:docMk/>
+            <pc:sldMk cId="4008698049" sldId="368"/>
+            <ac:spMk id="3" creationId="{7B141FE6-FB25-4452-8E5F-1B75475DFD11}"/>
+          </ac:spMkLst>
+        </pc:spChg>
+      </pc:sldChg>
+      <pc:sldChg chg="modSp mod">
+        <pc:chgData name="Patrick Dias Mendes Da Costa" userId="dd66be79-1e31-41d8-9d64-5c1e0e105c49" providerId="ADAL" clId="{59228E5F-405D-45DB-AF19-9309866038C0}" dt="2026-04-29T08:41:38.827" v="26" actId="20577"/>
+        <pc:sldMkLst>
+          <pc:docMk/>
+          <pc:sldMk cId="1575781085" sldId="369"/>
+        </pc:sldMkLst>
+        <pc:spChg chg="mod">
+          <ac:chgData name="Patrick Dias Mendes Da Costa" userId="dd66be79-1e31-41d8-9d64-5c1e0e105c49" providerId="ADAL" clId="{59228E5F-405D-45DB-AF19-9309866038C0}" dt="2026-04-29T08:41:38.827" v="26" actId="20577"/>
+          <ac:spMkLst>
+            <pc:docMk/>
+            <pc:sldMk cId="1575781085" sldId="369"/>
+            <ac:spMk id="3" creationId="{7B141FE6-FB25-4452-8E5F-1B75475DFD11}"/>
+          </ac:spMkLst>
+        </pc:spChg>
+      </pc:sldChg>
+      <pc:sldChg chg="modSp mod">
+        <pc:chgData name="Patrick Dias Mendes Da Costa" userId="dd66be79-1e31-41d8-9d64-5c1e0e105c49" providerId="ADAL" clId="{59228E5F-405D-45DB-AF19-9309866038C0}" dt="2026-04-29T08:42:31.144" v="30" actId="20577"/>
+        <pc:sldMkLst>
+          <pc:docMk/>
+          <pc:sldMk cId="0" sldId="370"/>
+        </pc:sldMkLst>
+        <pc:spChg chg="mod">
+          <ac:chgData name="Patrick Dias Mendes Da Costa" userId="dd66be79-1e31-41d8-9d64-5c1e0e105c49" providerId="ADAL" clId="{59228E5F-405D-45DB-AF19-9309866038C0}" dt="2026-04-29T08:42:31.144" v="30" actId="20577"/>
+          <ac:spMkLst>
+            <pc:docMk/>
+            <pc:sldMk cId="0" sldId="370"/>
+            <ac:spMk id="3" creationId="{237C9DBE-ABA0-974D-04B5-2BC87BDD8FB5}"/>
+          </ac:spMkLst>
+        </pc:spChg>
+      </pc:sldChg>
+      <pc:sldChg chg="modSp mod">
+        <pc:chgData name="Patrick Dias Mendes Da Costa" userId="dd66be79-1e31-41d8-9d64-5c1e0e105c49" providerId="ADAL" clId="{59228E5F-405D-45DB-AF19-9309866038C0}" dt="2026-04-29T08:48:28.857" v="41" actId="20577"/>
+        <pc:sldMkLst>
+          <pc:docMk/>
+          <pc:sldMk cId="2067733268" sldId="371"/>
+        </pc:sldMkLst>
+        <pc:spChg chg="mod">
+          <ac:chgData name="Patrick Dias Mendes Da Costa" userId="dd66be79-1e31-41d8-9d64-5c1e0e105c49" providerId="ADAL" clId="{59228E5F-405D-45DB-AF19-9309866038C0}" dt="2026-04-29T08:48:05.506" v="33" actId="20577"/>
+          <ac:spMkLst>
+            <pc:docMk/>
+            <pc:sldMk cId="2067733268" sldId="371"/>
+            <ac:spMk id="3" creationId="{1C71E78C-2D62-9D3F-3364-827D8736AFEB}"/>
+          </ac:spMkLst>
+        </pc:spChg>
+        <pc:spChg chg="mod">
+          <ac:chgData name="Patrick Dias Mendes Da Costa" userId="dd66be79-1e31-41d8-9d64-5c1e0e105c49" providerId="ADAL" clId="{59228E5F-405D-45DB-AF19-9309866038C0}" dt="2026-04-29T08:48:28.857" v="41" actId="20577"/>
+          <ac:spMkLst>
+            <pc:docMk/>
+            <pc:sldMk cId="2067733268" sldId="371"/>
+            <ac:spMk id="4" creationId="{1513D2BA-859E-483F-B831-FB4EBCF3F9A0}"/>
+          </ac:spMkLst>
+        </pc:spChg>
+      </pc:sldChg>
+      <pc:sldChg chg="modSp mod">
+        <pc:chgData name="Patrick Dias Mendes Da Costa" userId="dd66be79-1e31-41d8-9d64-5c1e0e105c49" providerId="ADAL" clId="{59228E5F-405D-45DB-AF19-9309866038C0}" dt="2026-04-29T08:41:13.687" v="24" actId="20577"/>
+        <pc:sldMkLst>
+          <pc:docMk/>
+          <pc:sldMk cId="2749455125" sldId="374"/>
+        </pc:sldMkLst>
+        <pc:spChg chg="mod">
+          <ac:chgData name="Patrick Dias Mendes Da Costa" userId="dd66be79-1e31-41d8-9d64-5c1e0e105c49" providerId="ADAL" clId="{59228E5F-405D-45DB-AF19-9309866038C0}" dt="2026-04-29T08:41:13.687" v="24" actId="20577"/>
+          <ac:spMkLst>
+            <pc:docMk/>
+            <pc:sldMk cId="2749455125" sldId="374"/>
+            <ac:spMk id="3" creationId="{3B69BD01-50B0-F7CD-87DE-1626E8D8D3F6}"/>
+          </ac:spMkLst>
+        </pc:spChg>
+      </pc:sldChg>
+      <pc:sldChg chg="modSp add mod">
+        <pc:chgData name="Patrick Dias Mendes Da Costa" userId="dd66be79-1e31-41d8-9d64-5c1e0e105c49" providerId="ADAL" clId="{59228E5F-405D-45DB-AF19-9309866038C0}" dt="2026-04-29T08:39:12.934" v="7" actId="5793"/>
+        <pc:sldMkLst>
+          <pc:docMk/>
+          <pc:sldMk cId="33037351" sldId="375"/>
+        </pc:sldMkLst>
+        <pc:spChg chg="mod">
+          <ac:chgData name="Patrick Dias Mendes Da Costa" userId="dd66be79-1e31-41d8-9d64-5c1e0e105c49" providerId="ADAL" clId="{59228E5F-405D-45DB-AF19-9309866038C0}" dt="2026-04-29T08:39:12.934" v="7" actId="5793"/>
+          <ac:spMkLst>
+            <pc:docMk/>
+            <pc:sldMk cId="33037351" sldId="375"/>
+            <ac:spMk id="3" creationId="{DA8A7C52-8C94-6524-6843-8CFA7B274E50}"/>
+          </ac:spMkLst>
+        </pc:spChg>
+      </pc:sldChg>
+      <pc:sldChg chg="modSp add mod">
+        <pc:chgData name="Patrick Dias Mendes Da Costa" userId="dd66be79-1e31-41d8-9d64-5c1e0e105c49" providerId="ADAL" clId="{59228E5F-405D-45DB-AF19-9309866038C0}" dt="2026-04-29T08:40:50.891" v="23" actId="5793"/>
+        <pc:sldMkLst>
+          <pc:docMk/>
+          <pc:sldMk cId="563404411" sldId="376"/>
+        </pc:sldMkLst>
+        <pc:spChg chg="mod">
+          <ac:chgData name="Patrick Dias Mendes Da Costa" userId="dd66be79-1e31-41d8-9d64-5c1e0e105c49" providerId="ADAL" clId="{59228E5F-405D-45DB-AF19-9309866038C0}" dt="2026-04-29T08:40:50.891" v="23" actId="5793"/>
+          <ac:spMkLst>
+            <pc:docMk/>
+            <pc:sldMk cId="563404411" sldId="376"/>
+            <ac:spMk id="3" creationId="{D3758257-7DBE-B63D-8A56-A2631DAB0F75}"/>
+          </ac:spMkLst>
+        </pc:spChg>
+      </pc:sldChg>
+      <pc:sldChg chg="modSp add mod">
+        <pc:chgData name="Patrick Dias Mendes Da Costa" userId="dd66be79-1e31-41d8-9d64-5c1e0e105c49" providerId="ADAL" clId="{59228E5F-405D-45DB-AF19-9309866038C0}" dt="2026-04-29T08:41:52.889" v="28" actId="5793"/>
+        <pc:sldMkLst>
+          <pc:docMk/>
+          <pc:sldMk cId="1590180005" sldId="377"/>
+        </pc:sldMkLst>
+        <pc:spChg chg="mod">
+          <ac:chgData name="Patrick Dias Mendes Da Costa" userId="dd66be79-1e31-41d8-9d64-5c1e0e105c49" providerId="ADAL" clId="{59228E5F-405D-45DB-AF19-9309866038C0}" dt="2026-04-29T08:41:52.889" v="28" actId="5793"/>
+          <ac:spMkLst>
+            <pc:docMk/>
+            <pc:sldMk cId="1590180005" sldId="377"/>
+            <ac:spMk id="3" creationId="{41548714-21BC-F2A1-6633-0AD9950A7793}"/>
+          </ac:spMkLst>
+        </pc:spChg>
+      </pc:sldChg>
+      <pc:sldChg chg="del">
+        <pc:chgData name="Patrick Dias Mendes Da Costa" userId="dd66be79-1e31-41d8-9d64-5c1e0e105c49" providerId="ADAL" clId="{59228E5F-405D-45DB-AF19-9309866038C0}" dt="2026-04-29T08:46:50.826" v="31" actId="47"/>
+        <pc:sldMkLst>
+          <pc:docMk/>
+          <pc:sldMk cId="0" sldId="378"/>
+        </pc:sldMkLst>
+      </pc:sldChg>
+      <pc:sldChg chg="del">
+        <pc:chgData name="Patrick Dias Mendes Da Costa" userId="dd66be79-1e31-41d8-9d64-5c1e0e105c49" providerId="ADAL" clId="{59228E5F-405D-45DB-AF19-9309866038C0}" dt="2026-04-29T08:46:50.826" v="31" actId="47"/>
+        <pc:sldMkLst>
+          <pc:docMk/>
+          <pc:sldMk cId="0" sldId="379"/>
+        </pc:sldMkLst>
+      </pc:sldChg>
+      <pc:sldChg chg="del">
+        <pc:chgData name="Patrick Dias Mendes Da Costa" userId="dd66be79-1e31-41d8-9d64-5c1e0e105c49" providerId="ADAL" clId="{59228E5F-405D-45DB-AF19-9309866038C0}" dt="2026-04-29T08:46:50.826" v="31" actId="47"/>
+        <pc:sldMkLst>
+          <pc:docMk/>
+          <pc:sldMk cId="0" sldId="380"/>
+        </pc:sldMkLst>
+      </pc:sldChg>
+    </pc:docChg>
+  </pc:docChgLst>
+</pc:chgInfo>
+</file>
+
 <file path=ppt/notesMasters/notesMaster1.xml><?xml version="1.0" encoding="utf-8"?>
 <p:notesMaster xmlns:a="http://schemas.openxmlformats.org/drawingml/2006/main" xmlns:r="http://schemas.openxmlformats.org/officeDocument/2006/relationships" xmlns:p="http://schemas.openxmlformats.org/presentationml/2006/main">
   <p:cSld>
@@ -2127,7 +2323,7 @@
           <a:p>
             <a:fld id="{AA8F822C-469B-4292-BAFD-08428F7C7086}" type="datetimeFigureOut">
               <a:rPr lang="pt-PT" smtClean="0"/>
-              <a:t>21/04/2026</a:t>
+              <a:t>29/04/2026</a:t>
             </a:fld>
             <a:endParaRPr lang="pt-PT"/>
           </a:p>
@@ -2325,7 +2521,7 @@
           <a:p>
             <a:fld id="{AA8F822C-469B-4292-BAFD-08428F7C7086}" type="datetimeFigureOut">
               <a:rPr lang="pt-PT" smtClean="0"/>
-              <a:t>21/04/2026</a:t>
+              <a:t>29/04/2026</a:t>
             </a:fld>
             <a:endParaRPr lang="pt-PT"/>
           </a:p>
@@ -2600,7 +2796,7 @@
           <a:p>
             <a:fld id="{AA8F822C-469B-4292-BAFD-08428F7C7086}" type="datetimeFigureOut">
               <a:rPr lang="pt-PT" smtClean="0"/>
-              <a:t>21/04/2026</a:t>
+              <a:t>29/04/2026</a:t>
             </a:fld>
             <a:endParaRPr lang="pt-PT"/>
           </a:p>
@@ -2865,7 +3061,7 @@
           <a:p>
             <a:fld id="{AA8F822C-469B-4292-BAFD-08428F7C7086}" type="datetimeFigureOut">
               <a:rPr lang="pt-PT" smtClean="0"/>
-              <a:t>21/04/2026</a:t>
+              <a:t>29/04/2026</a:t>
             </a:fld>
             <a:endParaRPr lang="pt-PT"/>
           </a:p>
@@ -3277,7 +3473,7 @@
           <a:p>
             <a:fld id="{AA8F822C-469B-4292-BAFD-08428F7C7086}" type="datetimeFigureOut">
               <a:rPr lang="pt-PT" smtClean="0"/>
-              <a:t>21/04/2026</a:t>
+              <a:t>29/04/2026</a:t>
             </a:fld>
             <a:endParaRPr lang="pt-PT"/>
           </a:p>
@@ -3418,7 +3614,7 @@
           <a:p>
             <a:fld id="{AA8F822C-469B-4292-BAFD-08428F7C7086}" type="datetimeFigureOut">
               <a:rPr lang="pt-PT" smtClean="0"/>
-              <a:t>21/04/2026</a:t>
+              <a:t>29/04/2026</a:t>
             </a:fld>
             <a:endParaRPr lang="pt-PT"/>
           </a:p>
@@ -3531,7 +3727,7 @@
           <a:p>
             <a:fld id="{AA8F822C-469B-4292-BAFD-08428F7C7086}" type="datetimeFigureOut">
               <a:rPr lang="pt-PT" smtClean="0"/>
-              <a:t>21/04/2026</a:t>
+              <a:t>29/04/2026</a:t>
             </a:fld>
             <a:endParaRPr lang="pt-PT"/>
           </a:p>
@@ -3842,7 +4038,7 @@
           <a:p>
             <a:fld id="{AA8F822C-469B-4292-BAFD-08428F7C7086}" type="datetimeFigureOut">
               <a:rPr lang="pt-PT" smtClean="0"/>
-              <a:t>21/04/2026</a:t>
+              <a:t>29/04/2026</a:t>
             </a:fld>
             <a:endParaRPr lang="pt-PT"/>
           </a:p>
@@ -4130,7 +4326,7 @@
           <a:p>
             <a:fld id="{AA8F822C-469B-4292-BAFD-08428F7C7086}" type="datetimeFigureOut">
               <a:rPr lang="pt-PT" smtClean="0"/>
-              <a:t>21/04/2026</a:t>
+              <a:t>29/04/2026</a:t>
             </a:fld>
             <a:endParaRPr lang="pt-PT"/>
           </a:p>
@@ -4328,7 +4524,7 @@
           <a:p>
             <a:fld id="{AA8F822C-469B-4292-BAFD-08428F7C7086}" type="datetimeFigureOut">
               <a:rPr lang="pt-PT" smtClean="0"/>
-              <a:t>21/04/2026</a:t>
+              <a:t>29/04/2026</a:t>
             </a:fld>
             <a:endParaRPr lang="pt-PT"/>
           </a:p>
@@ -4938,7 +5134,7 @@
           <a:p>
             <a:fld id="{AA8F822C-469B-4292-BAFD-08428F7C7086}" type="datetimeFigureOut">
               <a:rPr lang="pt-PT" smtClean="0"/>
-              <a:t>21/04/2026</a:t>
+              <a:t>29/04/2026</a:t>
             </a:fld>
             <a:endParaRPr lang="pt-PT"/>
           </a:p>
@@ -10737,7 +10933,7 @@
           <a:p>
             <a:fld id="{AA8F822C-469B-4292-BAFD-08428F7C7086}" type="datetimeFigureOut">
               <a:rPr lang="pt-PT" smtClean="0"/>
-              <a:t>21/04/2026</a:t>
+              <a:t>29/04/2026</a:t>
             </a:fld>
             <a:endParaRPr lang="pt-PT"/>
           </a:p>
@@ -11236,7 +11432,7 @@
                 </a:solidFill>
                 <a:ea typeface="Kozuka Gothic Pro M" panose="020B0700000000000000" pitchFamily="34" charset="-128"/>
               </a:rPr>
-              <a:t> – Plataforma Integrada de Gestão de Colaboradores</a:t>
+              <a:t> - Plataforma Integrada de Gestão de Colaboradores</a:t>
             </a:r>
           </a:p>
           <a:p>
@@ -11264,1623 +11460,7 @@
 </p:sld>
 </file>
 
-<file path=ppt/slides/slide2.xml><?xml version="1.0" encoding="utf-8"?>
-<p:sld xmlns:a="http://schemas.openxmlformats.org/drawingml/2006/main" xmlns:r="http://schemas.openxmlformats.org/officeDocument/2006/relationships" xmlns:p="http://schemas.openxmlformats.org/presentationml/2006/main">
-  <p:cSld>
-    <p:spTree>
-      <p:nvGrpSpPr>
-        <p:cNvPr id="1" name=""/>
-        <p:cNvGrpSpPr/>
-        <p:nvPr/>
-      </p:nvGrpSpPr>
-      <p:grpSpPr>
-        <a:xfrm>
-          <a:off x="0" y="0"/>
-          <a:ext cx="0" cy="0"/>
-          <a:chOff x="0" y="0"/>
-          <a:chExt cx="0" cy="0"/>
-        </a:xfrm>
-      </p:grpSpPr>
-      <p:sp>
-        <p:nvSpPr>
-          <p:cNvPr id="2" name="Título 1">
-            <a:extLst>
-              <a:ext uri="{FF2B5EF4-FFF2-40B4-BE49-F238E27FC236}">
-                <a16:creationId xmlns:a16="http://schemas.microsoft.com/office/drawing/2014/main" id="{F1DF48B1-7E58-4369-B684-A45E85706E8A}"/>
-              </a:ext>
-            </a:extLst>
-          </p:cNvPr>
-          <p:cNvSpPr>
-            <a:spLocks noGrp="1"/>
-          </p:cNvSpPr>
-          <p:nvPr>
-            <p:ph type="title"/>
-          </p:nvPr>
-        </p:nvSpPr>
-        <p:spPr/>
-        <p:txBody>
-          <a:bodyPr/>
-          <a:lstStyle/>
-          <a:p>
-            <a:r>
-              <a:rPr lang="pt-PT" dirty="0"/>
-              <a:t>Identificação e stakeholders</a:t>
-            </a:r>
-          </a:p>
-        </p:txBody>
-      </p:sp>
-      <p:sp>
-        <p:nvSpPr>
-          <p:cNvPr id="3" name="Marcador de Posição do Texto 2">
-            <a:extLst>
-              <a:ext uri="{FF2B5EF4-FFF2-40B4-BE49-F238E27FC236}">
-                <a16:creationId xmlns:a16="http://schemas.microsoft.com/office/drawing/2014/main" id="{7B141FE6-FB25-4452-8E5F-1B75475DFD11}"/>
-              </a:ext>
-            </a:extLst>
-          </p:cNvPr>
-          <p:cNvSpPr>
-            <a:spLocks noGrp="1"/>
-          </p:cNvSpPr>
-          <p:nvPr>
-            <p:ph type="body" idx="1"/>
-          </p:nvPr>
-        </p:nvSpPr>
-        <p:spPr/>
-        <p:txBody>
-          <a:bodyPr/>
-          <a:lstStyle/>
-          <a:p>
-            <a:r>
-              <a:rPr lang="pt-PT" dirty="0"/>
-              <a:t>Aluno: Patrick Dias Mendes da Costa</a:t>
-            </a:r>
-          </a:p>
-          <a:p>
-            <a:r>
-              <a:rPr lang="pt-PT" dirty="0"/>
-              <a:t>Supervisor: Camila Teixeira</a:t>
-            </a:r>
-          </a:p>
-          <a:p>
-            <a:r>
-              <a:rPr lang="pt-PT" dirty="0"/>
-              <a:t>Orientador: Marílio Cardoso</a:t>
-            </a:r>
-          </a:p>
-          <a:p>
-            <a:r>
-              <a:rPr lang="pt-PT" dirty="0"/>
-              <a:t>Entidade acolhedora: </a:t>
-            </a:r>
-            <a:r>
-              <a:rPr lang="pt-PT" b="1" dirty="0" err="1"/>
-              <a:t>Tlantic</a:t>
-            </a:r>
-            <a:r>
-              <a:rPr lang="pt-PT" b="1" dirty="0"/>
-              <a:t> Portugal - Sistemas de Informação, S.A.</a:t>
-            </a:r>
-            <a:endParaRPr lang="pt-PT" dirty="0"/>
-          </a:p>
-          <a:p>
-            <a:r>
-              <a:rPr lang="pt-PT" dirty="0"/>
-              <a:t>Local e modo: Rua Manuel Pinto de Azevedo, n626, 1º Piso, 4100-320, Porto; Híbrido</a:t>
-            </a:r>
-          </a:p>
-          <a:p>
-            <a:endParaRPr lang="pt-PT" dirty="0"/>
-          </a:p>
-          <a:p>
-            <a:r>
-              <a:rPr lang="pt-PT" dirty="0"/>
-              <a:t>Matriz de stakeholders (opcional):</a:t>
-            </a:r>
-          </a:p>
-          <a:p>
-            <a:endParaRPr lang="pt-PT" dirty="0"/>
-          </a:p>
-          <a:p>
-            <a:endParaRPr lang="pt-PT" dirty="0"/>
-          </a:p>
-          <a:p>
-            <a:endParaRPr lang="pt-PT" dirty="0"/>
-          </a:p>
-        </p:txBody>
-      </p:sp>
-    </p:spTree>
-    <p:extLst>
-      <p:ext uri="{BB962C8B-B14F-4D97-AF65-F5344CB8AC3E}">
-        <p14:creationId xmlns:p14="http://schemas.microsoft.com/office/powerpoint/2010/main" val="2268314253"/>
-      </p:ext>
-    </p:extLst>
-  </p:cSld>
-  <p:clrMapOvr>
-    <a:masterClrMapping/>
-  </p:clrMapOvr>
-  <p:transition spd="med">
-    <p:fade/>
-  </p:transition>
-</p:sld>
-</file>
-
-<file path=ppt/slides/slide3.xml><?xml version="1.0" encoding="utf-8"?>
-<p:sld xmlns:a="http://schemas.openxmlformats.org/drawingml/2006/main" xmlns:r="http://schemas.openxmlformats.org/officeDocument/2006/relationships" xmlns:p="http://schemas.openxmlformats.org/presentationml/2006/main">
-  <p:cSld>
-    <p:spTree>
-      <p:nvGrpSpPr>
-        <p:cNvPr id="1" name=""/>
-        <p:cNvGrpSpPr/>
-        <p:nvPr/>
-      </p:nvGrpSpPr>
-      <p:grpSpPr>
-        <a:xfrm>
-          <a:off x="0" y="0"/>
-          <a:ext cx="0" cy="0"/>
-          <a:chOff x="0" y="0"/>
-          <a:chExt cx="0" cy="0"/>
-        </a:xfrm>
-      </p:grpSpPr>
-      <p:sp>
-        <p:nvSpPr>
-          <p:cNvPr id="2" name="Título 1">
-            <a:extLst>
-              <a:ext uri="{FF2B5EF4-FFF2-40B4-BE49-F238E27FC236}">
-                <a16:creationId xmlns:a16="http://schemas.microsoft.com/office/drawing/2014/main" id="{F1DF48B1-7E58-4369-B684-A45E85706E8A}"/>
-              </a:ext>
-            </a:extLst>
-          </p:cNvPr>
-          <p:cNvSpPr>
-            <a:spLocks noGrp="1"/>
-          </p:cNvSpPr>
-          <p:nvPr>
-            <p:ph type="title"/>
-          </p:nvPr>
-        </p:nvSpPr>
-        <p:spPr/>
-        <p:txBody>
-          <a:bodyPr/>
-          <a:lstStyle/>
-          <a:p>
-            <a:r>
-              <a:rPr lang="pt-PT" dirty="0"/>
-              <a:t>Necessidade / Problema a resolver</a:t>
-            </a:r>
-          </a:p>
-        </p:txBody>
-      </p:sp>
-      <p:sp>
-        <p:nvSpPr>
-          <p:cNvPr id="3" name="Marcador de Posição do Texto 2">
-            <a:extLst>
-              <a:ext uri="{FF2B5EF4-FFF2-40B4-BE49-F238E27FC236}">
-                <a16:creationId xmlns:a16="http://schemas.microsoft.com/office/drawing/2014/main" id="{7B141FE6-FB25-4452-8E5F-1B75475DFD11}"/>
-              </a:ext>
-            </a:extLst>
-          </p:cNvPr>
-          <p:cNvSpPr>
-            <a:spLocks noGrp="1"/>
-          </p:cNvSpPr>
-          <p:nvPr>
-            <p:ph type="body" idx="1"/>
-          </p:nvPr>
-        </p:nvSpPr>
-        <p:spPr>
-          <a:xfrm>
-            <a:off x="685800" y="1714488"/>
-            <a:ext cx="8534399" cy="4597102"/>
-          </a:xfrm>
-        </p:spPr>
-        <p:txBody>
-          <a:bodyPr/>
-          <a:lstStyle/>
-          <a:p>
-            <a:pPr fontAlgn="base"/>
-            <a:r>
-              <a:rPr lang="pt-PT" sz="1600" b="1" dirty="0">
-                <a:latin typeface="Arial" panose="020B0604020202020204" pitchFamily="34" charset="0"/>
-              </a:rPr>
-              <a:t> Descrição do problema</a:t>
-            </a:r>
-          </a:p>
-          <a:p>
-            <a:pPr lvl="1" fontAlgn="base"/>
-            <a:r>
-              <a:rPr lang="pt-PT" sz="1600" dirty="0">
-                <a:latin typeface="Arial" panose="020B0604020202020204" pitchFamily="34" charset="0"/>
-              </a:rPr>
-              <a:t>Situação Atual: descrever problema. </a:t>
-            </a:r>
-          </a:p>
-          <a:p>
-            <a:pPr lvl="1" fontAlgn="base"/>
-            <a:r>
-              <a:rPr lang="pt-PT" sz="1600" dirty="0">
-                <a:latin typeface="Arial" panose="020B0604020202020204" pitchFamily="34" charset="0"/>
-              </a:rPr>
-              <a:t>Podem ser utilizados fluxogramas, o outros diagramas como personas, </a:t>
-            </a:r>
-            <a:r>
-              <a:rPr lang="pt-PT" sz="1600" dirty="0" err="1">
-                <a:latin typeface="Arial" panose="020B0604020202020204" pitchFamily="34" charset="0"/>
-              </a:rPr>
-              <a:t>jouney</a:t>
-            </a:r>
-            <a:r>
-              <a:rPr lang="pt-PT" sz="1600" dirty="0">
-                <a:latin typeface="Arial" panose="020B0604020202020204" pitchFamily="34" charset="0"/>
-              </a:rPr>
-              <a:t> </a:t>
-            </a:r>
-            <a:r>
-              <a:rPr lang="pt-PT" sz="1600" dirty="0" err="1">
-                <a:latin typeface="Arial" panose="020B0604020202020204" pitchFamily="34" charset="0"/>
-              </a:rPr>
-              <a:t>map</a:t>
-            </a:r>
-            <a:r>
-              <a:rPr lang="pt-PT" sz="1600" dirty="0">
-                <a:latin typeface="Arial" panose="020B0604020202020204" pitchFamily="34" charset="0"/>
-              </a:rPr>
-              <a:t>, </a:t>
-            </a:r>
-            <a:r>
-              <a:rPr lang="pt-PT" sz="1600" dirty="0" err="1">
-                <a:latin typeface="Arial" panose="020B0604020202020204" pitchFamily="34" charset="0"/>
-              </a:rPr>
-              <a:t>empathy</a:t>
-            </a:r>
-            <a:r>
-              <a:rPr lang="pt-PT" sz="1600" dirty="0">
-                <a:latin typeface="Arial" panose="020B0604020202020204" pitchFamily="34" charset="0"/>
-              </a:rPr>
-              <a:t> </a:t>
-            </a:r>
-            <a:r>
-              <a:rPr lang="pt-PT" sz="1600" dirty="0" err="1">
-                <a:latin typeface="Arial" panose="020B0604020202020204" pitchFamily="34" charset="0"/>
-              </a:rPr>
-              <a:t>map</a:t>
-            </a:r>
-            <a:r>
-              <a:rPr lang="pt-PT" sz="1600" dirty="0">
-                <a:latin typeface="Arial" panose="020B0604020202020204" pitchFamily="34" charset="0"/>
-              </a:rPr>
-              <a:t>, </a:t>
-            </a:r>
-            <a:r>
-              <a:rPr lang="pt-PT" sz="1600" dirty="0" err="1">
-                <a:latin typeface="Arial" panose="020B0604020202020204" pitchFamily="34" charset="0"/>
-              </a:rPr>
-              <a:t>why</a:t>
-            </a:r>
-            <a:r>
-              <a:rPr lang="pt-PT" sz="1600" dirty="0">
-                <a:latin typeface="Arial" panose="020B0604020202020204" pitchFamily="34" charset="0"/>
-              </a:rPr>
-              <a:t> </a:t>
-            </a:r>
-            <a:r>
-              <a:rPr lang="pt-PT" sz="1600" dirty="0" err="1">
-                <a:latin typeface="Arial" panose="020B0604020202020204" pitchFamily="34" charset="0"/>
-              </a:rPr>
-              <a:t>tree</a:t>
-            </a:r>
-            <a:r>
-              <a:rPr lang="pt-PT" sz="1600" dirty="0">
-                <a:latin typeface="Arial" panose="020B0604020202020204" pitchFamily="34" charset="0"/>
-              </a:rPr>
-              <a:t>, etc.)</a:t>
-            </a:r>
-          </a:p>
-          <a:p>
-            <a:pPr lvl="1" fontAlgn="base"/>
-            <a:r>
-              <a:rPr lang="pt-PT" sz="1600" dirty="0">
-                <a:latin typeface="Arial" panose="020B0604020202020204" pitchFamily="34" charset="0"/>
-              </a:rPr>
-              <a:t>Métricas atuais </a:t>
-            </a:r>
-            <a:r>
-              <a:rPr lang="pt-PT" sz="1600" dirty="0" err="1">
-                <a:latin typeface="Arial" panose="020B0604020202020204" pitchFamily="34" charset="0"/>
-              </a:rPr>
-              <a:t>vs</a:t>
-            </a:r>
-            <a:r>
-              <a:rPr lang="pt-PT" sz="1600" dirty="0">
-                <a:latin typeface="Arial" panose="020B0604020202020204" pitchFamily="34" charset="0"/>
-              </a:rPr>
-              <a:t> futuras</a:t>
-            </a:r>
-          </a:p>
-          <a:p>
-            <a:pPr lvl="1" fontAlgn="base"/>
-            <a:r>
-              <a:rPr lang="pt-PT" sz="1600" dirty="0">
-                <a:latin typeface="Arial" panose="020B0604020202020204" pitchFamily="34" charset="0"/>
-              </a:rPr>
-              <a:t>Situação Futura esperada</a:t>
-            </a:r>
-          </a:p>
-          <a:p>
-            <a:pPr lvl="1" fontAlgn="base"/>
-            <a:endParaRPr lang="pt-PT" sz="1600" b="1" dirty="0">
-              <a:latin typeface="Arial" panose="020B0604020202020204" pitchFamily="34" charset="0"/>
-            </a:endParaRPr>
-          </a:p>
-          <a:p>
-            <a:pPr algn="l" rtl="0" fontAlgn="base"/>
-            <a:r>
-              <a:rPr lang="pt-PT" sz="1600" b="1" dirty="0">
-                <a:latin typeface="Arial" panose="020B0604020202020204" pitchFamily="34" charset="0"/>
-              </a:rPr>
-              <a:t>Objetivos Gerais</a:t>
-            </a:r>
-          </a:p>
-          <a:p>
-            <a:pPr algn="l" rtl="0" fontAlgn="base"/>
-            <a:r>
-              <a:rPr lang="pt-PT" sz="1600" b="1" i="0" dirty="0">
-                <a:solidFill>
-                  <a:srgbClr val="000000"/>
-                </a:solidFill>
-                <a:effectLst/>
-                <a:latin typeface="Arial" panose="020B0604020202020204" pitchFamily="34" charset="0"/>
-              </a:rPr>
-              <a:t>Objet</a:t>
-            </a:r>
-            <a:r>
-              <a:rPr lang="pt-PT" sz="1600" b="1" dirty="0">
-                <a:latin typeface="Arial" panose="020B0604020202020204" pitchFamily="34" charset="0"/>
-              </a:rPr>
-              <a:t>ivos Específicos</a:t>
-            </a:r>
-            <a:r>
-              <a:rPr lang="pt-PT" sz="1800" b="0" i="0" dirty="0">
-                <a:solidFill>
-                  <a:srgbClr val="000000"/>
-                </a:solidFill>
-                <a:effectLst/>
-                <a:latin typeface="Arial" panose="020B0604020202020204" pitchFamily="34" charset="0"/>
-              </a:rPr>
-              <a:t> </a:t>
-            </a:r>
-            <a:endParaRPr lang="pt-PT" sz="1600" b="0" i="0" dirty="0">
-              <a:solidFill>
-                <a:srgbClr val="000000"/>
-              </a:solidFill>
-              <a:effectLst/>
-              <a:latin typeface="Segoe UI" panose="020B0502040204020203" pitchFamily="34" charset="0"/>
-            </a:endParaRPr>
-          </a:p>
-          <a:p>
-            <a:pPr lvl="1" fontAlgn="base"/>
-            <a:endParaRPr lang="pt-PT" sz="1600" b="1" dirty="0">
-              <a:latin typeface="Arial" panose="020B0604020202020204" pitchFamily="34" charset="0"/>
-            </a:endParaRPr>
-          </a:p>
-          <a:p>
-            <a:pPr marL="114300" indent="0" algn="l" rtl="0" fontAlgn="base">
-              <a:buNone/>
-            </a:pPr>
-            <a:endParaRPr lang="pt-PT" sz="1800" b="0" i="0" dirty="0">
-              <a:solidFill>
-                <a:srgbClr val="000000"/>
-              </a:solidFill>
-              <a:effectLst/>
-              <a:latin typeface="Segoe UI" panose="020B0502040204020203" pitchFamily="34" charset="0"/>
-            </a:endParaRPr>
-          </a:p>
-          <a:p>
-            <a:pPr marL="114300" indent="0" algn="l" rtl="0" fontAlgn="base">
-              <a:buNone/>
-            </a:pPr>
-            <a:endParaRPr lang="pt-PT" sz="1800" dirty="0">
-              <a:latin typeface="Segoe UI" panose="020B0502040204020203" pitchFamily="34" charset="0"/>
-            </a:endParaRPr>
-          </a:p>
-          <a:p>
-            <a:pPr marL="114300" indent="0" algn="l" rtl="0" fontAlgn="base">
-              <a:buNone/>
-            </a:pPr>
-            <a:endParaRPr lang="pt-PT" sz="1800" b="0" i="0" dirty="0">
-              <a:solidFill>
-                <a:srgbClr val="000000"/>
-              </a:solidFill>
-              <a:effectLst/>
-              <a:latin typeface="Segoe UI" panose="020B0502040204020203" pitchFamily="34" charset="0"/>
-            </a:endParaRPr>
-          </a:p>
-          <a:p>
-            <a:endParaRPr lang="pt-PT" dirty="0"/>
-          </a:p>
-        </p:txBody>
-      </p:sp>
-    </p:spTree>
-    <p:extLst>
-      <p:ext uri="{BB962C8B-B14F-4D97-AF65-F5344CB8AC3E}">
-        <p14:creationId xmlns:p14="http://schemas.microsoft.com/office/powerpoint/2010/main" val="4008698049"/>
-      </p:ext>
-    </p:extLst>
-  </p:cSld>
-  <p:clrMapOvr>
-    <a:masterClrMapping/>
-  </p:clrMapOvr>
-  <p:transition spd="med">
-    <p:fade/>
-  </p:transition>
-</p:sld>
-</file>
-
-<file path=ppt/slides/slide4.xml><?xml version="1.0" encoding="utf-8"?>
-<p:sld xmlns:a="http://schemas.openxmlformats.org/drawingml/2006/main" xmlns:r="http://schemas.openxmlformats.org/officeDocument/2006/relationships" xmlns:p="http://schemas.openxmlformats.org/presentationml/2006/main">
-  <p:cSld>
-    <p:spTree>
-      <p:nvGrpSpPr>
-        <p:cNvPr id="1" name="">
-          <a:extLst>
-            <a:ext uri="{FF2B5EF4-FFF2-40B4-BE49-F238E27FC236}">
-              <a16:creationId xmlns:a16="http://schemas.microsoft.com/office/drawing/2014/main" id="{42C51E77-DB97-C929-CF17-3D644622463B}"/>
-            </a:ext>
-          </a:extLst>
-        </p:cNvPr>
-        <p:cNvGrpSpPr/>
-        <p:nvPr/>
-      </p:nvGrpSpPr>
-      <p:grpSpPr>
-        <a:xfrm>
-          <a:off x="0" y="0"/>
-          <a:ext cx="0" cy="0"/>
-          <a:chOff x="0" y="0"/>
-          <a:chExt cx="0" cy="0"/>
-        </a:xfrm>
-      </p:grpSpPr>
-      <p:sp>
-        <p:nvSpPr>
-          <p:cNvPr id="2" name="Título 1">
-            <a:extLst>
-              <a:ext uri="{FF2B5EF4-FFF2-40B4-BE49-F238E27FC236}">
-                <a16:creationId xmlns:a16="http://schemas.microsoft.com/office/drawing/2014/main" id="{6F88A072-F926-052D-27DB-2F71D7FCF174}"/>
-              </a:ext>
-            </a:extLst>
-          </p:cNvPr>
-          <p:cNvSpPr>
-            <a:spLocks noGrp="1"/>
-          </p:cNvSpPr>
-          <p:nvPr>
-            <p:ph type="title"/>
-          </p:nvPr>
-        </p:nvSpPr>
-        <p:spPr/>
-        <p:txBody>
-          <a:bodyPr/>
-          <a:lstStyle/>
-          <a:p>
-            <a:r>
-              <a:rPr lang="pt-PT" dirty="0"/>
-              <a:t>Contexto</a:t>
-            </a:r>
-          </a:p>
-        </p:txBody>
-      </p:sp>
-      <p:sp>
-        <p:nvSpPr>
-          <p:cNvPr id="3" name="Marcador de Posição do Texto 2">
-            <a:extLst>
-              <a:ext uri="{FF2B5EF4-FFF2-40B4-BE49-F238E27FC236}">
-                <a16:creationId xmlns:a16="http://schemas.microsoft.com/office/drawing/2014/main" id="{3B69BD01-50B0-F7CD-87DE-1626E8D8D3F6}"/>
-              </a:ext>
-            </a:extLst>
-          </p:cNvPr>
-          <p:cNvSpPr>
-            <a:spLocks noGrp="1"/>
-          </p:cNvSpPr>
-          <p:nvPr>
-            <p:ph type="body" idx="1"/>
-          </p:nvPr>
-        </p:nvSpPr>
-        <p:spPr>
-          <a:xfrm>
-            <a:off x="685800" y="1714488"/>
-            <a:ext cx="8534399" cy="4597102"/>
-          </a:xfrm>
-        </p:spPr>
-        <p:txBody>
-          <a:bodyPr/>
-          <a:lstStyle/>
-          <a:p>
-            <a:pPr fontAlgn="base"/>
-            <a:r>
-              <a:rPr lang="pt-PT" sz="1600" b="1" dirty="0">
-                <a:latin typeface="Arial" panose="020B0604020202020204" pitchFamily="34" charset="0"/>
-              </a:rPr>
-              <a:t> Contexto</a:t>
-            </a:r>
-          </a:p>
-          <a:p>
-            <a:pPr lvl="1" fontAlgn="base"/>
-            <a:r>
-              <a:rPr lang="pt-PT" sz="1600" b="1" dirty="0">
-                <a:latin typeface="Arial" panose="020B0604020202020204" pitchFamily="34" charset="0"/>
-              </a:rPr>
-              <a:t>Descrição da empresa</a:t>
-            </a:r>
-          </a:p>
-          <a:p>
-            <a:pPr lvl="1" fontAlgn="base"/>
-            <a:r>
-              <a:rPr lang="pt-PT" sz="1600" b="1" dirty="0">
-                <a:latin typeface="Arial" panose="020B0604020202020204" pitchFamily="34" charset="0"/>
-              </a:rPr>
-              <a:t>Contextualização na área de negócio</a:t>
-            </a:r>
-          </a:p>
-          <a:p>
-            <a:pPr marL="114300" indent="0" algn="l" rtl="0" fontAlgn="base">
-              <a:buNone/>
-            </a:pPr>
-            <a:endParaRPr lang="pt-PT" sz="1800" b="0" i="0" dirty="0">
-              <a:solidFill>
-                <a:srgbClr val="000000"/>
-              </a:solidFill>
-              <a:effectLst/>
-              <a:latin typeface="Segoe UI" panose="020B0502040204020203" pitchFamily="34" charset="0"/>
-            </a:endParaRPr>
-          </a:p>
-          <a:p>
-            <a:pPr fontAlgn="base"/>
-            <a:r>
-              <a:rPr lang="pt-PT" sz="1600" b="1" dirty="0">
-                <a:latin typeface="Arial" panose="020B0604020202020204" pitchFamily="34" charset="0"/>
-              </a:rPr>
-              <a:t>Estado da arte</a:t>
-            </a:r>
-          </a:p>
-          <a:p>
-            <a:pPr lvl="1" fontAlgn="base"/>
-            <a:r>
-              <a:rPr lang="pt-PT" sz="1600" b="1" dirty="0">
-                <a:latin typeface="Arial" panose="020B0604020202020204" pitchFamily="34" charset="0"/>
-              </a:rPr>
-              <a:t>Temas a pesquisar (revisão bibliográfica)</a:t>
-            </a:r>
-          </a:p>
-          <a:p>
-            <a:pPr lvl="1" fontAlgn="base"/>
-            <a:r>
-              <a:rPr lang="pt-PT" sz="1600" b="1" dirty="0">
-                <a:latin typeface="Arial" panose="020B0604020202020204" pitchFamily="34" charset="0"/>
-              </a:rPr>
-              <a:t>Tecnologias a utilizar (se aplicável)</a:t>
-            </a:r>
-          </a:p>
-          <a:p>
-            <a:pPr lvl="1"/>
-            <a:endParaRPr lang="pt-PT" dirty="0"/>
-          </a:p>
-        </p:txBody>
-      </p:sp>
-    </p:spTree>
-    <p:extLst>
-      <p:ext uri="{BB962C8B-B14F-4D97-AF65-F5344CB8AC3E}">
-        <p14:creationId xmlns:p14="http://schemas.microsoft.com/office/powerpoint/2010/main" val="2749455125"/>
-      </p:ext>
-    </p:extLst>
-  </p:cSld>
-  <p:clrMapOvr>
-    <a:masterClrMapping/>
-  </p:clrMapOvr>
-  <p:transition spd="med">
-    <p:fade/>
-  </p:transition>
-</p:sld>
-</file>
-
-<file path=ppt/slides/slide5.xml><?xml version="1.0" encoding="utf-8"?>
-<p:sld xmlns:a="http://schemas.openxmlformats.org/drawingml/2006/main" xmlns:r="http://schemas.openxmlformats.org/officeDocument/2006/relationships" xmlns:p="http://schemas.openxmlformats.org/presentationml/2006/main">
-  <p:cSld>
-    <p:spTree>
-      <p:nvGrpSpPr>
-        <p:cNvPr id="1" name=""/>
-        <p:cNvGrpSpPr/>
-        <p:nvPr/>
-      </p:nvGrpSpPr>
-      <p:grpSpPr>
-        <a:xfrm>
-          <a:off x="0" y="0"/>
-          <a:ext cx="0" cy="0"/>
-          <a:chOff x="0" y="0"/>
-          <a:chExt cx="0" cy="0"/>
-        </a:xfrm>
-      </p:grpSpPr>
-      <p:sp>
-        <p:nvSpPr>
-          <p:cNvPr id="2" name="Título 1">
-            <a:extLst>
-              <a:ext uri="{FF2B5EF4-FFF2-40B4-BE49-F238E27FC236}">
-                <a16:creationId xmlns:a16="http://schemas.microsoft.com/office/drawing/2014/main" id="{F1DF48B1-7E58-4369-B684-A45E85706E8A}"/>
-              </a:ext>
-            </a:extLst>
-          </p:cNvPr>
-          <p:cNvSpPr>
-            <a:spLocks noGrp="1"/>
-          </p:cNvSpPr>
-          <p:nvPr>
-            <p:ph type="title"/>
-          </p:nvPr>
-        </p:nvSpPr>
-        <p:spPr/>
-        <p:txBody>
-          <a:bodyPr/>
-          <a:lstStyle/>
-          <a:p>
-            <a:r>
-              <a:rPr lang="pt-PT" dirty="0"/>
-              <a:t>Solução a implementar </a:t>
-            </a:r>
-            <a:r>
-              <a:rPr lang="pt-PT" sz="2000" dirty="0"/>
-              <a:t>(se aplicável já nesta fase)</a:t>
-            </a:r>
-            <a:endParaRPr lang="pt-PT" dirty="0"/>
-          </a:p>
-        </p:txBody>
-      </p:sp>
-      <p:sp>
-        <p:nvSpPr>
-          <p:cNvPr id="3" name="Marcador de Posição do Texto 2">
-            <a:extLst>
-              <a:ext uri="{FF2B5EF4-FFF2-40B4-BE49-F238E27FC236}">
-                <a16:creationId xmlns:a16="http://schemas.microsoft.com/office/drawing/2014/main" id="{7B141FE6-FB25-4452-8E5F-1B75475DFD11}"/>
-              </a:ext>
-            </a:extLst>
-          </p:cNvPr>
-          <p:cNvSpPr>
-            <a:spLocks noGrp="1"/>
-          </p:cNvSpPr>
-          <p:nvPr>
-            <p:ph type="body" idx="1"/>
-          </p:nvPr>
-        </p:nvSpPr>
-        <p:spPr>
-          <a:xfrm>
-            <a:off x="685800" y="1714488"/>
-            <a:ext cx="8534399" cy="4597102"/>
-          </a:xfrm>
-        </p:spPr>
-        <p:txBody>
-          <a:bodyPr/>
-          <a:lstStyle/>
-          <a:p>
-            <a:pPr algn="l" rtl="0" fontAlgn="base"/>
-            <a:r>
-              <a:rPr lang="pt-PT" sz="1600" b="1" dirty="0">
-                <a:latin typeface="Arial" panose="020B0604020202020204" pitchFamily="34" charset="0"/>
-              </a:rPr>
-              <a:t>Descrição da solução </a:t>
-            </a:r>
-          </a:p>
-          <a:p>
-            <a:pPr marL="114300" indent="0" algn="l" rtl="0" fontAlgn="base">
-              <a:buNone/>
-            </a:pPr>
-            <a:r>
-              <a:rPr lang="pt-PT" sz="1200" b="0" i="0" dirty="0">
-                <a:solidFill>
-                  <a:srgbClr val="000000"/>
-                </a:solidFill>
-                <a:effectLst/>
-                <a:latin typeface="Arial" panose="020B0604020202020204" pitchFamily="34" charset="0"/>
-              </a:rPr>
-              <a:t> </a:t>
-            </a:r>
-            <a:endParaRPr lang="pt-PT" sz="1200" b="0" i="0" dirty="0">
-              <a:solidFill>
-                <a:srgbClr val="000000"/>
-              </a:solidFill>
-              <a:effectLst/>
-              <a:latin typeface="Segoe UI" panose="020B0502040204020203" pitchFamily="34" charset="0"/>
-            </a:endParaRPr>
-          </a:p>
-          <a:p>
-            <a:pPr marL="114300" indent="0" algn="l" rtl="0" fontAlgn="base">
-              <a:buNone/>
-            </a:pPr>
-            <a:r>
-              <a:rPr lang="pt-PT" sz="1200" b="0" i="0" dirty="0">
-                <a:solidFill>
-                  <a:srgbClr val="000000"/>
-                </a:solidFill>
-                <a:effectLst/>
-                <a:latin typeface="Arial" panose="020B0604020202020204" pitchFamily="34" charset="0"/>
-              </a:rPr>
-              <a:t> </a:t>
-            </a:r>
-            <a:endParaRPr lang="pt-PT" sz="1200" b="0" i="0" dirty="0">
-              <a:solidFill>
-                <a:srgbClr val="000000"/>
-              </a:solidFill>
-              <a:effectLst/>
-              <a:latin typeface="Segoe UI" panose="020B0502040204020203" pitchFamily="34" charset="0"/>
-            </a:endParaRPr>
-          </a:p>
-          <a:p>
-            <a:pPr algn="l" rtl="0" fontAlgn="base"/>
-            <a:r>
-              <a:rPr lang="pt-PT" sz="1600" b="1" i="0" dirty="0">
-                <a:solidFill>
-                  <a:srgbClr val="000000"/>
-                </a:solidFill>
-                <a:effectLst/>
-                <a:latin typeface="Arial" panose="020B0604020202020204" pitchFamily="34" charset="0"/>
-              </a:rPr>
-              <a:t>Elementos de Análise (Use Cases, </a:t>
-            </a:r>
-            <a:r>
-              <a:rPr lang="pt-PT" sz="1600" b="1" i="0" dirty="0" err="1">
-                <a:solidFill>
-                  <a:srgbClr val="000000"/>
-                </a:solidFill>
-                <a:effectLst/>
-                <a:latin typeface="Arial" panose="020B0604020202020204" pitchFamily="34" charset="0"/>
-              </a:rPr>
-              <a:t>User</a:t>
-            </a:r>
-            <a:r>
-              <a:rPr lang="pt-PT" sz="1600" b="1" i="0" dirty="0">
-                <a:solidFill>
-                  <a:srgbClr val="000000"/>
-                </a:solidFill>
-                <a:effectLst/>
-                <a:latin typeface="Arial" panose="020B0604020202020204" pitchFamily="34" charset="0"/>
-              </a:rPr>
-              <a:t> </a:t>
-            </a:r>
-            <a:r>
-              <a:rPr lang="pt-PT" sz="1600" b="1" i="0" dirty="0" err="1">
-                <a:solidFill>
-                  <a:srgbClr val="000000"/>
-                </a:solidFill>
-                <a:effectLst/>
-                <a:latin typeface="Arial" panose="020B0604020202020204" pitchFamily="34" charset="0"/>
-              </a:rPr>
-              <a:t>Stories</a:t>
-            </a:r>
-            <a:r>
-              <a:rPr lang="pt-PT" sz="1600" b="1" i="0" dirty="0">
-                <a:solidFill>
-                  <a:srgbClr val="000000"/>
-                </a:solidFill>
-                <a:effectLst/>
-                <a:latin typeface="Arial" panose="020B0604020202020204" pitchFamily="34" charset="0"/>
-              </a:rPr>
-              <a:t>, etc.)</a:t>
-            </a:r>
-            <a:r>
-              <a:rPr lang="pt-PT" sz="1600" b="0" i="0" dirty="0">
-                <a:solidFill>
-                  <a:srgbClr val="000000"/>
-                </a:solidFill>
-                <a:effectLst/>
-                <a:latin typeface="Arial" panose="020B0604020202020204" pitchFamily="34" charset="0"/>
-              </a:rPr>
-              <a:t> </a:t>
-            </a:r>
-            <a:endParaRPr lang="pt-PT" sz="1600" b="0" i="0" dirty="0">
-              <a:solidFill>
-                <a:srgbClr val="000000"/>
-              </a:solidFill>
-              <a:effectLst/>
-              <a:latin typeface="Segoe UI" panose="020B0502040204020203" pitchFamily="34" charset="0"/>
-            </a:endParaRPr>
-          </a:p>
-          <a:p>
-            <a:pPr marL="114300" indent="0" algn="l" rtl="0" fontAlgn="base">
-              <a:buNone/>
-            </a:pPr>
-            <a:endParaRPr lang="pt-PT" sz="1200" b="0" i="0" dirty="0">
-              <a:solidFill>
-                <a:srgbClr val="000000"/>
-              </a:solidFill>
-              <a:effectLst/>
-              <a:latin typeface="Segoe UI" panose="020B0502040204020203" pitchFamily="34" charset="0"/>
-            </a:endParaRPr>
-          </a:p>
-          <a:p>
-            <a:pPr marL="114300" indent="0" algn="l" rtl="0" fontAlgn="base">
-              <a:buNone/>
-            </a:pPr>
-            <a:endParaRPr lang="pt-PT" sz="1200" dirty="0">
-              <a:latin typeface="Segoe UI" panose="020B0502040204020203" pitchFamily="34" charset="0"/>
-            </a:endParaRPr>
-          </a:p>
-          <a:p>
-            <a:pPr marL="114300" indent="0" algn="l" rtl="0" fontAlgn="base">
-              <a:buNone/>
-            </a:pPr>
-            <a:endParaRPr lang="pt-PT" sz="1200" b="0" i="0" dirty="0">
-              <a:solidFill>
-                <a:srgbClr val="000000"/>
-              </a:solidFill>
-              <a:effectLst/>
-              <a:latin typeface="Segoe UI" panose="020B0502040204020203" pitchFamily="34" charset="0"/>
-            </a:endParaRPr>
-          </a:p>
-          <a:p>
-            <a:pPr algn="l" rtl="0" fontAlgn="base"/>
-            <a:r>
-              <a:rPr lang="pt-PT" sz="1600" b="1" dirty="0">
-                <a:latin typeface="Arial" panose="020B0604020202020204" pitchFamily="34" charset="0"/>
-              </a:rPr>
-              <a:t>Descrição Técnica</a:t>
-            </a:r>
-            <a:endParaRPr lang="pt-PT" sz="1800" b="0" i="0" dirty="0">
-              <a:solidFill>
-                <a:srgbClr val="000000"/>
-              </a:solidFill>
-              <a:effectLst/>
-              <a:latin typeface="Segoe UI" panose="020B0502040204020203" pitchFamily="34" charset="0"/>
-            </a:endParaRPr>
-          </a:p>
-          <a:p>
-            <a:pPr marL="114300" indent="0" algn="l" rtl="0" fontAlgn="base">
-              <a:buNone/>
-            </a:pPr>
-            <a:endParaRPr lang="pt-PT" sz="1200" dirty="0">
-              <a:latin typeface="Segoe UI" panose="020B0502040204020203" pitchFamily="34" charset="0"/>
-            </a:endParaRPr>
-          </a:p>
-          <a:p>
-            <a:pPr marL="114300" indent="0" algn="l" rtl="0" fontAlgn="base">
-              <a:buNone/>
-            </a:pPr>
-            <a:endParaRPr lang="pt-PT" sz="1200" b="0" i="0" dirty="0">
-              <a:solidFill>
-                <a:srgbClr val="000000"/>
-              </a:solidFill>
-              <a:effectLst/>
-              <a:latin typeface="Segoe UI" panose="020B0502040204020203" pitchFamily="34" charset="0"/>
-            </a:endParaRPr>
-          </a:p>
-          <a:p>
-            <a:pPr marL="114300" indent="0" algn="l" rtl="0" fontAlgn="base">
-              <a:buNone/>
-            </a:pPr>
-            <a:endParaRPr lang="pt-PT" sz="1200" dirty="0">
-              <a:latin typeface="Segoe UI" panose="020B0502040204020203" pitchFamily="34" charset="0"/>
-            </a:endParaRPr>
-          </a:p>
-          <a:p>
-            <a:pPr marL="114300" indent="0" algn="l" rtl="0" fontAlgn="base">
-              <a:buNone/>
-            </a:pPr>
-            <a:endParaRPr lang="pt-PT" sz="1200" b="0" i="0" dirty="0">
-              <a:solidFill>
-                <a:srgbClr val="000000"/>
-              </a:solidFill>
-              <a:effectLst/>
-              <a:latin typeface="Segoe UI" panose="020B0502040204020203" pitchFamily="34" charset="0"/>
-            </a:endParaRPr>
-          </a:p>
-          <a:p>
-            <a:endParaRPr lang="pt-PT" dirty="0"/>
-          </a:p>
-        </p:txBody>
-      </p:sp>
-    </p:spTree>
-    <p:extLst>
-      <p:ext uri="{BB962C8B-B14F-4D97-AF65-F5344CB8AC3E}">
-        <p14:creationId xmlns:p14="http://schemas.microsoft.com/office/powerpoint/2010/main" val="1575781085"/>
-      </p:ext>
-    </p:extLst>
-  </p:cSld>
-  <p:clrMapOvr>
-    <a:masterClrMapping/>
-  </p:clrMapOvr>
-  <p:transition spd="med">
-    <p:fade/>
-  </p:transition>
-</p:sld>
-</file>
-
-<file path=ppt/slides/slide6.xml><?xml version="1.0" encoding="utf-8"?>
-<p:sld xmlns:a="http://schemas.openxmlformats.org/drawingml/2006/main" xmlns:r="http://schemas.openxmlformats.org/officeDocument/2006/relationships" xmlns:p="http://schemas.openxmlformats.org/presentationml/2006/main">
-  <p:cSld>
-    <p:spTree>
-      <p:nvGrpSpPr>
-        <p:cNvPr id="1" name="Shape 87"/>
-        <p:cNvGrpSpPr/>
-        <p:nvPr/>
-      </p:nvGrpSpPr>
-      <p:grpSpPr>
-        <a:xfrm>
-          <a:off x="0" y="0"/>
-          <a:ext cx="0" cy="0"/>
-          <a:chOff x="0" y="0"/>
-          <a:chExt cx="0" cy="0"/>
-        </a:xfrm>
-      </p:grpSpPr>
-      <p:sp>
-        <p:nvSpPr>
-          <p:cNvPr id="88" name="Shape 88"/>
-          <p:cNvSpPr txBox="1">
-            <a:spLocks noGrp="1"/>
-          </p:cNvSpPr>
-          <p:nvPr>
-            <p:ph type="title"/>
-          </p:nvPr>
-        </p:nvSpPr>
-        <p:spPr>
-          <a:xfrm>
-            <a:off x="685800" y="1066799"/>
-            <a:ext cx="8534400" cy="5107757"/>
-          </a:xfrm>
-          <a:prstGeom prst="rect">
-            <a:avLst/>
-          </a:prstGeom>
-          <a:noFill/>
-          <a:ln>
-            <a:noFill/>
-          </a:ln>
-        </p:spPr>
-        <p:txBody>
-          <a:bodyPr wrap="square" lIns="90000" tIns="45700" rIns="91425" bIns="45700" anchor="t" anchorCtr="0">
-            <a:noAutofit/>
-          </a:bodyPr>
-          <a:lstStyle/>
-          <a:p>
-            <a:pPr marL="0" marR="0" algn="l" rtl="0" fontAlgn="t">
-              <a:spcBef>
-                <a:spcPts val="0"/>
-              </a:spcBef>
-              <a:spcAft>
-                <a:spcPts val="0"/>
-              </a:spcAft>
-            </a:pPr>
-            <a:r>
-              <a:rPr lang="pt-PT" dirty="0"/>
-              <a:t>Plano inicial (</a:t>
-            </a:r>
-            <a:r>
-              <a:rPr lang="pt-PT" sz="2400" b="0" dirty="0"/>
-              <a:t>ver </a:t>
-            </a:r>
-            <a:r>
-              <a:rPr lang="pt-PT" sz="2400" b="0" i="1" dirty="0" err="1"/>
-              <a:t>checklist</a:t>
-            </a:r>
-            <a:r>
-              <a:rPr lang="pt-PT" dirty="0"/>
-              <a:t>)</a:t>
-            </a:r>
-            <a:br>
-              <a:rPr lang="pt-PT" dirty="0"/>
-            </a:br>
-            <a:br>
-              <a:rPr lang="pt-PT" sz="1800" b="0" i="0" u="none" strike="noStrike" dirty="0">
-                <a:effectLst/>
-                <a:latin typeface="Arial" panose="020B0604020202020204" pitchFamily="34" charset="0"/>
-              </a:rPr>
-            </a:br>
-            <a:r>
-              <a:rPr lang="pt-PT" sz="1800" b="0" i="0" u="none" strike="noStrike" dirty="0">
-                <a:solidFill>
-                  <a:srgbClr val="000000"/>
-                </a:solidFill>
-                <a:effectLst/>
-                <a:latin typeface="Calibri" panose="020F0502020204030204" pitchFamily="34" charset="0"/>
-              </a:rPr>
-              <a:t> </a:t>
-            </a:r>
-            <a:br>
-              <a:rPr lang="pt-PT" sz="1800" b="0" i="0" u="none" strike="noStrike" dirty="0">
-                <a:effectLst/>
-                <a:latin typeface="Arial" panose="020B0604020202020204" pitchFamily="34" charset="0"/>
-              </a:rPr>
-            </a:br>
-            <a:r>
-              <a:rPr lang="pt-PT" sz="1800" b="0" i="0" u="none" strike="noStrike" dirty="0">
-                <a:solidFill>
-                  <a:srgbClr val="000000"/>
-                </a:solidFill>
-                <a:effectLst/>
-                <a:latin typeface="Calibri" panose="020F0502020204030204" pitchFamily="34" charset="0"/>
-              </a:rPr>
-              <a:t> </a:t>
-            </a:r>
-            <a:br>
-              <a:rPr lang="pt-PT" sz="1800" b="0" i="0" u="none" strike="noStrike" dirty="0">
-                <a:effectLst/>
-                <a:latin typeface="Arial" panose="020B0604020202020204" pitchFamily="34" charset="0"/>
-              </a:rPr>
-            </a:br>
-            <a:r>
-              <a:rPr lang="pt-PT" sz="1800" b="0" i="0" u="none" strike="noStrike" dirty="0">
-                <a:solidFill>
-                  <a:srgbClr val="000000"/>
-                </a:solidFill>
-                <a:effectLst/>
-                <a:latin typeface="Calibri" panose="020F0502020204030204" pitchFamily="34" charset="0"/>
-              </a:rPr>
-              <a:t> </a:t>
-            </a:r>
-            <a:br>
-              <a:rPr lang="pt-PT" sz="1800" b="0" i="0" u="none" strike="noStrike" dirty="0">
-                <a:effectLst/>
-                <a:latin typeface="Arial" panose="020B0604020202020204" pitchFamily="34" charset="0"/>
-              </a:rPr>
-            </a:br>
-            <a:r>
-              <a:rPr lang="pt-PT" sz="1800" b="0" i="0" u="none" strike="noStrike" dirty="0">
-                <a:solidFill>
-                  <a:srgbClr val="000000"/>
-                </a:solidFill>
-                <a:effectLst/>
-                <a:latin typeface="Calibri" panose="020F0502020204030204" pitchFamily="34" charset="0"/>
-              </a:rPr>
-              <a:t> </a:t>
-            </a:r>
-            <a:br>
-              <a:rPr lang="pt-PT" sz="1800" b="0" i="0" u="none" strike="noStrike" dirty="0">
-                <a:effectLst/>
-                <a:latin typeface="Arial" panose="020B0604020202020204" pitchFamily="34" charset="0"/>
-              </a:rPr>
-            </a:br>
-            <a:r>
-              <a:rPr lang="pt-PT" sz="1800" b="0" i="0" u="none" strike="noStrike" dirty="0">
-                <a:solidFill>
-                  <a:srgbClr val="000000"/>
-                </a:solidFill>
-                <a:effectLst/>
-                <a:latin typeface="Calibri" panose="020F0502020204030204" pitchFamily="34" charset="0"/>
-              </a:rPr>
-              <a:t> </a:t>
-            </a:r>
-            <a:br>
-              <a:rPr lang="pt-PT" sz="1800" b="0" i="0" u="none" strike="noStrike" dirty="0">
-                <a:effectLst/>
-                <a:latin typeface="Arial" panose="020B0604020202020204" pitchFamily="34" charset="0"/>
-              </a:rPr>
-            </a:br>
-            <a:r>
-              <a:rPr lang="pt-PT" sz="1800" b="0" i="0" u="none" strike="noStrike" dirty="0">
-                <a:solidFill>
-                  <a:srgbClr val="000000"/>
-                </a:solidFill>
-                <a:effectLst/>
-                <a:latin typeface="Calibri" panose="020F0502020204030204" pitchFamily="34" charset="0"/>
-              </a:rPr>
-              <a:t> </a:t>
-            </a:r>
-            <a:br>
-              <a:rPr lang="pt-PT" sz="1800" b="0" i="0" u="none" strike="noStrike" dirty="0">
-                <a:effectLst/>
-                <a:latin typeface="Arial" panose="020B0604020202020204" pitchFamily="34" charset="0"/>
-              </a:rPr>
-            </a:br>
-            <a:r>
-              <a:rPr lang="pt-PT" sz="1800" b="0" i="0" u="none" strike="noStrike" dirty="0">
-                <a:solidFill>
-                  <a:srgbClr val="000000"/>
-                </a:solidFill>
-                <a:effectLst/>
-                <a:latin typeface="Calibri" panose="020F0502020204030204" pitchFamily="34" charset="0"/>
-              </a:rPr>
-              <a:t> </a:t>
-            </a:r>
-            <a:br>
-              <a:rPr lang="pt-PT" sz="1800" b="0" i="0" u="none" strike="noStrike" dirty="0">
-                <a:effectLst/>
-                <a:latin typeface="Arial" panose="020B0604020202020204" pitchFamily="34" charset="0"/>
-              </a:rPr>
-            </a:br>
-            <a:r>
-              <a:rPr lang="pt-PT" sz="1800" b="0" i="0" u="none" strike="noStrike" dirty="0">
-                <a:solidFill>
-                  <a:srgbClr val="000000"/>
-                </a:solidFill>
-                <a:effectLst/>
-                <a:latin typeface="Calibri" panose="020F0502020204030204" pitchFamily="34" charset="0"/>
-              </a:rPr>
-              <a:t> </a:t>
-            </a:r>
-            <a:br>
-              <a:rPr lang="pt-PT" sz="1800" b="0" i="0" u="none" strike="noStrike" dirty="0">
-                <a:effectLst/>
-                <a:latin typeface="Arial" panose="020B0604020202020204" pitchFamily="34" charset="0"/>
-              </a:rPr>
-            </a:br>
-            <a:r>
-              <a:rPr lang="pt-PT" sz="1800" b="0" i="0" u="none" strike="noStrike" dirty="0">
-                <a:solidFill>
-                  <a:srgbClr val="000000"/>
-                </a:solidFill>
-                <a:effectLst/>
-                <a:latin typeface="Calibri" panose="020F0502020204030204" pitchFamily="34" charset="0"/>
-              </a:rPr>
-              <a:t> </a:t>
-            </a:r>
-            <a:br>
-              <a:rPr lang="pt-PT" sz="1800" b="0" i="0" u="none" strike="noStrike" dirty="0">
-                <a:effectLst/>
-                <a:latin typeface="Arial" panose="020B0604020202020204" pitchFamily="34" charset="0"/>
-              </a:rPr>
-            </a:br>
-            <a:r>
-              <a:rPr lang="pt-PT" sz="1800" b="0" i="0" u="none" strike="noStrike" dirty="0">
-                <a:solidFill>
-                  <a:srgbClr val="000000"/>
-                </a:solidFill>
-                <a:effectLst/>
-                <a:latin typeface="Calibri" panose="020F0502020204030204" pitchFamily="34" charset="0"/>
-              </a:rPr>
-              <a:t> </a:t>
-            </a:r>
-            <a:br>
-              <a:rPr lang="pt-PT" sz="1800" b="0" i="0" u="none" strike="noStrike" dirty="0">
-                <a:effectLst/>
-                <a:latin typeface="Arial" panose="020B0604020202020204" pitchFamily="34" charset="0"/>
-              </a:rPr>
-            </a:br>
-            <a:r>
-              <a:rPr lang="pt-PT" sz="1800" b="0" i="0" u="none" strike="noStrike" dirty="0">
-                <a:solidFill>
-                  <a:srgbClr val="000000"/>
-                </a:solidFill>
-                <a:effectLst/>
-                <a:latin typeface="Calibri" panose="020F0502020204030204" pitchFamily="34" charset="0"/>
-              </a:rPr>
-              <a:t> </a:t>
-            </a:r>
-            <a:br>
-              <a:rPr lang="pt-PT" sz="1800" b="0" i="0" u="none" strike="noStrike" dirty="0">
-                <a:effectLst/>
-                <a:latin typeface="Arial" panose="020B0604020202020204" pitchFamily="34" charset="0"/>
-              </a:rPr>
-            </a:br>
-            <a:r>
-              <a:rPr lang="pt-PT" sz="1800" b="0" i="0" u="none" strike="noStrike" dirty="0">
-                <a:solidFill>
-                  <a:srgbClr val="000000"/>
-                </a:solidFill>
-                <a:effectLst/>
-                <a:latin typeface="Calibri" panose="020F0502020204030204" pitchFamily="34" charset="0"/>
-              </a:rPr>
-              <a:t> </a:t>
-            </a:r>
-            <a:br>
-              <a:rPr lang="pt-PT" sz="1800" b="0" i="0" u="none" strike="noStrike" dirty="0">
-                <a:effectLst/>
-                <a:latin typeface="Arial" panose="020B0604020202020204" pitchFamily="34" charset="0"/>
-              </a:rPr>
-            </a:br>
-            <a:r>
-              <a:rPr lang="pt-PT" sz="1800" b="0" i="0" u="none" strike="noStrike" dirty="0">
-                <a:solidFill>
-                  <a:srgbClr val="000000"/>
-                </a:solidFill>
-                <a:effectLst/>
-                <a:latin typeface="Calibri" panose="020F0502020204030204" pitchFamily="34" charset="0"/>
-              </a:rPr>
-              <a:t> </a:t>
-            </a:r>
-            <a:br>
-              <a:rPr lang="pt-PT" sz="1800" b="0" i="0" u="none" strike="noStrike" dirty="0">
-                <a:effectLst/>
-                <a:latin typeface="Arial" panose="020B0604020202020204" pitchFamily="34" charset="0"/>
-              </a:rPr>
-            </a:br>
-            <a:r>
-              <a:rPr lang="pt-PT" sz="1800" b="0" i="0" u="none" strike="noStrike" dirty="0">
-                <a:solidFill>
-                  <a:srgbClr val="000000"/>
-                </a:solidFill>
-                <a:effectLst/>
-                <a:latin typeface="Calibri" panose="020F0502020204030204" pitchFamily="34" charset="0"/>
-              </a:rPr>
-              <a:t> </a:t>
-            </a:r>
-            <a:br>
-              <a:rPr lang="pt-PT" sz="1800" b="0" i="0" u="none" strike="noStrike" dirty="0">
-                <a:effectLst/>
-                <a:latin typeface="Arial" panose="020B0604020202020204" pitchFamily="34" charset="0"/>
-              </a:rPr>
-            </a:br>
-            <a:r>
-              <a:rPr lang="pt-PT" sz="1800" b="0" i="0" u="none" strike="noStrike" dirty="0">
-                <a:solidFill>
-                  <a:srgbClr val="000000"/>
-                </a:solidFill>
-                <a:effectLst/>
-                <a:latin typeface="Calibri" panose="020F0502020204030204" pitchFamily="34" charset="0"/>
-              </a:rPr>
-              <a:t> </a:t>
-            </a:r>
-            <a:br>
-              <a:rPr lang="pt-PT" sz="1800" b="0" i="0" u="none" strike="noStrike" dirty="0">
-                <a:effectLst/>
-                <a:latin typeface="Arial" panose="020B0604020202020204" pitchFamily="34" charset="0"/>
-              </a:rPr>
-            </a:br>
-            <a:r>
-              <a:rPr lang="pt-PT" sz="1800" b="0" i="0" u="none" strike="noStrike" dirty="0">
-                <a:solidFill>
-                  <a:srgbClr val="000000"/>
-                </a:solidFill>
-                <a:effectLst/>
-                <a:latin typeface="Calibri" panose="020F0502020204030204" pitchFamily="34" charset="0"/>
-              </a:rPr>
-              <a:t> </a:t>
-            </a:r>
-            <a:br>
-              <a:rPr lang="pt-PT" sz="1800" b="0" i="0" u="none" strike="noStrike" dirty="0">
-                <a:effectLst/>
-                <a:latin typeface="Arial" panose="020B0604020202020204" pitchFamily="34" charset="0"/>
-              </a:rPr>
-            </a:br>
-            <a:r>
-              <a:rPr lang="pt-PT" sz="1800" b="0" i="0" u="none" strike="noStrike" dirty="0">
-                <a:solidFill>
-                  <a:srgbClr val="000000"/>
-                </a:solidFill>
-                <a:effectLst/>
-                <a:latin typeface="Calibri" panose="020F0502020204030204" pitchFamily="34" charset="0"/>
-              </a:rPr>
-              <a:t> </a:t>
-            </a:r>
-            <a:br>
-              <a:rPr lang="pt-PT" sz="1800" b="0" i="0" u="none" strike="noStrike" dirty="0">
-                <a:effectLst/>
-                <a:latin typeface="Arial" panose="020B0604020202020204" pitchFamily="34" charset="0"/>
-              </a:rPr>
-            </a:br>
-            <a:r>
-              <a:rPr lang="pt-PT" sz="1800" b="0" i="0" u="none" strike="noStrike" dirty="0">
-                <a:solidFill>
-                  <a:srgbClr val="000000"/>
-                </a:solidFill>
-                <a:effectLst/>
-                <a:latin typeface="Calibri" panose="020F0502020204030204" pitchFamily="34" charset="0"/>
-              </a:rPr>
-              <a:t> </a:t>
-            </a:r>
-            <a:br>
-              <a:rPr lang="pt-PT" sz="1800" b="0" i="0" u="none" strike="noStrike" dirty="0">
-                <a:effectLst/>
-                <a:latin typeface="Arial" panose="020B0604020202020204" pitchFamily="34" charset="0"/>
-              </a:rPr>
-            </a:br>
-            <a:r>
-              <a:rPr lang="pt-PT" sz="1800" b="0" i="0" u="none" strike="noStrike" dirty="0">
-                <a:solidFill>
-                  <a:srgbClr val="000000"/>
-                </a:solidFill>
-                <a:effectLst/>
-                <a:latin typeface="Calibri" panose="020F0502020204030204" pitchFamily="34" charset="0"/>
-              </a:rPr>
-              <a:t> </a:t>
-            </a:r>
-            <a:br>
-              <a:rPr lang="pt-PT" sz="1800" b="0" i="0" u="none" strike="noStrike" dirty="0">
-                <a:effectLst/>
-                <a:latin typeface="Arial" panose="020B0604020202020204" pitchFamily="34" charset="0"/>
-              </a:rPr>
-            </a:br>
-            <a:r>
-              <a:rPr lang="pt-PT" sz="1800" b="0" i="0" u="none" strike="noStrike" dirty="0">
-                <a:solidFill>
-                  <a:srgbClr val="000000"/>
-                </a:solidFill>
-                <a:effectLst/>
-                <a:latin typeface="Calibri" panose="020F0502020204030204" pitchFamily="34" charset="0"/>
-              </a:rPr>
-              <a:t> </a:t>
-            </a:r>
-            <a:br>
-              <a:rPr lang="pt-PT" sz="1800" b="0" i="0" u="none" strike="noStrike" dirty="0">
-                <a:effectLst/>
-                <a:latin typeface="Arial" panose="020B0604020202020204" pitchFamily="34" charset="0"/>
-              </a:rPr>
-            </a:br>
-            <a:r>
-              <a:rPr lang="pt-PT" sz="1800" b="0" i="0" u="none" strike="noStrike" dirty="0">
-                <a:solidFill>
-                  <a:srgbClr val="000000"/>
-                </a:solidFill>
-                <a:effectLst/>
-                <a:latin typeface="Calibri" panose="020F0502020204030204" pitchFamily="34" charset="0"/>
-              </a:rPr>
-              <a:t> </a:t>
-            </a:r>
-            <a:br>
-              <a:rPr lang="pt-PT" sz="1800" b="0" i="0" u="none" strike="noStrike" dirty="0">
-                <a:effectLst/>
-                <a:latin typeface="Arial" panose="020B0604020202020204" pitchFamily="34" charset="0"/>
-              </a:rPr>
-            </a:br>
-            <a:r>
-              <a:rPr lang="pt-PT" sz="1800" b="0" i="0" u="none" strike="noStrike" dirty="0">
-                <a:solidFill>
-                  <a:srgbClr val="000000"/>
-                </a:solidFill>
-                <a:effectLst/>
-                <a:latin typeface="Calibri" panose="020F0502020204030204" pitchFamily="34" charset="0"/>
-              </a:rPr>
-              <a:t> </a:t>
-            </a:r>
-            <a:br>
-              <a:rPr lang="pt-PT" sz="1800" b="0" i="0" u="none" strike="noStrike" dirty="0">
-                <a:effectLst/>
-                <a:latin typeface="Arial" panose="020B0604020202020204" pitchFamily="34" charset="0"/>
-              </a:rPr>
-            </a:br>
-            <a:r>
-              <a:rPr lang="pt-PT" sz="1800" b="0" i="0" u="none" strike="noStrike" dirty="0">
-                <a:solidFill>
-                  <a:srgbClr val="000000"/>
-                </a:solidFill>
-                <a:effectLst/>
-                <a:latin typeface="Calibri" panose="020F0502020204030204" pitchFamily="34" charset="0"/>
-              </a:rPr>
-              <a:t> </a:t>
-            </a:r>
-            <a:br>
-              <a:rPr lang="pt-PT" sz="1800" b="0" i="0" u="none" strike="noStrike" dirty="0">
-                <a:effectLst/>
-                <a:latin typeface="Arial" panose="020B0604020202020204" pitchFamily="34" charset="0"/>
-              </a:rPr>
-            </a:br>
-            <a:r>
-              <a:rPr lang="pt-PT" sz="1800" b="0" i="0" u="none" strike="noStrike" dirty="0">
-                <a:solidFill>
-                  <a:srgbClr val="000000"/>
-                </a:solidFill>
-                <a:effectLst/>
-                <a:latin typeface="Calibri" panose="020F0502020204030204" pitchFamily="34" charset="0"/>
-              </a:rPr>
-              <a:t> </a:t>
-            </a:r>
-            <a:br>
-              <a:rPr lang="pt-PT" sz="1800" b="0" i="0" u="none" strike="noStrike" dirty="0">
-                <a:effectLst/>
-                <a:latin typeface="Arial" panose="020B0604020202020204" pitchFamily="34" charset="0"/>
-              </a:rPr>
-            </a:br>
-            <a:r>
-              <a:rPr lang="pt-PT" sz="1800" b="0" i="0" u="none" strike="noStrike" dirty="0">
-                <a:solidFill>
-                  <a:srgbClr val="000000"/>
-                </a:solidFill>
-                <a:effectLst/>
-                <a:latin typeface="Calibri" panose="020F0502020204030204" pitchFamily="34" charset="0"/>
-              </a:rPr>
-              <a:t> </a:t>
-            </a:r>
-            <a:br>
-              <a:rPr lang="pt-PT" sz="1800" b="0" i="0" u="none" strike="noStrike" dirty="0">
-                <a:effectLst/>
-                <a:latin typeface="Arial" panose="020B0604020202020204" pitchFamily="34" charset="0"/>
-              </a:rPr>
-            </a:br>
-            <a:r>
-              <a:rPr lang="pt-PT" sz="1800" b="0" i="0" u="none" strike="noStrike" dirty="0">
-                <a:solidFill>
-                  <a:srgbClr val="000000"/>
-                </a:solidFill>
-                <a:effectLst/>
-                <a:latin typeface="Calibri" panose="020F0502020204030204" pitchFamily="34" charset="0"/>
-              </a:rPr>
-              <a:t> </a:t>
-            </a:r>
-            <a:br>
-              <a:rPr lang="pt-PT" sz="1800" b="0" i="0" u="none" strike="noStrike" dirty="0">
-                <a:effectLst/>
-                <a:latin typeface="Arial" panose="020B0604020202020204" pitchFamily="34" charset="0"/>
-              </a:rPr>
-            </a:br>
-            <a:r>
-              <a:rPr lang="pt-PT" sz="1800" b="0" i="0" u="none" strike="noStrike" dirty="0">
-                <a:solidFill>
-                  <a:srgbClr val="000000"/>
-                </a:solidFill>
-                <a:effectLst/>
-                <a:latin typeface="Calibri" panose="020F0502020204030204" pitchFamily="34" charset="0"/>
-              </a:rPr>
-              <a:t> </a:t>
-            </a:r>
-            <a:br>
-              <a:rPr lang="pt-PT" sz="1800" b="0" i="0" u="none" strike="noStrike" dirty="0">
-                <a:effectLst/>
-                <a:latin typeface="Arial" panose="020B0604020202020204" pitchFamily="34" charset="0"/>
-              </a:rPr>
-            </a:br>
-            <a:r>
-              <a:rPr lang="pt-PT" sz="1800" b="0" i="0" u="none" strike="noStrike" dirty="0">
-                <a:solidFill>
-                  <a:srgbClr val="000000"/>
-                </a:solidFill>
-                <a:effectLst/>
-                <a:latin typeface="Calibri" panose="020F0502020204030204" pitchFamily="34" charset="0"/>
-              </a:rPr>
-              <a:t> </a:t>
-            </a:r>
-            <a:br>
-              <a:rPr lang="pt-PT" sz="1800" b="0" i="0" u="none" strike="noStrike" dirty="0">
-                <a:effectLst/>
-                <a:latin typeface="Arial" panose="020B0604020202020204" pitchFamily="34" charset="0"/>
-              </a:rPr>
-            </a:br>
-            <a:r>
-              <a:rPr lang="pt-PT" sz="1800" b="0" i="0" u="none" strike="noStrike" dirty="0">
-                <a:solidFill>
-                  <a:srgbClr val="000000"/>
-                </a:solidFill>
-                <a:effectLst/>
-                <a:latin typeface="Calibri" panose="020F0502020204030204" pitchFamily="34" charset="0"/>
-              </a:rPr>
-              <a:t> </a:t>
-            </a:r>
-            <a:br>
-              <a:rPr lang="pt-PT" sz="1800" b="0" i="0" u="none" strike="noStrike" dirty="0">
-                <a:effectLst/>
-                <a:latin typeface="Arial" panose="020B0604020202020204" pitchFamily="34" charset="0"/>
-              </a:rPr>
-            </a:br>
-            <a:endParaRPr lang="pt-PT" b="0" dirty="0">
-              <a:solidFill>
-                <a:schemeClr val="dk1"/>
-              </a:solidFill>
-            </a:endParaRPr>
-          </a:p>
-        </p:txBody>
-      </p:sp>
-      <p:sp>
-        <p:nvSpPr>
-          <p:cNvPr id="3" name="Marcador de Posição do Texto 2">
-            <a:extLst>
-              <a:ext uri="{FF2B5EF4-FFF2-40B4-BE49-F238E27FC236}">
-                <a16:creationId xmlns:a16="http://schemas.microsoft.com/office/drawing/2014/main" id="{237C9DBE-ABA0-974D-04B5-2BC87BDD8FB5}"/>
-              </a:ext>
-            </a:extLst>
-          </p:cNvPr>
-          <p:cNvSpPr>
-            <a:spLocks noGrp="1"/>
-          </p:cNvSpPr>
-          <p:nvPr>
-            <p:ph type="body" idx="1"/>
-          </p:nvPr>
-        </p:nvSpPr>
-        <p:spPr>
-          <a:xfrm>
-            <a:off x="685800" y="1714488"/>
-            <a:ext cx="8534399" cy="4597102"/>
-          </a:xfrm>
-        </p:spPr>
-        <p:txBody>
-          <a:bodyPr/>
-          <a:lstStyle/>
-          <a:p>
-            <a:pPr algn="l" rtl="0" fontAlgn="base"/>
-            <a:r>
-              <a:rPr lang="pt-PT" sz="1600" dirty="0">
-                <a:latin typeface="Arial" panose="020B0604020202020204" pitchFamily="34" charset="0"/>
-              </a:rPr>
-              <a:t>Colocar um </a:t>
-            </a:r>
-            <a:r>
-              <a:rPr lang="pt-PT" sz="1600" dirty="0" err="1">
-                <a:latin typeface="Arial" panose="020B0604020202020204" pitchFamily="34" charset="0"/>
-              </a:rPr>
-              <a:t>screenshot</a:t>
-            </a:r>
-            <a:r>
-              <a:rPr lang="pt-PT" sz="1600" dirty="0">
-                <a:latin typeface="Arial" panose="020B0604020202020204" pitchFamily="34" charset="0"/>
-              </a:rPr>
-              <a:t> do plano (podem ser utilizado os </a:t>
-            </a:r>
-            <a:r>
-              <a:rPr lang="pt-PT" sz="1600" dirty="0" err="1">
-                <a:latin typeface="Arial" panose="020B0604020202020204" pitchFamily="34" charset="0"/>
-              </a:rPr>
-              <a:t>templates</a:t>
-            </a:r>
-            <a:r>
-              <a:rPr lang="pt-PT" sz="1600" dirty="0">
-                <a:latin typeface="Arial" panose="020B0604020202020204" pitchFamily="34" charset="0"/>
-              </a:rPr>
-              <a:t> de project, </a:t>
-            </a:r>
-            <a:r>
-              <a:rPr lang="pt-PT" sz="1600" dirty="0" err="1">
-                <a:latin typeface="Arial" panose="020B0604020202020204" pitchFamily="34" charset="0"/>
-              </a:rPr>
-              <a:t>planner</a:t>
-            </a:r>
-            <a:r>
-              <a:rPr lang="pt-PT" sz="1600" dirty="0">
-                <a:latin typeface="Arial" panose="020B0604020202020204" pitchFamily="34" charset="0"/>
-              </a:rPr>
-              <a:t>, </a:t>
-            </a:r>
-            <a:r>
-              <a:rPr lang="pt-PT" sz="1600" dirty="0" err="1">
-                <a:latin typeface="Arial" panose="020B0604020202020204" pitchFamily="34" charset="0"/>
-              </a:rPr>
-              <a:t>excel</a:t>
-            </a:r>
-            <a:r>
-              <a:rPr lang="pt-PT" sz="1600" dirty="0">
-                <a:latin typeface="Arial" panose="020B0604020202020204" pitchFamily="34" charset="0"/>
-              </a:rPr>
-              <a:t> ou outro a utilizar pela entidade acolhedora)</a:t>
-            </a:r>
-            <a:endParaRPr lang="pt-PT" sz="1800" i="0" dirty="0">
-              <a:solidFill>
-                <a:srgbClr val="000000"/>
-              </a:solidFill>
-              <a:effectLst/>
-              <a:latin typeface="Segoe UI" panose="020B0502040204020203" pitchFamily="34" charset="0"/>
-            </a:endParaRPr>
-          </a:p>
-          <a:p>
-            <a:pPr marL="114300" indent="0" algn="l" rtl="0" fontAlgn="base">
-              <a:buNone/>
-            </a:pPr>
-            <a:endParaRPr lang="pt-PT" sz="1200" dirty="0">
-              <a:latin typeface="Segoe UI" panose="020B0502040204020203" pitchFamily="34" charset="0"/>
-            </a:endParaRPr>
-          </a:p>
-          <a:p>
-            <a:pPr marL="114300" indent="0" algn="l" rtl="0" fontAlgn="base">
-              <a:buNone/>
-            </a:pPr>
-            <a:endParaRPr lang="pt-PT" sz="1200" b="0" i="0" dirty="0">
-              <a:solidFill>
-                <a:srgbClr val="000000"/>
-              </a:solidFill>
-              <a:effectLst/>
-              <a:latin typeface="Segoe UI" panose="020B0502040204020203" pitchFamily="34" charset="0"/>
-            </a:endParaRPr>
-          </a:p>
-          <a:p>
-            <a:pPr marL="114300" indent="0" algn="l" rtl="0" fontAlgn="base">
-              <a:buNone/>
-            </a:pPr>
-            <a:endParaRPr lang="pt-PT" sz="1200" dirty="0">
-              <a:latin typeface="Segoe UI" panose="020B0502040204020203" pitchFamily="34" charset="0"/>
-            </a:endParaRPr>
-          </a:p>
-          <a:p>
-            <a:pPr marL="114300" indent="0" algn="l" rtl="0" fontAlgn="base">
-              <a:buNone/>
-            </a:pPr>
-            <a:endParaRPr lang="pt-PT" sz="1200" b="0" i="0" dirty="0">
-              <a:solidFill>
-                <a:srgbClr val="000000"/>
-              </a:solidFill>
-              <a:effectLst/>
-              <a:latin typeface="Segoe UI" panose="020B0502040204020203" pitchFamily="34" charset="0"/>
-            </a:endParaRPr>
-          </a:p>
-          <a:p>
-            <a:endParaRPr lang="pt-PT" dirty="0"/>
-          </a:p>
-        </p:txBody>
-      </p:sp>
-    </p:spTree>
-  </p:cSld>
-  <p:clrMapOvr>
-    <a:masterClrMapping/>
-  </p:clrMapOvr>
-  <p:transition spd="med">
-    <p:fade/>
-  </p:transition>
-</p:sld>
-</file>
-
-<file path=ppt/slides/slide7.xml><?xml version="1.0" encoding="utf-8"?>
+<file path=ppt/slides/slide10.xml><?xml version="1.0" encoding="utf-8"?>
 <p:sld xmlns:a="http://schemas.openxmlformats.org/drawingml/2006/main" xmlns:r="http://schemas.openxmlformats.org/officeDocument/2006/relationships" xmlns:p="http://schemas.openxmlformats.org/presentationml/2006/main">
   <p:cSld>
     <p:spTree>
@@ -13448,51 +12028,154 @@
           <a:bodyPr/>
           <a:lstStyle/>
           <a:p>
-            <a:pPr algn="l" rtl="0" fontAlgn="base"/>
-            <a:r>
-              <a:rPr lang="pt-PT" sz="1600" dirty="0">
-                <a:latin typeface="Arial" panose="020B0604020202020204" pitchFamily="34" charset="0"/>
-              </a:rPr>
-              <a:t>Colocar uma lista com identificação de riscos (pode ser utilizado o template)</a:t>
-            </a:r>
-            <a:endParaRPr lang="pt-PT" sz="1200" dirty="0">
-              <a:latin typeface="Segoe UI" panose="020B0502040204020203" pitchFamily="34" charset="0"/>
+            <a:r>
+              <a:rPr lang="pt-PT" sz="1300" b="1" dirty="0">
+                <a:solidFill>
+                  <a:srgbClr val="1856B8"/>
+                </a:solidFill>
+              </a:rPr>
+              <a:t>Riscos identificados e mitigação</a:t>
+            </a:r>
+          </a:p>
+          <a:p>
+            <a:endParaRPr lang="pt-PT" sz="1300" b="1" dirty="0">
+              <a:solidFill>
+                <a:srgbClr val="1856B8"/>
+              </a:solidFill>
             </a:endParaRPr>
           </a:p>
           <a:p>
-            <a:pPr marL="114300" indent="0" algn="l" rtl="0" fontAlgn="base">
-              <a:buNone/>
-            </a:pPr>
-            <a:endParaRPr lang="pt-PT" sz="1200" b="0" i="0" dirty="0">
+            <a:r>
+              <a:rPr lang="pt-PT" sz="1100" b="1" dirty="0">
+                <a:solidFill>
+                  <a:srgbClr val="0C2A59"/>
+                </a:solidFill>
+              </a:rPr>
+              <a:t>R1 — Alterações de regras sem atualizar documentação e testes  |  Impacto: Alto</a:t>
+            </a:r>
+          </a:p>
+          <a:p>
+            <a:pPr lvl="1"/>
+            <a:r>
+              <a:rPr lang="pt-PT" sz="1000" dirty="0">
+                <a:solidFill>
+                  <a:srgbClr val="5C6475"/>
+                </a:solidFill>
+              </a:rPr>
+              <a:t>Mitigação: atualizar artefactos funcionais no mesmo ciclo da mudança</a:t>
+            </a:r>
+          </a:p>
+          <a:p>
+            <a:endParaRPr lang="pt-PT" sz="1000" dirty="0">
               <a:solidFill>
-                <a:srgbClr val="000000"/>
+                <a:srgbClr val="5C6475"/>
               </a:solidFill>
-              <a:effectLst/>
-              <a:latin typeface="Segoe UI" panose="020B0502040204020203" pitchFamily="34" charset="0"/>
             </a:endParaRPr>
           </a:p>
           <a:p>
-            <a:pPr marL="114300" indent="0" algn="l" rtl="0" fontAlgn="base">
-              <a:buNone/>
-            </a:pPr>
-            <a:endParaRPr lang="pt-PT" sz="1200" dirty="0">
-              <a:latin typeface="Segoe UI" panose="020B0502040204020203" pitchFamily="34" charset="0"/>
+            <a:r>
+              <a:rPr lang="pt-PT" sz="1100" b="1" dirty="0">
+                <a:solidFill>
+                  <a:srgbClr val="0C2A59"/>
+                </a:solidFill>
+              </a:rPr>
+              <a:t>R2 — Erros em lógica de permissões e escalada indevida de privilégios  |  Impacto: Alto</a:t>
+            </a:r>
+          </a:p>
+          <a:p>
+            <a:pPr lvl="1"/>
+            <a:r>
+              <a:rPr lang="pt-PT" sz="1000" dirty="0">
+                <a:solidFill>
+                  <a:srgbClr val="5C6475"/>
+                </a:solidFill>
+              </a:rPr>
+              <a:t>Mitigação: validar operações por permissão efetiva, escopo e auditoria de grants/revokes</a:t>
+            </a:r>
+          </a:p>
+          <a:p>
+            <a:endParaRPr lang="pt-PT" sz="1000" dirty="0">
+              <a:solidFill>
+                <a:srgbClr val="5C6475"/>
+              </a:solidFill>
             </a:endParaRPr>
           </a:p>
           <a:p>
-            <a:pPr marL="114300" indent="0" algn="l" rtl="0" fontAlgn="base">
-              <a:buNone/>
-            </a:pPr>
-            <a:endParaRPr lang="pt-PT" sz="1200" b="0" i="0" dirty="0">
+            <a:r>
+              <a:rPr lang="pt-PT" sz="1100" b="1" dirty="0">
+                <a:solidFill>
+                  <a:srgbClr val="0C2A59"/>
+                </a:solidFill>
+              </a:rPr>
+              <a:t>R3 — Divergência entre hierarquia real e escopo operacional no sistema  |  Impacto: Médio</a:t>
+            </a:r>
+          </a:p>
+          <a:p>
+            <a:pPr lvl="1"/>
+            <a:r>
+              <a:rPr lang="pt-PT" sz="1000" dirty="0">
+                <a:solidFill>
+                  <a:srgbClr val="5C6475"/>
+                </a:solidFill>
+              </a:rPr>
+              <a:t>Mitigação: rever memberships, equipas e restrições de escopo com validação funcional</a:t>
+            </a:r>
+          </a:p>
+          <a:p>
+            <a:endParaRPr lang="pt-PT" sz="1000" dirty="0">
               <a:solidFill>
-                <a:srgbClr val="000000"/>
+                <a:srgbClr val="5C6475"/>
               </a:solidFill>
-              <a:effectLst/>
-              <a:latin typeface="Segoe UI" panose="020B0502040204020203" pitchFamily="34" charset="0"/>
             </a:endParaRPr>
           </a:p>
           <a:p>
-            <a:endParaRPr lang="pt-PT" dirty="0"/>
+            <a:r>
+              <a:rPr lang="pt-PT" sz="1100" b="1" dirty="0">
+                <a:solidFill>
+                  <a:srgbClr val="0C2A59"/>
+                </a:solidFill>
+              </a:rPr>
+              <a:t>R4 — Atraso na validação com stakeholders-chave  |  Impacto: Alto</a:t>
+            </a:r>
+          </a:p>
+          <a:p>
+            <a:pPr lvl="1"/>
+            <a:r>
+              <a:rPr lang="pt-PT" sz="1000" dirty="0">
+                <a:solidFill>
+                  <a:srgbClr val="5C6475"/>
+                </a:solidFill>
+              </a:rPr>
+              <a:t>Mitigação: antecipar recolha de feedback e aplicar time-box de revisão</a:t>
+            </a:r>
+          </a:p>
+          <a:p>
+            <a:endParaRPr lang="pt-PT" sz="1000" dirty="0">
+              <a:solidFill>
+                <a:srgbClr val="5C6475"/>
+              </a:solidFill>
+            </a:endParaRPr>
+          </a:p>
+          <a:p>
+            <a:r>
+              <a:rPr lang="pt-PT" sz="1100" b="1" dirty="0">
+                <a:solidFill>
+                  <a:srgbClr val="0C2A59"/>
+                </a:solidFill>
+              </a:rPr>
+              <a:t>R5 — Acumulação de bugs críticos perto da entrega final  |  Impacto: Alto</a:t>
+            </a:r>
+          </a:p>
+          <a:p>
+            <a:pPr lvl="1"/>
+            <a:r>
+              <a:rPr lang="pt-PT" sz="1000" dirty="0">
+                <a:solidFill>
+                  <a:srgbClr val="5C6475"/>
+                </a:solidFill>
+              </a:rPr>
+              <a:t>Mitigação: reservar janela de hardening; priorizar correção de bloqueadores</a:t>
+            </a:r>
           </a:p>
         </p:txBody>
       </p:sp>
@@ -13512,7 +12195,7 @@
 </p:sld>
 </file>
 
-<file path=ppt/slides/slide8.xml><?xml version="1.0" encoding="utf-8"?>
+<file path=ppt/slides/slide11.xml><?xml version="1.0" encoding="utf-8"?>
 <p:sld xmlns:a="http://schemas.openxmlformats.org/drawingml/2006/main" xmlns:r="http://schemas.openxmlformats.org/officeDocument/2006/relationships" xmlns:p="http://schemas.openxmlformats.org/presentationml/2006/main">
   <p:cSld>
     <p:spTree>
@@ -13585,7 +12268,7 @@
         <p:spPr>
           <a:xfrm>
             <a:off x="685800" y="1797287"/>
-            <a:ext cx="8363932" cy="1384995"/>
+            <a:ext cx="8363932" cy="1169551"/>
           </a:xfrm>
           <a:prstGeom prst="rect">
             <a:avLst/>
@@ -13597,91 +12280,69 @@
           </a:bodyPr>
           <a:lstStyle/>
           <a:p>
-            <a:pPr marL="342900" fontAlgn="ctr">
-              <a:buFont typeface="Arial" panose="020B0604020202020204" pitchFamily="34" charset="0"/>
-              <a:buChar char="•"/>
-            </a:pPr>
-            <a:r>
-              <a:rPr lang="pt-PT" dirty="0">
-                <a:latin typeface="Arial" panose="020B0604020202020204" pitchFamily="34" charset="0"/>
-              </a:rPr>
-              <a:t> Listar os ficheiros colocados (pelo menos o plano e o </a:t>
-            </a:r>
-            <a:r>
-              <a:rPr lang="pt-PT" dirty="0" err="1">
-                <a:latin typeface="Arial" panose="020B0604020202020204" pitchFamily="34" charset="0"/>
-              </a:rPr>
-              <a:t>ppt</a:t>
-            </a:r>
-            <a:r>
-              <a:rPr lang="pt-PT" dirty="0">
-                <a:latin typeface="Arial" panose="020B0604020202020204" pitchFamily="34" charset="0"/>
-              </a:rPr>
-              <a:t>) </a:t>
-            </a:r>
-            <a:endParaRPr lang="pt-PT" dirty="0">
-              <a:latin typeface="Calibri" panose="020F0502020204030204" pitchFamily="34" charset="0"/>
+            <a:r>
+              <a:rPr lang="pt-PT" sz="1300" b="1" dirty="0">
+                <a:solidFill>
+                  <a:srgbClr val="1856B8"/>
+                </a:solidFill>
+              </a:rPr>
+              <a:t>Ficheiros incluídos na pasta Ponto de Controlo 2</a:t>
+            </a:r>
+          </a:p>
+          <a:p>
+            <a:endParaRPr lang="pt-PT" sz="1300" b="1" dirty="0">
+              <a:solidFill>
+                <a:srgbClr val="1856B8"/>
+              </a:solidFill>
             </a:endParaRPr>
           </a:p>
           <a:p>
-            <a:pPr marL="342900" fontAlgn="ctr">
-              <a:buFont typeface="Arial" panose="020B0604020202020204" pitchFamily="34" charset="0"/>
-              <a:buChar char="•"/>
-            </a:pPr>
-            <a:r>
-              <a:rPr lang="pt-PT" dirty="0">
-                <a:effectLst/>
-                <a:latin typeface="Calibri" panose="020F0502020204030204" pitchFamily="34" charset="0"/>
-              </a:rPr>
-              <a:t> </a:t>
-            </a:r>
-          </a:p>
-          <a:p>
-            <a:pPr marL="342900" fontAlgn="ctr">
-              <a:buFont typeface="Arial" panose="020B0604020202020204" pitchFamily="34" charset="0"/>
-              <a:buChar char="•"/>
-            </a:pPr>
-            <a:r>
-              <a:rPr lang="pt-PT" dirty="0">
-                <a:latin typeface="Calibri" panose="020F0502020204030204" pitchFamily="34" charset="0"/>
-              </a:rPr>
-              <a:t> </a:t>
-            </a:r>
-          </a:p>
-          <a:p>
-            <a:pPr marL="342900" fontAlgn="ctr">
-              <a:buFont typeface="Arial" panose="020B0604020202020204" pitchFamily="34" charset="0"/>
-              <a:buChar char="•"/>
-            </a:pPr>
-            <a:r>
-              <a:rPr lang="pt-PT" dirty="0">
-                <a:effectLst/>
-                <a:latin typeface="Calibri" panose="020F0502020204030204" pitchFamily="34" charset="0"/>
-              </a:rPr>
-              <a:t> </a:t>
-            </a:r>
-          </a:p>
-          <a:p>
-            <a:pPr marL="342900" fontAlgn="ctr">
-              <a:buFont typeface="Arial" panose="020B0604020202020204" pitchFamily="34" charset="0"/>
-              <a:buChar char="•"/>
-            </a:pPr>
-            <a:r>
-              <a:rPr lang="pt-PT" dirty="0">
-                <a:latin typeface="Calibri" panose="020F0502020204030204" pitchFamily="34" charset="0"/>
-              </a:rPr>
-              <a:t> </a:t>
-            </a:r>
-          </a:p>
-          <a:p>
-            <a:pPr marL="342900" fontAlgn="ctr">
-              <a:buFont typeface="Arial" panose="020B0604020202020204" pitchFamily="34" charset="0"/>
-              <a:buChar char="•"/>
-            </a:pPr>
-            <a:endParaRPr lang="pt-PT" dirty="0">
-              <a:effectLst/>
-              <a:latin typeface="Calibri" panose="020F0502020204030204" pitchFamily="34" charset="0"/>
-            </a:endParaRPr>
+            <a:r>
+              <a:rPr lang="pt-PT" sz="1100" dirty="0">
+                <a:solidFill>
+                  <a:srgbClr val="1A1A2E"/>
+                </a:solidFill>
+              </a:rPr>
+              <a:t>PROES_PC2_2025_2026.pptx  -  apresentação do ponto de controlo 2</a:t>
+            </a:r>
+          </a:p>
+          <a:p>
+            <a:r>
+              <a:rPr lang="pt-PT" sz="1100" dirty="0">
+                <a:solidFill>
+                  <a:srgbClr val="1A1A2E"/>
+                </a:solidFill>
+              </a:rPr>
+              <a:t>PROES_PC2_2025_2026.tex  - do documento de apoio</a:t>
+            </a:r>
+          </a:p>
+          <a:p>
+            <a:r>
+              <a:rPr lang="pt-PT" sz="1100" dirty="0">
+                <a:solidFill>
+                  <a:srgbClr val="1A1A2E"/>
+                </a:solidFill>
+              </a:rPr>
+              <a:t>gantt_chart_pc2.xlsx  -  plano inicial e cronograma do projeto</a:t>
+            </a:r>
+          </a:p>
+          <a:p>
+            <a:r>
+              <a:rPr lang="pt-PT" sz="1100" dirty="0" err="1">
+                <a:solidFill>
+                  <a:srgbClr val="1A1A2E"/>
+                </a:solidFill>
+              </a:rPr>
+              <a:t>REGRAS_PERFIS_E_FERIAS.tex</a:t>
+            </a:r>
+            <a:r>
+              <a:rPr lang="pt-PT" sz="1100" dirty="0">
+                <a:solidFill>
+                  <a:srgbClr val="1A1A2E"/>
+                </a:solidFill>
+              </a:rPr>
+              <a:t>  -  documento de regras funcionais do domínio</a:t>
+            </a:r>
           </a:p>
         </p:txBody>
       </p:sp>
@@ -13838,7 +12499,7 @@
         <p:spPr>
           <a:xfrm>
             <a:off x="771034" y="3936477"/>
-            <a:ext cx="8363932" cy="1384995"/>
+            <a:ext cx="8363932" cy="461665"/>
           </a:xfrm>
           <a:prstGeom prst="rect">
             <a:avLst/>
@@ -13850,91 +12511,24 @@
           </a:bodyPr>
           <a:lstStyle/>
           <a:p>
-            <a:pPr marL="342900" fontAlgn="ctr">
-              <a:buFont typeface="Arial" panose="020B0604020202020204" pitchFamily="34" charset="0"/>
-              <a:buChar char="•"/>
-            </a:pPr>
-            <a:r>
-              <a:rPr lang="pt-PT" dirty="0">
-                <a:latin typeface="Arial" panose="020B0604020202020204" pitchFamily="34" charset="0"/>
-              </a:rPr>
-              <a:t> Listar alterações ao canal que tenham efetuado (criação de novas </a:t>
-            </a:r>
-            <a:r>
-              <a:rPr lang="pt-PT" dirty="0" err="1">
-                <a:latin typeface="Arial" panose="020B0604020202020204" pitchFamily="34" charset="0"/>
-              </a:rPr>
-              <a:t>tabs</a:t>
-            </a:r>
-            <a:r>
-              <a:rPr lang="pt-PT" dirty="0">
-                <a:latin typeface="Arial" panose="020B0604020202020204" pitchFamily="34" charset="0"/>
-              </a:rPr>
-              <a:t>, novas apps, etc.)</a:t>
-            </a:r>
-            <a:endParaRPr lang="pt-PT" dirty="0">
-              <a:latin typeface="Calibri" panose="020F0502020204030204" pitchFamily="34" charset="0"/>
-            </a:endParaRPr>
-          </a:p>
-          <a:p>
-            <a:pPr marL="342900" fontAlgn="ctr">
-              <a:buFont typeface="Arial" panose="020B0604020202020204" pitchFamily="34" charset="0"/>
-              <a:buChar char="•"/>
-            </a:pPr>
-            <a:r>
-              <a:rPr lang="pt-PT" dirty="0">
-                <a:effectLst/>
-                <a:latin typeface="Calibri" panose="020F0502020204030204" pitchFamily="34" charset="0"/>
-              </a:rPr>
-              <a:t> </a:t>
-            </a:r>
-          </a:p>
-          <a:p>
-            <a:pPr marL="342900" fontAlgn="ctr">
-              <a:buFont typeface="Arial" panose="020B0604020202020204" pitchFamily="34" charset="0"/>
-              <a:buChar char="•"/>
-            </a:pPr>
-            <a:r>
-              <a:rPr lang="pt-PT" dirty="0">
-                <a:latin typeface="Calibri" panose="020F0502020204030204" pitchFamily="34" charset="0"/>
-              </a:rPr>
-              <a:t> </a:t>
-            </a:r>
-          </a:p>
-          <a:p>
-            <a:pPr marL="342900" fontAlgn="ctr">
-              <a:buFont typeface="Arial" panose="020B0604020202020204" pitchFamily="34" charset="0"/>
-              <a:buChar char="•"/>
-            </a:pPr>
-            <a:r>
-              <a:rPr lang="pt-PT" dirty="0">
-                <a:effectLst/>
-                <a:latin typeface="Calibri" panose="020F0502020204030204" pitchFamily="34" charset="0"/>
-              </a:rPr>
-              <a:t> </a:t>
-            </a:r>
-          </a:p>
-          <a:p>
-            <a:pPr marL="342900" fontAlgn="ctr">
-              <a:buFont typeface="Arial" panose="020B0604020202020204" pitchFamily="34" charset="0"/>
-              <a:buChar char="•"/>
-            </a:pPr>
-            <a:r>
-              <a:rPr lang="pt-PT" dirty="0">
-                <a:latin typeface="Calibri" panose="020F0502020204030204" pitchFamily="34" charset="0"/>
-              </a:rPr>
-              <a:t> </a:t>
-            </a:r>
-          </a:p>
-          <a:p>
-            <a:pPr marL="342900" fontAlgn="ctr">
-              <a:buFont typeface="Arial" panose="020B0604020202020204" pitchFamily="34" charset="0"/>
-              <a:buChar char="•"/>
-            </a:pPr>
-            <a:endParaRPr lang="pt-PT" dirty="0">
-              <a:effectLst/>
-              <a:latin typeface="Calibri" panose="020F0502020204030204" pitchFamily="34" charset="0"/>
-            </a:endParaRPr>
+            <a:r>
+              <a:rPr lang="pt-PT" sz="1300" b="1" dirty="0">
+                <a:solidFill>
+                  <a:srgbClr val="1856B8"/>
+                </a:solidFill>
+              </a:rPr>
+              <a:t>Alterações ao canal do Teams</a:t>
+            </a:r>
+          </a:p>
+          <a:p>
+            <a:r>
+              <a:rPr lang="pt-PT" sz="1100" dirty="0">
+                <a:solidFill>
+                  <a:srgbClr val="1A1A2E"/>
+                </a:solidFill>
+              </a:rPr>
+              <a:t>Não foram efetuadas alterações de tabs ou apps neste ponto de controlo.</a:t>
+            </a:r>
           </a:p>
         </p:txBody>
       </p:sp>
@@ -13944,6 +12538,2771 @@
         <p14:creationId xmlns:p14="http://schemas.microsoft.com/office/powerpoint/2010/main" val="2067733268"/>
       </p:ext>
     </p:extLst>
+  </p:cSld>
+  <p:clrMapOvr>
+    <a:masterClrMapping/>
+  </p:clrMapOvr>
+  <p:transition spd="med">
+    <p:fade/>
+  </p:transition>
+</p:sld>
+</file>
+
+<file path=ppt/slides/slide2.xml><?xml version="1.0" encoding="utf-8"?>
+<p:sld xmlns:a="http://schemas.openxmlformats.org/drawingml/2006/main" xmlns:r="http://schemas.openxmlformats.org/officeDocument/2006/relationships" xmlns:p="http://schemas.openxmlformats.org/presentationml/2006/main">
+  <p:cSld>
+    <p:spTree>
+      <p:nvGrpSpPr>
+        <p:cNvPr id="1" name=""/>
+        <p:cNvGrpSpPr/>
+        <p:nvPr/>
+      </p:nvGrpSpPr>
+      <p:grpSpPr>
+        <a:xfrm>
+          <a:off x="0" y="0"/>
+          <a:ext cx="0" cy="0"/>
+          <a:chOff x="0" y="0"/>
+          <a:chExt cx="0" cy="0"/>
+        </a:xfrm>
+      </p:grpSpPr>
+      <p:sp>
+        <p:nvSpPr>
+          <p:cNvPr id="2" name="Título 1">
+            <a:extLst>
+              <a:ext uri="{FF2B5EF4-FFF2-40B4-BE49-F238E27FC236}">
+                <a16:creationId xmlns:a16="http://schemas.microsoft.com/office/drawing/2014/main" id="{F1DF48B1-7E58-4369-B684-A45E85706E8A}"/>
+              </a:ext>
+            </a:extLst>
+          </p:cNvPr>
+          <p:cNvSpPr>
+            <a:spLocks noGrp="1"/>
+          </p:cNvSpPr>
+          <p:nvPr>
+            <p:ph type="title"/>
+          </p:nvPr>
+        </p:nvSpPr>
+        <p:spPr/>
+        <p:txBody>
+          <a:bodyPr/>
+          <a:lstStyle/>
+          <a:p>
+            <a:r>
+              <a:rPr lang="pt-PT" dirty="0"/>
+              <a:t>Identificação e stakeholders</a:t>
+            </a:r>
+          </a:p>
+        </p:txBody>
+      </p:sp>
+      <p:sp>
+        <p:nvSpPr>
+          <p:cNvPr id="3" name="Marcador de Posição do Texto 2">
+            <a:extLst>
+              <a:ext uri="{FF2B5EF4-FFF2-40B4-BE49-F238E27FC236}">
+                <a16:creationId xmlns:a16="http://schemas.microsoft.com/office/drawing/2014/main" id="{7B141FE6-FB25-4452-8E5F-1B75475DFD11}"/>
+              </a:ext>
+            </a:extLst>
+          </p:cNvPr>
+          <p:cNvSpPr>
+            <a:spLocks noGrp="1"/>
+          </p:cNvSpPr>
+          <p:nvPr>
+            <p:ph type="body" idx="1"/>
+          </p:nvPr>
+        </p:nvSpPr>
+        <p:spPr/>
+        <p:txBody>
+          <a:bodyPr/>
+          <a:lstStyle/>
+          <a:p>
+            <a:r>
+              <a:rPr lang="pt-PT" sz="1300" b="1" dirty="0">
+                <a:solidFill>
+                  <a:srgbClr val="1856B8"/>
+                </a:solidFill>
+              </a:rPr>
+              <a:t>Identificação do aluno e entidade</a:t>
+            </a:r>
+          </a:p>
+          <a:p>
+            <a:r>
+              <a:rPr lang="pt-PT" sz="1100" dirty="0">
+                <a:solidFill>
+                  <a:srgbClr val="1A1A2E"/>
+                </a:solidFill>
+              </a:rPr>
+              <a:t>Aluno: Patrick Dias Mendes da Costa</a:t>
+            </a:r>
+          </a:p>
+          <a:p>
+            <a:r>
+              <a:rPr lang="pt-PT" sz="1100" dirty="0">
+                <a:solidFill>
+                  <a:srgbClr val="1A1A2E"/>
+                </a:solidFill>
+              </a:rPr>
+              <a:t>Supervisor: Camila Teixeira</a:t>
+            </a:r>
+          </a:p>
+          <a:p>
+            <a:r>
+              <a:rPr lang="pt-PT" sz="1100" dirty="0">
+                <a:solidFill>
+                  <a:srgbClr val="1A1A2E"/>
+                </a:solidFill>
+              </a:rPr>
+              <a:t>Orientador: Marílio Cardoso</a:t>
+            </a:r>
+          </a:p>
+          <a:p>
+            <a:r>
+              <a:rPr lang="pt-PT" sz="1100" dirty="0">
+                <a:solidFill>
+                  <a:srgbClr val="1A1A2E"/>
+                </a:solidFill>
+              </a:rPr>
+              <a:t>Entidade acolhedora: Tlantic Portugal - Sistemas de Informação, S.A.</a:t>
+            </a:r>
+          </a:p>
+          <a:p>
+            <a:r>
+              <a:rPr lang="pt-PT" sz="1100" dirty="0">
+                <a:solidFill>
+                  <a:srgbClr val="1A1A2E"/>
+                </a:solidFill>
+              </a:rPr>
+              <a:t>Local e modo: Porto - regime híbrido</a:t>
+            </a:r>
+          </a:p>
+          <a:p>
+            <a:endParaRPr lang="pt-PT" sz="1100" dirty="0">
+              <a:solidFill>
+                <a:srgbClr val="1A1A2E"/>
+              </a:solidFill>
+            </a:endParaRPr>
+          </a:p>
+          <a:p>
+            <a:r>
+              <a:rPr lang="pt-PT" sz="1300" b="1" dirty="0">
+                <a:solidFill>
+                  <a:srgbClr val="1856B8"/>
+                </a:solidFill>
+              </a:rPr>
+              <a:t>Matriz de stakeholders</a:t>
+            </a:r>
+          </a:p>
+          <a:p>
+            <a:r>
+              <a:rPr lang="pt-PT" sz="1100" b="1" dirty="0">
+                <a:solidFill>
+                  <a:srgbClr val="0C2A59"/>
+                </a:solidFill>
+              </a:rPr>
+              <a:t>Estudante</a:t>
+            </a:r>
+          </a:p>
+          <a:p>
+            <a:pPr lvl="1"/>
+            <a:r>
+              <a:rPr lang="pt-PT" sz="1000" dirty="0">
+                <a:solidFill>
+                  <a:srgbClr val="5C6475"/>
+                </a:solidFill>
+              </a:rPr>
+              <a:t>Análise, conceção, implementação, testes e documentação</a:t>
+            </a:r>
+          </a:p>
+          <a:p>
+            <a:r>
+              <a:rPr lang="pt-PT" sz="1100" b="1" dirty="0">
+                <a:solidFill>
+                  <a:srgbClr val="0C2A59"/>
+                </a:solidFill>
+              </a:rPr>
+              <a:t>Supervisora (Camila Teixeira - Tlantic)</a:t>
+            </a:r>
+          </a:p>
+          <a:p>
+            <a:pPr lvl="1"/>
+            <a:r>
+              <a:rPr lang="pt-PT" sz="1000" dirty="0">
+                <a:solidFill>
+                  <a:srgbClr val="5C6475"/>
+                </a:solidFill>
+              </a:rPr>
+              <a:t>Priorização funcional, validação do problema e feedback sobre a solução</a:t>
+            </a:r>
+          </a:p>
+          <a:p>
+            <a:r>
+              <a:rPr lang="pt-PT" sz="1100" b="1" dirty="0">
+                <a:solidFill>
+                  <a:srgbClr val="0C2A59"/>
+                </a:solidFill>
+              </a:rPr>
+              <a:t>Orientador (Marílio Cardoso - ISEP)</a:t>
+            </a:r>
+          </a:p>
+          <a:p>
+            <a:pPr lvl="1"/>
+            <a:r>
+              <a:rPr lang="pt-PT" sz="1000" dirty="0">
+                <a:solidFill>
+                  <a:srgbClr val="5C6475"/>
+                </a:solidFill>
+              </a:rPr>
+              <a:t>Acompanhamento académico, revisão estrutural e delimitação do escopo</a:t>
+            </a:r>
+          </a:p>
+          <a:p>
+            <a:r>
+              <a:rPr lang="pt-PT" sz="1100" b="1" dirty="0">
+                <a:solidFill>
+                  <a:srgbClr val="0C2A59"/>
+                </a:solidFill>
+              </a:rPr>
+              <a:t>RH / Gestores de equipa</a:t>
+            </a:r>
+          </a:p>
+          <a:p>
+            <a:pPr lvl="1"/>
+            <a:r>
+              <a:rPr lang="pt-PT" sz="1000" dirty="0">
+                <a:solidFill>
+                  <a:srgbClr val="5C6475"/>
+                </a:solidFill>
+              </a:rPr>
+              <a:t>Fonte de requisitos, validação de fluxos e critério de aceitação operacional</a:t>
+            </a:r>
+          </a:p>
+        </p:txBody>
+      </p:sp>
+    </p:spTree>
+    <p:extLst>
+      <p:ext uri="{BB962C8B-B14F-4D97-AF65-F5344CB8AC3E}">
+        <p14:creationId xmlns:p14="http://schemas.microsoft.com/office/powerpoint/2010/main" val="2268314253"/>
+      </p:ext>
+    </p:extLst>
+  </p:cSld>
+  <p:clrMapOvr>
+    <a:masterClrMapping/>
+  </p:clrMapOvr>
+  <p:transition spd="med">
+    <p:fade/>
+  </p:transition>
+</p:sld>
+</file>
+
+<file path=ppt/slides/slide3.xml><?xml version="1.0" encoding="utf-8"?>
+<p:sld xmlns:a="http://schemas.openxmlformats.org/drawingml/2006/main" xmlns:r="http://schemas.openxmlformats.org/officeDocument/2006/relationships" xmlns:p="http://schemas.openxmlformats.org/presentationml/2006/main">
+  <p:cSld>
+    <p:spTree>
+      <p:nvGrpSpPr>
+        <p:cNvPr id="1" name=""/>
+        <p:cNvGrpSpPr/>
+        <p:nvPr/>
+      </p:nvGrpSpPr>
+      <p:grpSpPr>
+        <a:xfrm>
+          <a:off x="0" y="0"/>
+          <a:ext cx="0" cy="0"/>
+          <a:chOff x="0" y="0"/>
+          <a:chExt cx="0" cy="0"/>
+        </a:xfrm>
+      </p:grpSpPr>
+      <p:sp>
+        <p:nvSpPr>
+          <p:cNvPr id="2" name="Título 1">
+            <a:extLst>
+              <a:ext uri="{FF2B5EF4-FFF2-40B4-BE49-F238E27FC236}">
+                <a16:creationId xmlns:a16="http://schemas.microsoft.com/office/drawing/2014/main" id="{F1DF48B1-7E58-4369-B684-A45E85706E8A}"/>
+              </a:ext>
+            </a:extLst>
+          </p:cNvPr>
+          <p:cNvSpPr>
+            <a:spLocks noGrp="1"/>
+          </p:cNvSpPr>
+          <p:nvPr>
+            <p:ph type="title"/>
+          </p:nvPr>
+        </p:nvSpPr>
+        <p:spPr/>
+        <p:txBody>
+          <a:bodyPr/>
+          <a:lstStyle/>
+          <a:p>
+            <a:r>
+              <a:rPr lang="pt-PT" dirty="0"/>
+              <a:t>Necessidade / Problema a resolver</a:t>
+            </a:r>
+          </a:p>
+        </p:txBody>
+      </p:sp>
+      <p:sp>
+        <p:nvSpPr>
+          <p:cNvPr id="3" name="Marcador de Posição do Texto 2">
+            <a:extLst>
+              <a:ext uri="{FF2B5EF4-FFF2-40B4-BE49-F238E27FC236}">
+                <a16:creationId xmlns:a16="http://schemas.microsoft.com/office/drawing/2014/main" id="{7B141FE6-FB25-4452-8E5F-1B75475DFD11}"/>
+              </a:ext>
+            </a:extLst>
+          </p:cNvPr>
+          <p:cNvSpPr>
+            <a:spLocks noGrp="1"/>
+          </p:cNvSpPr>
+          <p:nvPr>
+            <p:ph type="body" idx="1"/>
+          </p:nvPr>
+        </p:nvSpPr>
+        <p:spPr>
+          <a:xfrm>
+            <a:off x="685800" y="1714488"/>
+            <a:ext cx="8534399" cy="4597102"/>
+          </a:xfrm>
+        </p:spPr>
+        <p:txBody>
+          <a:bodyPr/>
+          <a:lstStyle/>
+          <a:p>
+            <a:r>
+              <a:rPr lang="pt-PT" sz="1300" b="1" dirty="0">
+                <a:solidFill>
+                  <a:srgbClr val="1856B8"/>
+                </a:solidFill>
+              </a:rPr>
+              <a:t>Descrição do problema</a:t>
+            </a:r>
+          </a:p>
+          <a:p>
+            <a:r>
+              <a:rPr lang="pt-PT" sz="1100" dirty="0">
+                <a:solidFill>
+                  <a:srgbClr val="1A1A2E"/>
+                </a:solidFill>
+              </a:rPr>
+              <a:t>Os processos de pessoas (férias, ausências, permissões, perfil) estão fragmentados por email,</a:t>
+            </a:r>
+          </a:p>
+          <a:p>
+            <a:r>
+              <a:rPr lang="pt-PT" sz="1100" dirty="0">
+                <a:solidFill>
+                  <a:srgbClr val="1A1A2E"/>
+                </a:solidFill>
+              </a:rPr>
+              <a:t>folhas de cálculo e validações informais — gerando atraso, erro humano e fraca rastreabilidade.</a:t>
+            </a:r>
+          </a:p>
+          <a:p>
+            <a:endParaRPr lang="pt-PT" sz="1100" dirty="0">
+              <a:solidFill>
+                <a:srgbClr val="1A1A2E"/>
+              </a:solidFill>
+            </a:endParaRPr>
+          </a:p>
+          <a:p>
+            <a:r>
+              <a:rPr lang="pt-PT" sz="1300" b="1" dirty="0">
+                <a:solidFill>
+                  <a:srgbClr val="1856B8"/>
+                </a:solidFill>
+              </a:rPr>
+              <a:t>Situação atual</a:t>
+            </a:r>
+          </a:p>
+          <a:p>
+            <a:pPr lvl="1"/>
+            <a:r>
+              <a:rPr lang="pt-PT" sz="1000" dirty="0">
+                <a:solidFill>
+                  <a:srgbClr val="5C6475"/>
+                </a:solidFill>
+              </a:rPr>
+              <a:t>Dados de colaborador dispersos e nem sempre atualizados</a:t>
+            </a:r>
+          </a:p>
+          <a:p>
+            <a:pPr lvl="1"/>
+            <a:r>
+              <a:rPr lang="pt-PT" sz="1000" dirty="0">
+                <a:solidFill>
+                  <a:srgbClr val="5C6475"/>
+                </a:solidFill>
+              </a:rPr>
+              <a:t>Pedidos de férias dependem de validação manual, sem visibilidade ponta a ponta</a:t>
+            </a:r>
+          </a:p>
+          <a:p>
+            <a:pPr lvl="1"/>
+            <a:r>
+              <a:rPr lang="pt-PT" sz="1000" dirty="0">
+                <a:solidFill>
+                  <a:srgbClr val="5C6475"/>
+                </a:solidFill>
+              </a:rPr>
+              <a:t>Controlo de permissões não centralizado na mesma lógica operacional</a:t>
+            </a:r>
+          </a:p>
+          <a:p>
+            <a:pPr lvl="1"/>
+            <a:r>
+              <a:rPr lang="pt-PT" sz="1000" dirty="0">
+                <a:solidFill>
+                  <a:srgbClr val="5C6475"/>
+                </a:solidFill>
+              </a:rPr>
+              <a:t>Dificuldade em refletir regras diferentes por país, equipa e hierarquia</a:t>
+            </a:r>
+          </a:p>
+          <a:p>
+            <a:pPr lvl="1"/>
+            <a:r>
+              <a:rPr lang="pt-PT" sz="1000" dirty="0">
+                <a:solidFill>
+                  <a:srgbClr val="5C6475"/>
+                </a:solidFill>
+              </a:rPr>
+              <a:t>Histórico de decisões e grants/revokes não é imediato nem uniforme</a:t>
+            </a:r>
+          </a:p>
+          <a:p>
+            <a:endParaRPr lang="pt-PT" sz="1000" dirty="0">
+              <a:solidFill>
+                <a:srgbClr val="5C6475"/>
+              </a:solidFill>
+            </a:endParaRPr>
+          </a:p>
+          <a:p>
+            <a:r>
+              <a:rPr lang="pt-PT" sz="1300" b="1" dirty="0">
+                <a:solidFill>
+                  <a:srgbClr val="1856B8"/>
+                </a:solidFill>
+              </a:rPr>
+              <a:t>Métricas atuais → meta</a:t>
+            </a:r>
+          </a:p>
+          <a:p>
+            <a:pPr lvl="1"/>
+            <a:r>
+              <a:rPr lang="pt-PT" sz="1000" dirty="0">
+                <a:solidFill>
+                  <a:srgbClr val="5C6475"/>
+                </a:solidFill>
+              </a:rPr>
+              <a:t>Tempo médio de aprovação:  72–120h  →  ≤ 24h</a:t>
+            </a:r>
+          </a:p>
+          <a:p>
+            <a:pPr lvl="1"/>
+            <a:r>
+              <a:rPr lang="pt-PT" sz="1000" dirty="0">
+                <a:solidFill>
+                  <a:srgbClr val="5C6475"/>
+                </a:solidFill>
+              </a:rPr>
+              <a:t>Produção do mapa anual de férias:  20–40 min  →  &lt; 2 min</a:t>
+            </a:r>
+          </a:p>
+          <a:p>
+            <a:pPr lvl="1"/>
+            <a:r>
+              <a:rPr lang="pt-PT" sz="1000" dirty="0">
+                <a:solidFill>
+                  <a:srgbClr val="5C6475"/>
+                </a:solidFill>
+              </a:rPr>
+              <a:t>Pedidos com retrabalho:  10–20%  →  ≤ 5%</a:t>
+            </a:r>
+          </a:p>
+          <a:p>
+            <a:pPr lvl="1"/>
+            <a:r>
+              <a:rPr lang="pt-PT" sz="1000" dirty="0">
+                <a:solidFill>
+                  <a:srgbClr val="5C6475"/>
+                </a:solidFill>
+              </a:rPr>
+              <a:t>Registos pessoais desatualizados:  18–25%  →  ≤ 5%</a:t>
+            </a:r>
+          </a:p>
+          <a:p>
+            <a:pPr lvl="1"/>
+            <a:r>
+              <a:rPr lang="pt-PT" sz="1000" dirty="0">
+                <a:solidFill>
+                  <a:srgbClr val="5C6475"/>
+                </a:solidFill>
+              </a:rPr>
+              <a:t>SLA de notificação após decisão:  2–6h  →  ≤ 15 min</a:t>
+            </a:r>
+          </a:p>
+        </p:txBody>
+      </p:sp>
+    </p:spTree>
+    <p:extLst>
+      <p:ext uri="{BB962C8B-B14F-4D97-AF65-F5344CB8AC3E}">
+        <p14:creationId xmlns:p14="http://schemas.microsoft.com/office/powerpoint/2010/main" val="4008698049"/>
+      </p:ext>
+    </p:extLst>
+  </p:cSld>
+  <p:clrMapOvr>
+    <a:masterClrMapping/>
+  </p:clrMapOvr>
+  <p:transition spd="med">
+    <p:fade/>
+  </p:transition>
+</p:sld>
+</file>
+
+<file path=ppt/slides/slide4.xml><?xml version="1.0" encoding="utf-8"?>
+<p:sld xmlns:a="http://schemas.openxmlformats.org/drawingml/2006/main" xmlns:r="http://schemas.openxmlformats.org/officeDocument/2006/relationships" xmlns:p="http://schemas.openxmlformats.org/presentationml/2006/main">
+  <p:cSld>
+    <p:spTree>
+      <p:nvGrpSpPr>
+        <p:cNvPr id="1" name="">
+          <a:extLst>
+            <a:ext uri="{FF2B5EF4-FFF2-40B4-BE49-F238E27FC236}">
+              <a16:creationId xmlns:a16="http://schemas.microsoft.com/office/drawing/2014/main" id="{7511C1A1-D1F5-0F65-2B59-4225A21F2C01}"/>
+            </a:ext>
+          </a:extLst>
+        </p:cNvPr>
+        <p:cNvGrpSpPr/>
+        <p:nvPr/>
+      </p:nvGrpSpPr>
+      <p:grpSpPr>
+        <a:xfrm>
+          <a:off x="0" y="0"/>
+          <a:ext cx="0" cy="0"/>
+          <a:chOff x="0" y="0"/>
+          <a:chExt cx="0" cy="0"/>
+        </a:xfrm>
+      </p:grpSpPr>
+      <p:sp>
+        <p:nvSpPr>
+          <p:cNvPr id="2" name="Título 1">
+            <a:extLst>
+              <a:ext uri="{FF2B5EF4-FFF2-40B4-BE49-F238E27FC236}">
+                <a16:creationId xmlns:a16="http://schemas.microsoft.com/office/drawing/2014/main" id="{9FD15795-37BD-587E-E5F6-12AC71CAACE6}"/>
+              </a:ext>
+            </a:extLst>
+          </p:cNvPr>
+          <p:cNvSpPr>
+            <a:spLocks noGrp="1"/>
+          </p:cNvSpPr>
+          <p:nvPr>
+            <p:ph type="title"/>
+          </p:nvPr>
+        </p:nvSpPr>
+        <p:spPr/>
+        <p:txBody>
+          <a:bodyPr/>
+          <a:lstStyle/>
+          <a:p>
+            <a:r>
+              <a:rPr lang="pt-PT" dirty="0"/>
+              <a:t>Necessidade / Problema a resolver</a:t>
+            </a:r>
+          </a:p>
+        </p:txBody>
+      </p:sp>
+      <p:sp>
+        <p:nvSpPr>
+          <p:cNvPr id="3" name="Marcador de Posição do Texto 2">
+            <a:extLst>
+              <a:ext uri="{FF2B5EF4-FFF2-40B4-BE49-F238E27FC236}">
+                <a16:creationId xmlns:a16="http://schemas.microsoft.com/office/drawing/2014/main" id="{DA8A7C52-8C94-6524-6843-8CFA7B274E50}"/>
+              </a:ext>
+            </a:extLst>
+          </p:cNvPr>
+          <p:cNvSpPr>
+            <a:spLocks noGrp="1"/>
+          </p:cNvSpPr>
+          <p:nvPr>
+            <p:ph type="body" idx="1"/>
+          </p:nvPr>
+        </p:nvSpPr>
+        <p:spPr>
+          <a:xfrm>
+            <a:off x="685800" y="1714488"/>
+            <a:ext cx="8534399" cy="4597102"/>
+          </a:xfrm>
+        </p:spPr>
+        <p:txBody>
+          <a:bodyPr/>
+          <a:lstStyle/>
+          <a:p>
+            <a:pPr marL="114300" indent="0">
+              <a:buNone/>
+            </a:pPr>
+            <a:endParaRPr lang="pt-PT" sz="1000" dirty="0">
+              <a:solidFill>
+                <a:srgbClr val="5C6475"/>
+              </a:solidFill>
+            </a:endParaRPr>
+          </a:p>
+          <a:p>
+            <a:r>
+              <a:rPr lang="pt-PT" sz="1300" b="1" dirty="0">
+                <a:solidFill>
+                  <a:srgbClr val="1856B8"/>
+                </a:solidFill>
+              </a:rPr>
+              <a:t>Situação futura esperada</a:t>
+            </a:r>
+          </a:p>
+          <a:p>
+            <a:r>
+              <a:rPr lang="pt-PT" sz="1100" dirty="0">
+                <a:solidFill>
+                  <a:srgbClr val="1A1A2E"/>
+                </a:solidFill>
+              </a:rPr>
+              <a:t>Plataforma única onde pedidos são criados, validados, decididos e consultados no mesmo contexto,</a:t>
+            </a:r>
+          </a:p>
+          <a:p>
+            <a:r>
+              <a:rPr lang="pt-PT" sz="1100" dirty="0">
+                <a:solidFill>
+                  <a:srgbClr val="1A1A2E"/>
+                </a:solidFill>
+              </a:rPr>
+              <a:t>com regras coerentes por escopo e histórico rastreável de todos os eventos relevantes.</a:t>
+            </a:r>
+          </a:p>
+          <a:p>
+            <a:endParaRPr lang="pt-PT" sz="1100" dirty="0">
+              <a:solidFill>
+                <a:srgbClr val="1A1A2E"/>
+              </a:solidFill>
+            </a:endParaRPr>
+          </a:p>
+          <a:p>
+            <a:r>
+              <a:rPr lang="pt-PT" sz="1300" b="1" dirty="0">
+                <a:solidFill>
+                  <a:srgbClr val="1856B8"/>
+                </a:solidFill>
+              </a:rPr>
+              <a:t>Objetivo geral</a:t>
+            </a:r>
+          </a:p>
+          <a:p>
+            <a:r>
+              <a:rPr lang="pt-PT" sz="1100" dirty="0">
+                <a:solidFill>
+                  <a:srgbClr val="1A1A2E"/>
+                </a:solidFill>
+              </a:rPr>
+              <a:t>Conceber uma plataforma integrada para gestão de processos de pessoas, garantindo eficiência</a:t>
+            </a:r>
+          </a:p>
+          <a:p>
+            <a:r>
+              <a:rPr lang="pt-PT" sz="1100" dirty="0">
+                <a:solidFill>
+                  <a:srgbClr val="1A1A2E"/>
+                </a:solidFill>
+              </a:rPr>
+              <a:t>operacional, controlo de acessos, rastreabilidade de decisão e suporte ao planeamento de equipas.</a:t>
+            </a:r>
+          </a:p>
+          <a:p>
+            <a:endParaRPr lang="pt-PT" sz="1100" dirty="0">
+              <a:solidFill>
+                <a:srgbClr val="1A1A2E"/>
+              </a:solidFill>
+            </a:endParaRPr>
+          </a:p>
+          <a:p>
+            <a:r>
+              <a:rPr lang="pt-PT" sz="1300" b="1" dirty="0">
+                <a:solidFill>
+                  <a:srgbClr val="1856B8"/>
+                </a:solidFill>
+              </a:rPr>
+              <a:t>Objetivos específicos</a:t>
+            </a:r>
+          </a:p>
+          <a:p>
+            <a:pPr lvl="1"/>
+            <a:r>
+              <a:rPr lang="pt-PT" sz="1000" dirty="0">
+                <a:solidFill>
+                  <a:srgbClr val="5C6475"/>
+                </a:solidFill>
+              </a:rPr>
+              <a:t>1. Estruturar o fluxo de pedido, validação e aprovação de férias e ausências</a:t>
+            </a:r>
+          </a:p>
+          <a:p>
+            <a:pPr lvl="1"/>
+            <a:r>
+              <a:rPr lang="pt-PT" sz="1000" dirty="0">
+                <a:solidFill>
+                  <a:srgbClr val="5C6475"/>
+                </a:solidFill>
+              </a:rPr>
+              <a:t>2. Centralizar permissões e acessos por utilizador, escopo e privilégio elevado</a:t>
+            </a:r>
+          </a:p>
+          <a:p>
+            <a:pPr lvl="1"/>
+            <a:r>
+              <a:rPr lang="pt-PT" sz="1000" dirty="0">
+                <a:solidFill>
+                  <a:srgbClr val="5C6475"/>
+                </a:solidFill>
+              </a:rPr>
+              <a:t>3. Refletir regras de negócio por país e contexto organizacional (PT/BR)</a:t>
+            </a:r>
+          </a:p>
+          <a:p>
+            <a:pPr lvl="1"/>
+            <a:r>
+              <a:rPr lang="pt-PT" sz="1000" dirty="0">
+                <a:solidFill>
+                  <a:srgbClr val="5C6475"/>
+                </a:solidFill>
+              </a:rPr>
+              <a:t>4. Disponibilizar exportação e visão operacional para apoio à decisão</a:t>
+            </a:r>
+          </a:p>
+          <a:p>
+            <a:pPr lvl="1"/>
+            <a:r>
+              <a:rPr lang="pt-PT" sz="1000" dirty="0">
+                <a:solidFill>
+                  <a:srgbClr val="5C6475"/>
+                </a:solidFill>
+              </a:rPr>
+              <a:t>5. Garantir histórico auditável de ações sensíveis</a:t>
+            </a:r>
+          </a:p>
+        </p:txBody>
+      </p:sp>
+    </p:spTree>
+    <p:extLst>
+      <p:ext uri="{BB962C8B-B14F-4D97-AF65-F5344CB8AC3E}">
+        <p14:creationId xmlns:p14="http://schemas.microsoft.com/office/powerpoint/2010/main" val="33037351"/>
+      </p:ext>
+    </p:extLst>
+  </p:cSld>
+  <p:clrMapOvr>
+    <a:masterClrMapping/>
+  </p:clrMapOvr>
+  <p:transition spd="med">
+    <p:fade/>
+  </p:transition>
+</p:sld>
+</file>
+
+<file path=ppt/slides/slide5.xml><?xml version="1.0" encoding="utf-8"?>
+<p:sld xmlns:a="http://schemas.openxmlformats.org/drawingml/2006/main" xmlns:r="http://schemas.openxmlformats.org/officeDocument/2006/relationships" xmlns:p="http://schemas.openxmlformats.org/presentationml/2006/main">
+  <p:cSld>
+    <p:spTree>
+      <p:nvGrpSpPr>
+        <p:cNvPr id="1" name="">
+          <a:extLst>
+            <a:ext uri="{FF2B5EF4-FFF2-40B4-BE49-F238E27FC236}">
+              <a16:creationId xmlns:a16="http://schemas.microsoft.com/office/drawing/2014/main" id="{42C51E77-DB97-C929-CF17-3D644622463B}"/>
+            </a:ext>
+          </a:extLst>
+        </p:cNvPr>
+        <p:cNvGrpSpPr/>
+        <p:nvPr/>
+      </p:nvGrpSpPr>
+      <p:grpSpPr>
+        <a:xfrm>
+          <a:off x="0" y="0"/>
+          <a:ext cx="0" cy="0"/>
+          <a:chOff x="0" y="0"/>
+          <a:chExt cx="0" cy="0"/>
+        </a:xfrm>
+      </p:grpSpPr>
+      <p:sp>
+        <p:nvSpPr>
+          <p:cNvPr id="2" name="Título 1">
+            <a:extLst>
+              <a:ext uri="{FF2B5EF4-FFF2-40B4-BE49-F238E27FC236}">
+                <a16:creationId xmlns:a16="http://schemas.microsoft.com/office/drawing/2014/main" id="{6F88A072-F926-052D-27DB-2F71D7FCF174}"/>
+              </a:ext>
+            </a:extLst>
+          </p:cNvPr>
+          <p:cNvSpPr>
+            <a:spLocks noGrp="1"/>
+          </p:cNvSpPr>
+          <p:nvPr>
+            <p:ph type="title"/>
+          </p:nvPr>
+        </p:nvSpPr>
+        <p:spPr/>
+        <p:txBody>
+          <a:bodyPr/>
+          <a:lstStyle/>
+          <a:p>
+            <a:r>
+              <a:rPr lang="pt-PT" dirty="0"/>
+              <a:t>Contexto</a:t>
+            </a:r>
+          </a:p>
+        </p:txBody>
+      </p:sp>
+      <p:sp>
+        <p:nvSpPr>
+          <p:cNvPr id="3" name="Marcador de Posição do Texto 2">
+            <a:extLst>
+              <a:ext uri="{FF2B5EF4-FFF2-40B4-BE49-F238E27FC236}">
+                <a16:creationId xmlns:a16="http://schemas.microsoft.com/office/drawing/2014/main" id="{3B69BD01-50B0-F7CD-87DE-1626E8D8D3F6}"/>
+              </a:ext>
+            </a:extLst>
+          </p:cNvPr>
+          <p:cNvSpPr>
+            <a:spLocks noGrp="1"/>
+          </p:cNvSpPr>
+          <p:nvPr>
+            <p:ph type="body" idx="1"/>
+          </p:nvPr>
+        </p:nvSpPr>
+        <p:spPr>
+          <a:xfrm>
+            <a:off x="685800" y="1714488"/>
+            <a:ext cx="8534399" cy="4597102"/>
+          </a:xfrm>
+        </p:spPr>
+        <p:txBody>
+          <a:bodyPr/>
+          <a:lstStyle/>
+          <a:p>
+            <a:r>
+              <a:rPr lang="pt-PT" sz="1300" b="1" dirty="0">
+                <a:solidFill>
+                  <a:srgbClr val="1856B8"/>
+                </a:solidFill>
+              </a:rPr>
+              <a:t>Descrição da empresa</a:t>
+            </a:r>
+          </a:p>
+          <a:p>
+            <a:r>
+              <a:rPr lang="pt-PT" sz="1100" dirty="0">
+                <a:solidFill>
+                  <a:srgbClr val="1A1A2E"/>
+                </a:solidFill>
+              </a:rPr>
+              <a:t>A Tlantic Portugal é uma empresa de desenvolvimento de software com foco em eficiência</a:t>
+            </a:r>
+          </a:p>
+          <a:p>
+            <a:r>
+              <a:rPr lang="pt-PT" sz="1100" dirty="0">
+                <a:solidFill>
+                  <a:srgbClr val="1A1A2E"/>
+                </a:solidFill>
+              </a:rPr>
+              <a:t>operacional e gestão de pessoas em operações intensivas em mão-de-obra.</a:t>
+            </a:r>
+          </a:p>
+          <a:p>
+            <a:r>
+              <a:rPr lang="pt-PT" sz="1100" dirty="0">
+                <a:solidFill>
+                  <a:srgbClr val="1A1A2E"/>
+                </a:solidFill>
+              </a:rPr>
+              <a:t>O SMARTER HUB responde a necessidades reais de organização de informação de colaborador,</a:t>
+            </a:r>
+          </a:p>
+          <a:p>
+            <a:r>
+              <a:rPr lang="pt-PT" sz="1100" dirty="0">
+                <a:solidFill>
+                  <a:srgbClr val="1A1A2E"/>
+                </a:solidFill>
+              </a:rPr>
+              <a:t>governação por permissões, padronização de processos e apoio à decisão operacional.</a:t>
+            </a:r>
+          </a:p>
+          <a:p>
+            <a:endParaRPr lang="pt-PT" sz="1100" dirty="0">
+              <a:solidFill>
+                <a:srgbClr val="1A1A2E"/>
+              </a:solidFill>
+            </a:endParaRPr>
+          </a:p>
+          <a:p>
+            <a:r>
+              <a:rPr lang="pt-PT" sz="1300" b="1" dirty="0">
+                <a:solidFill>
+                  <a:srgbClr val="1856B8"/>
+                </a:solidFill>
+              </a:rPr>
+              <a:t>Contextualização na área de negócio</a:t>
+            </a:r>
+          </a:p>
+          <a:p>
+            <a:r>
+              <a:rPr lang="pt-PT" sz="1100" dirty="0">
+                <a:solidFill>
+                  <a:srgbClr val="1A1A2E"/>
+                </a:solidFill>
+              </a:rPr>
+              <a:t>O problema situa-se no domínio do software de gestão operacional de pessoas. A fragmentação</a:t>
+            </a:r>
+          </a:p>
+          <a:p>
+            <a:r>
+              <a:rPr lang="pt-PT" sz="1100" dirty="0">
+                <a:solidFill>
+                  <a:srgbClr val="1A1A2E"/>
+                </a:solidFill>
+              </a:rPr>
+              <a:t>atual de processos (email, Excel, validações informais) gera atraso, erro humano e baixa</a:t>
+            </a:r>
+          </a:p>
+          <a:p>
+            <a:r>
+              <a:rPr lang="pt-PT" sz="1100" dirty="0">
+                <a:solidFill>
+                  <a:srgbClr val="1A1A2E"/>
+                </a:solidFill>
+              </a:rPr>
+              <a:t>rastreabilidade. O valor do projeto está em consolidar esses fluxos numa plataforma única.</a:t>
+            </a:r>
+          </a:p>
+          <a:p>
+            <a:endParaRPr lang="pt-PT" sz="1100" dirty="0">
+              <a:solidFill>
+                <a:srgbClr val="1A1A2E"/>
+              </a:solidFill>
+            </a:endParaRPr>
+          </a:p>
+          <a:p>
+            <a:r>
+              <a:rPr lang="pt-PT" sz="1300" b="1" dirty="0">
+                <a:solidFill>
+                  <a:srgbClr val="1856B8"/>
+                </a:solidFill>
+              </a:rPr>
+              <a:t>Estado da arte - abordagens recorrentes</a:t>
+            </a:r>
+          </a:p>
+          <a:p>
+            <a:pPr lvl="1"/>
+            <a:r>
+              <a:rPr lang="pt-PT" sz="1000" dirty="0">
+                <a:solidFill>
+                  <a:srgbClr val="5C6475"/>
+                </a:solidFill>
+              </a:rPr>
+              <a:t>Folhas de cálculo e email - baixo custo, pouca rastreabilidade, forte dependência manual</a:t>
+            </a:r>
+          </a:p>
+          <a:p>
+            <a:pPr lvl="1"/>
+            <a:r>
+              <a:rPr lang="pt-PT" sz="1000" dirty="0">
+                <a:solidFill>
+                  <a:srgbClr val="5C6475"/>
+                </a:solidFill>
+              </a:rPr>
+              <a:t>Módulos dispersos - reduz visão integrada do processo</a:t>
+            </a:r>
+          </a:p>
+          <a:p>
+            <a:pPr lvl="1"/>
+            <a:r>
+              <a:rPr lang="pt-PT" sz="1000" dirty="0">
+                <a:solidFill>
+                  <a:srgbClr val="5C6475"/>
+                </a:solidFill>
+              </a:rPr>
+              <a:t>Plataformas </a:t>
+            </a:r>
+            <a:r>
+              <a:rPr lang="pt-PT" sz="1000" dirty="0" err="1">
+                <a:solidFill>
+                  <a:srgbClr val="5C6475"/>
+                </a:solidFill>
+              </a:rPr>
+              <a:t>enterprise</a:t>
+            </a:r>
+            <a:r>
+              <a:rPr lang="pt-PT" sz="1000" dirty="0">
+                <a:solidFill>
+                  <a:srgbClr val="5C6475"/>
+                </a:solidFill>
+              </a:rPr>
+              <a:t> - robustas mas pesadas e menos ajustadas a contextos específicos</a:t>
+            </a:r>
+          </a:p>
+          <a:p>
+            <a:r>
+              <a:rPr lang="pt-PT" sz="1100" dirty="0">
+                <a:solidFill>
+                  <a:srgbClr val="1A1A2E"/>
+                </a:solidFill>
+              </a:rPr>
+              <a:t>Princípios a reter: workflows com estados explícitos, controlo de acesso por permissão efetiva,</a:t>
+            </a:r>
+          </a:p>
+          <a:p>
+            <a:r>
+              <a:rPr lang="pt-PT" sz="1100" dirty="0">
+                <a:solidFill>
+                  <a:srgbClr val="1A1A2E"/>
+                </a:solidFill>
+              </a:rPr>
+              <a:t>produção de evidências auditáveis para decisões sensíveis.</a:t>
+            </a:r>
+          </a:p>
+        </p:txBody>
+      </p:sp>
+    </p:spTree>
+    <p:extLst>
+      <p:ext uri="{BB962C8B-B14F-4D97-AF65-F5344CB8AC3E}">
+        <p14:creationId xmlns:p14="http://schemas.microsoft.com/office/powerpoint/2010/main" val="2749455125"/>
+      </p:ext>
+    </p:extLst>
+  </p:cSld>
+  <p:clrMapOvr>
+    <a:masterClrMapping/>
+  </p:clrMapOvr>
+  <p:transition spd="med">
+    <p:fade/>
+  </p:transition>
+</p:sld>
+</file>
+
+<file path=ppt/slides/slide6.xml><?xml version="1.0" encoding="utf-8"?>
+<p:sld xmlns:a="http://schemas.openxmlformats.org/drawingml/2006/main" xmlns:r="http://schemas.openxmlformats.org/officeDocument/2006/relationships" xmlns:p="http://schemas.openxmlformats.org/presentationml/2006/main">
+  <p:cSld>
+    <p:spTree>
+      <p:nvGrpSpPr>
+        <p:cNvPr id="1" name="">
+          <a:extLst>
+            <a:ext uri="{FF2B5EF4-FFF2-40B4-BE49-F238E27FC236}">
+              <a16:creationId xmlns:a16="http://schemas.microsoft.com/office/drawing/2014/main" id="{29FC30F7-DD7A-FCBA-3B05-3A22158BDA20}"/>
+            </a:ext>
+          </a:extLst>
+        </p:cNvPr>
+        <p:cNvGrpSpPr/>
+        <p:nvPr/>
+      </p:nvGrpSpPr>
+      <p:grpSpPr>
+        <a:xfrm>
+          <a:off x="0" y="0"/>
+          <a:ext cx="0" cy="0"/>
+          <a:chOff x="0" y="0"/>
+          <a:chExt cx="0" cy="0"/>
+        </a:xfrm>
+      </p:grpSpPr>
+      <p:sp>
+        <p:nvSpPr>
+          <p:cNvPr id="2" name="Título 1">
+            <a:extLst>
+              <a:ext uri="{FF2B5EF4-FFF2-40B4-BE49-F238E27FC236}">
+                <a16:creationId xmlns:a16="http://schemas.microsoft.com/office/drawing/2014/main" id="{C713A04C-A61F-B720-B7F1-5091165A977D}"/>
+              </a:ext>
+            </a:extLst>
+          </p:cNvPr>
+          <p:cNvSpPr>
+            <a:spLocks noGrp="1"/>
+          </p:cNvSpPr>
+          <p:nvPr>
+            <p:ph type="title"/>
+          </p:nvPr>
+        </p:nvSpPr>
+        <p:spPr/>
+        <p:txBody>
+          <a:bodyPr/>
+          <a:lstStyle/>
+          <a:p>
+            <a:r>
+              <a:rPr lang="pt-PT" dirty="0"/>
+              <a:t>Contexto</a:t>
+            </a:r>
+          </a:p>
+        </p:txBody>
+      </p:sp>
+      <p:sp>
+        <p:nvSpPr>
+          <p:cNvPr id="3" name="Marcador de Posição do Texto 2">
+            <a:extLst>
+              <a:ext uri="{FF2B5EF4-FFF2-40B4-BE49-F238E27FC236}">
+                <a16:creationId xmlns:a16="http://schemas.microsoft.com/office/drawing/2014/main" id="{D3758257-7DBE-B63D-8A56-A2631DAB0F75}"/>
+              </a:ext>
+            </a:extLst>
+          </p:cNvPr>
+          <p:cNvSpPr>
+            <a:spLocks noGrp="1"/>
+          </p:cNvSpPr>
+          <p:nvPr>
+            <p:ph type="body" idx="1"/>
+          </p:nvPr>
+        </p:nvSpPr>
+        <p:spPr>
+          <a:xfrm>
+            <a:off x="685800" y="1714488"/>
+            <a:ext cx="8534399" cy="4597102"/>
+          </a:xfrm>
+        </p:spPr>
+        <p:txBody>
+          <a:bodyPr/>
+          <a:lstStyle/>
+          <a:p>
+            <a:pPr marL="114300" indent="0">
+              <a:buNone/>
+            </a:pPr>
+            <a:endParaRPr lang="pt-PT" sz="1100" dirty="0">
+              <a:solidFill>
+                <a:srgbClr val="1A1A2E"/>
+              </a:solidFill>
+            </a:endParaRPr>
+          </a:p>
+          <a:p>
+            <a:r>
+              <a:rPr lang="pt-PT" sz="1300" b="1" dirty="0">
+                <a:solidFill>
+                  <a:srgbClr val="1856B8"/>
+                </a:solidFill>
+              </a:rPr>
+              <a:t>Temas a pesquisar</a:t>
+            </a:r>
+          </a:p>
+          <a:p>
+            <a:pPr lvl="1"/>
+            <a:r>
+              <a:rPr lang="pt-PT" sz="1000" dirty="0" err="1">
+                <a:solidFill>
+                  <a:srgbClr val="5C6475"/>
+                </a:solidFill>
+              </a:rPr>
+              <a:t>Workflows</a:t>
+            </a:r>
+            <a:r>
+              <a:rPr lang="pt-PT" sz="1000" dirty="0">
+                <a:solidFill>
+                  <a:srgbClr val="5C6475"/>
+                </a:solidFill>
+              </a:rPr>
+              <a:t> de aprovação </a:t>
+            </a:r>
+            <a:r>
+              <a:rPr lang="pt-PT" sz="1000" dirty="0" err="1">
+                <a:solidFill>
+                  <a:srgbClr val="5C6475"/>
+                </a:solidFill>
+              </a:rPr>
+              <a:t>multi-nível</a:t>
+            </a:r>
+            <a:endParaRPr lang="pt-PT" sz="1000" dirty="0">
+              <a:solidFill>
+                <a:srgbClr val="5C6475"/>
+              </a:solidFill>
+            </a:endParaRPr>
+          </a:p>
+          <a:p>
+            <a:pPr lvl="1"/>
+            <a:r>
+              <a:rPr lang="pt-PT" sz="1000" dirty="0">
+                <a:solidFill>
+                  <a:srgbClr val="5C6475"/>
+                </a:solidFill>
+              </a:rPr>
+              <a:t>Modelos de controlo de acesso baseados em permissão e escopo (RBAC/PBAC)</a:t>
+            </a:r>
+          </a:p>
+          <a:p>
+            <a:pPr lvl="1"/>
+            <a:r>
+              <a:rPr lang="pt-PT" sz="1000" dirty="0">
+                <a:solidFill>
+                  <a:srgbClr val="5C6475"/>
+                </a:solidFill>
+              </a:rPr>
+              <a:t>Regras operacionais e legais diferenciadas por país (PT/BR)</a:t>
+            </a:r>
+          </a:p>
+          <a:p>
+            <a:pPr lvl="1"/>
+            <a:r>
+              <a:rPr lang="pt-PT" sz="1000" dirty="0">
+                <a:solidFill>
+                  <a:srgbClr val="5C6475"/>
+                </a:solidFill>
+              </a:rPr>
+              <a:t>Histórico </a:t>
+            </a:r>
+            <a:r>
+              <a:rPr lang="pt-PT" sz="1000" dirty="0" err="1">
+                <a:solidFill>
+                  <a:srgbClr val="5C6475"/>
+                </a:solidFill>
+              </a:rPr>
+              <a:t>auditável</a:t>
+            </a:r>
+            <a:r>
+              <a:rPr lang="pt-PT" sz="1000" dirty="0">
+                <a:solidFill>
+                  <a:srgbClr val="5C6475"/>
+                </a:solidFill>
+              </a:rPr>
+              <a:t> e rastreabilidade de decisão</a:t>
+            </a:r>
+          </a:p>
+          <a:p>
+            <a:pPr lvl="1"/>
+            <a:r>
+              <a:rPr lang="pt-PT" sz="1000" dirty="0" err="1">
+                <a:solidFill>
+                  <a:srgbClr val="5C6475"/>
+                </a:solidFill>
+              </a:rPr>
+              <a:t>Reporting</a:t>
+            </a:r>
+            <a:r>
+              <a:rPr lang="pt-PT" sz="1000" dirty="0">
+                <a:solidFill>
+                  <a:srgbClr val="5C6475"/>
+                </a:solidFill>
+              </a:rPr>
+              <a:t> operacional e exportação de dados para apoio à decisão</a:t>
+            </a:r>
+          </a:p>
+          <a:p>
+            <a:endParaRPr lang="pt-PT" sz="1000" dirty="0">
+              <a:solidFill>
+                <a:srgbClr val="5C6475"/>
+              </a:solidFill>
+            </a:endParaRPr>
+          </a:p>
+          <a:p>
+            <a:r>
+              <a:rPr lang="pt-PT" sz="1300" b="1" dirty="0">
+                <a:solidFill>
+                  <a:srgbClr val="1856B8"/>
+                </a:solidFill>
+              </a:rPr>
+              <a:t>Tecnologias a utilizar</a:t>
+            </a:r>
+          </a:p>
+          <a:p>
+            <a:pPr lvl="1"/>
+            <a:r>
+              <a:rPr lang="pt-PT" sz="1000" dirty="0" err="1">
+                <a:solidFill>
+                  <a:srgbClr val="5C6475"/>
+                </a:solidFill>
+              </a:rPr>
+              <a:t>Frontend</a:t>
+            </a:r>
+            <a:r>
+              <a:rPr lang="pt-PT" sz="1000" dirty="0">
+                <a:solidFill>
+                  <a:srgbClr val="5C6475"/>
+                </a:solidFill>
+              </a:rPr>
+              <a:t>: </a:t>
+            </a:r>
+            <a:r>
+              <a:rPr lang="pt-PT" sz="1000" dirty="0" err="1">
+                <a:solidFill>
+                  <a:srgbClr val="5C6475"/>
+                </a:solidFill>
+              </a:rPr>
+              <a:t>React</a:t>
+            </a:r>
+            <a:r>
+              <a:rPr lang="pt-PT" sz="1000" dirty="0">
+                <a:solidFill>
+                  <a:srgbClr val="5C6475"/>
+                </a:solidFill>
+              </a:rPr>
+              <a:t> + </a:t>
+            </a:r>
+            <a:r>
+              <a:rPr lang="pt-PT" sz="1000" dirty="0" err="1">
+                <a:solidFill>
+                  <a:srgbClr val="5C6475"/>
+                </a:solidFill>
+              </a:rPr>
+              <a:t>TypeScript</a:t>
+            </a:r>
+            <a:r>
+              <a:rPr lang="pt-PT" sz="1000" dirty="0">
+                <a:solidFill>
+                  <a:srgbClr val="5C6475"/>
+                </a:solidFill>
+              </a:rPr>
+              <a:t> + </a:t>
+            </a:r>
+            <a:r>
+              <a:rPr lang="pt-PT" sz="1000" dirty="0" err="1">
+                <a:solidFill>
+                  <a:srgbClr val="5C6475"/>
+                </a:solidFill>
+              </a:rPr>
+              <a:t>Vite</a:t>
+            </a:r>
+            <a:endParaRPr lang="pt-PT" sz="1000" dirty="0">
+              <a:solidFill>
+                <a:srgbClr val="5C6475"/>
+              </a:solidFill>
+            </a:endParaRPr>
+          </a:p>
+          <a:p>
+            <a:pPr lvl="1"/>
+            <a:r>
+              <a:rPr lang="pt-PT" sz="1000" dirty="0" err="1">
+                <a:solidFill>
+                  <a:srgbClr val="5C6475"/>
+                </a:solidFill>
+              </a:rPr>
+              <a:t>Backend</a:t>
+            </a:r>
+            <a:r>
+              <a:rPr lang="pt-PT" sz="1000" dirty="0">
+                <a:solidFill>
+                  <a:srgbClr val="5C6475"/>
+                </a:solidFill>
+              </a:rPr>
+              <a:t>: Node.js + Express + </a:t>
+            </a:r>
+            <a:r>
+              <a:rPr lang="pt-PT" sz="1000" dirty="0" err="1">
+                <a:solidFill>
+                  <a:srgbClr val="5C6475"/>
+                </a:solidFill>
+              </a:rPr>
+              <a:t>TypeScript</a:t>
+            </a:r>
+            <a:endParaRPr lang="pt-PT" sz="1000" dirty="0">
+              <a:solidFill>
+                <a:srgbClr val="5C6475"/>
+              </a:solidFill>
+            </a:endParaRPr>
+          </a:p>
+          <a:p>
+            <a:pPr lvl="1"/>
+            <a:r>
+              <a:rPr lang="pt-PT" sz="1000" dirty="0">
+                <a:solidFill>
+                  <a:srgbClr val="5C6475"/>
+                </a:solidFill>
+              </a:rPr>
+              <a:t>Persistência: </a:t>
+            </a:r>
+            <a:r>
+              <a:rPr lang="pt-PT" sz="1000" dirty="0" err="1">
+                <a:solidFill>
+                  <a:srgbClr val="5C6475"/>
+                </a:solidFill>
+              </a:rPr>
+              <a:t>PostgreSQL</a:t>
+            </a:r>
+            <a:r>
+              <a:rPr lang="pt-PT" sz="1000" dirty="0">
+                <a:solidFill>
+                  <a:srgbClr val="5C6475"/>
+                </a:solidFill>
+              </a:rPr>
+              <a:t> + Prisma (ORM)</a:t>
+            </a:r>
+          </a:p>
+          <a:p>
+            <a:pPr lvl="1"/>
+            <a:r>
+              <a:rPr lang="pt-PT" sz="1000" dirty="0">
+                <a:solidFill>
+                  <a:srgbClr val="5C6475"/>
+                </a:solidFill>
+              </a:rPr>
+              <a:t>Testes: </a:t>
+            </a:r>
+            <a:r>
+              <a:rPr lang="pt-PT" sz="1000" dirty="0" err="1">
+                <a:solidFill>
+                  <a:srgbClr val="5C6475"/>
+                </a:solidFill>
+              </a:rPr>
+              <a:t>Vitest</a:t>
+            </a:r>
+            <a:r>
+              <a:rPr lang="pt-PT" sz="1000" dirty="0">
+                <a:solidFill>
+                  <a:srgbClr val="5C6475"/>
+                </a:solidFill>
+              </a:rPr>
+              <a:t> + </a:t>
+            </a:r>
+            <a:r>
+              <a:rPr lang="pt-PT" sz="1000" dirty="0" err="1">
+                <a:solidFill>
+                  <a:srgbClr val="5C6475"/>
+                </a:solidFill>
+              </a:rPr>
+              <a:t>Supertest</a:t>
+            </a:r>
+            <a:r>
+              <a:rPr lang="pt-PT" sz="1000" dirty="0">
+                <a:solidFill>
+                  <a:srgbClr val="5C6475"/>
+                </a:solidFill>
+              </a:rPr>
+              <a:t> + </a:t>
+            </a:r>
+            <a:r>
+              <a:rPr lang="pt-PT" sz="1000" dirty="0" err="1">
+                <a:solidFill>
+                  <a:srgbClr val="5C6475"/>
+                </a:solidFill>
+              </a:rPr>
+              <a:t>Playwright</a:t>
+            </a:r>
+            <a:endParaRPr lang="pt-PT" sz="1000" dirty="0">
+              <a:solidFill>
+                <a:srgbClr val="5C6475"/>
+              </a:solidFill>
+            </a:endParaRPr>
+          </a:p>
+          <a:p>
+            <a:pPr lvl="1"/>
+            <a:r>
+              <a:rPr lang="pt-PT" sz="1000" dirty="0">
+                <a:solidFill>
+                  <a:srgbClr val="5C6475"/>
+                </a:solidFill>
+              </a:rPr>
+              <a:t>Exportação: </a:t>
+            </a:r>
+            <a:r>
+              <a:rPr lang="pt-PT" sz="1000" dirty="0" err="1">
+                <a:solidFill>
+                  <a:srgbClr val="5C6475"/>
+                </a:solidFill>
+              </a:rPr>
+              <a:t>ExcelJS</a:t>
+            </a:r>
+            <a:r>
+              <a:rPr lang="pt-PT" sz="1000" dirty="0">
+                <a:solidFill>
+                  <a:srgbClr val="5C6475"/>
+                </a:solidFill>
+              </a:rPr>
+              <a:t> (mapa anual de férias XLSX)</a:t>
+            </a:r>
+          </a:p>
+        </p:txBody>
+      </p:sp>
+    </p:spTree>
+    <p:extLst>
+      <p:ext uri="{BB962C8B-B14F-4D97-AF65-F5344CB8AC3E}">
+        <p14:creationId xmlns:p14="http://schemas.microsoft.com/office/powerpoint/2010/main" val="563404411"/>
+      </p:ext>
+    </p:extLst>
+  </p:cSld>
+  <p:clrMapOvr>
+    <a:masterClrMapping/>
+  </p:clrMapOvr>
+  <p:transition spd="med">
+    <p:fade/>
+  </p:transition>
+</p:sld>
+</file>
+
+<file path=ppt/slides/slide7.xml><?xml version="1.0" encoding="utf-8"?>
+<p:sld xmlns:a="http://schemas.openxmlformats.org/drawingml/2006/main" xmlns:r="http://schemas.openxmlformats.org/officeDocument/2006/relationships" xmlns:p="http://schemas.openxmlformats.org/presentationml/2006/main">
+  <p:cSld>
+    <p:spTree>
+      <p:nvGrpSpPr>
+        <p:cNvPr id="1" name=""/>
+        <p:cNvGrpSpPr/>
+        <p:nvPr/>
+      </p:nvGrpSpPr>
+      <p:grpSpPr>
+        <a:xfrm>
+          <a:off x="0" y="0"/>
+          <a:ext cx="0" cy="0"/>
+          <a:chOff x="0" y="0"/>
+          <a:chExt cx="0" cy="0"/>
+        </a:xfrm>
+      </p:grpSpPr>
+      <p:sp>
+        <p:nvSpPr>
+          <p:cNvPr id="2" name="Título 1">
+            <a:extLst>
+              <a:ext uri="{FF2B5EF4-FFF2-40B4-BE49-F238E27FC236}">
+                <a16:creationId xmlns:a16="http://schemas.microsoft.com/office/drawing/2014/main" id="{F1DF48B1-7E58-4369-B684-A45E85706E8A}"/>
+              </a:ext>
+            </a:extLst>
+          </p:cNvPr>
+          <p:cNvSpPr>
+            <a:spLocks noGrp="1"/>
+          </p:cNvSpPr>
+          <p:nvPr>
+            <p:ph type="title"/>
+          </p:nvPr>
+        </p:nvSpPr>
+        <p:spPr/>
+        <p:txBody>
+          <a:bodyPr/>
+          <a:lstStyle/>
+          <a:p>
+            <a:r>
+              <a:rPr lang="pt-PT" dirty="0"/>
+              <a:t>Solução a implementar </a:t>
+            </a:r>
+            <a:r>
+              <a:rPr lang="pt-PT" sz="2000" dirty="0"/>
+              <a:t>(se aplicável já nesta fase)</a:t>
+            </a:r>
+            <a:endParaRPr lang="pt-PT" dirty="0"/>
+          </a:p>
+        </p:txBody>
+      </p:sp>
+      <p:sp>
+        <p:nvSpPr>
+          <p:cNvPr id="3" name="Marcador de Posição do Texto 2">
+            <a:extLst>
+              <a:ext uri="{FF2B5EF4-FFF2-40B4-BE49-F238E27FC236}">
+                <a16:creationId xmlns:a16="http://schemas.microsoft.com/office/drawing/2014/main" id="{7B141FE6-FB25-4452-8E5F-1B75475DFD11}"/>
+              </a:ext>
+            </a:extLst>
+          </p:cNvPr>
+          <p:cNvSpPr>
+            <a:spLocks noGrp="1"/>
+          </p:cNvSpPr>
+          <p:nvPr>
+            <p:ph type="body" idx="1"/>
+          </p:nvPr>
+        </p:nvSpPr>
+        <p:spPr>
+          <a:xfrm>
+            <a:off x="685800" y="1714488"/>
+            <a:ext cx="8534399" cy="4597102"/>
+          </a:xfrm>
+        </p:spPr>
+        <p:txBody>
+          <a:bodyPr/>
+          <a:lstStyle/>
+          <a:p>
+            <a:r>
+              <a:rPr lang="pt-PT" sz="1300" b="1" dirty="0">
+                <a:solidFill>
+                  <a:srgbClr val="1856B8"/>
+                </a:solidFill>
+              </a:rPr>
+              <a:t>Descrição da solução</a:t>
+            </a:r>
+          </a:p>
+          <a:p>
+            <a:r>
+              <a:rPr lang="pt-PT" sz="1100" dirty="0">
+                <a:solidFill>
+                  <a:srgbClr val="1A1A2E"/>
+                </a:solidFill>
+              </a:rPr>
+              <a:t>O SMARTER HUB é uma plataforma web integrada com autorização por permissões efetivas</a:t>
+            </a:r>
+          </a:p>
+          <a:p>
+            <a:r>
+              <a:rPr lang="pt-PT" sz="1100" dirty="0">
+                <a:solidFill>
+                  <a:srgbClr val="1A1A2E"/>
+                </a:solidFill>
+              </a:rPr>
+              <a:t>(não papéis fixos). Cada ação valida permissão + escopo + sinalizadores de privilégio elevado,</a:t>
+            </a:r>
+          </a:p>
+          <a:p>
+            <a:r>
+              <a:rPr lang="pt-PT" sz="1100" dirty="0">
+                <a:solidFill>
+                  <a:srgbClr val="1A1A2E"/>
+                </a:solidFill>
+              </a:rPr>
+              <a:t>com trilho auditável de todas as alterações de acesso.</a:t>
+            </a:r>
+          </a:p>
+          <a:p>
+            <a:r>
+              <a:rPr lang="pt-PT" sz="1100" dirty="0">
+                <a:solidFill>
+                  <a:srgbClr val="1A1A2E"/>
+                </a:solidFill>
+              </a:rPr>
+              <a:t>10 módulos: Férias/ausências · Permissões · Perfil · Notificações · Estrutura organizacional</a:t>
+            </a:r>
+          </a:p>
+          <a:p>
+            <a:r>
+              <a:rPr lang="pt-PT" sz="1100" dirty="0">
+                <a:solidFill>
+                  <a:srgbClr val="1A1A2E"/>
+                </a:solidFill>
+              </a:rPr>
+              <a:t>Reporting · Autenticação · Formações · Dias extra/saldo · Ficheiros e anexos</a:t>
+            </a:r>
+          </a:p>
+          <a:p>
+            <a:endParaRPr lang="pt-PT" sz="1100" dirty="0">
+              <a:solidFill>
+                <a:srgbClr val="1A1A2E"/>
+              </a:solidFill>
+            </a:endParaRPr>
+          </a:p>
+          <a:p>
+            <a:r>
+              <a:rPr lang="pt-PT" sz="1300" b="1" dirty="0">
+                <a:solidFill>
+                  <a:srgbClr val="1856B8"/>
+                </a:solidFill>
+              </a:rPr>
+              <a:t>Elementos de análise — Use Cases (UC01–UC39)</a:t>
+            </a:r>
+          </a:p>
+          <a:p>
+            <a:pPr lvl="1"/>
+            <a:r>
+              <a:rPr lang="pt-PT" sz="1000" dirty="0">
+                <a:solidFill>
+                  <a:srgbClr val="5C6475"/>
+                </a:solidFill>
+              </a:rPr>
+              <a:t>UC01–03  Autenticação (credenciais, Microsoft OAuth, sessão /auth/me)</a:t>
+            </a:r>
+          </a:p>
+          <a:p>
+            <a:pPr lvl="1"/>
+            <a:r>
+              <a:rPr lang="pt-PT" sz="1000" dirty="0">
+                <a:solidFill>
+                  <a:srgbClr val="5C6475"/>
+                </a:solidFill>
+              </a:rPr>
+              <a:t>UC04–08  Perfil do colaborador e fluxo de aprovação de alterações</a:t>
+            </a:r>
+          </a:p>
+          <a:p>
+            <a:pPr lvl="1"/>
+            <a:r>
+              <a:rPr lang="pt-PT" sz="1000" dirty="0">
+                <a:solidFill>
+                  <a:srgbClr val="5C6475"/>
+                </a:solidFill>
+              </a:rPr>
+              <a:t>UC09–20  Ciclo completo de férias: submissão, edição, cancelamento, aprovação, exportação XLSX</a:t>
+            </a:r>
+          </a:p>
+          <a:p>
+            <a:pPr lvl="1"/>
+            <a:r>
+              <a:rPr lang="pt-PT" sz="1000" dirty="0">
+                <a:solidFill>
+                  <a:srgbClr val="5C6475"/>
+                </a:solidFill>
+              </a:rPr>
+              <a:t>UC21–27  Governança de permissões: grant, revoke, acesso total, auditoria</a:t>
+            </a:r>
+          </a:p>
+          <a:p>
+            <a:pPr lvl="1"/>
+            <a:r>
+              <a:rPr lang="pt-PT" sz="1000" dirty="0">
+                <a:solidFill>
+                  <a:srgbClr val="5C6475"/>
+                </a:solidFill>
+              </a:rPr>
+              <a:t>UC28      Notificações: leitura individual, em lote, eliminação</a:t>
+            </a:r>
+          </a:p>
+          <a:p>
+            <a:pPr lvl="1"/>
+            <a:r>
+              <a:rPr lang="pt-PT" sz="1000" dirty="0">
+                <a:solidFill>
+                  <a:srgbClr val="5C6475"/>
+                </a:solidFill>
+              </a:rPr>
+              <a:t>UC29–34  Estrutura organizacional e administração de utilizadores/equipas</a:t>
+            </a:r>
+          </a:p>
+          <a:p>
+            <a:pPr lvl="1"/>
+            <a:r>
+              <a:rPr lang="pt-PT" sz="1000" dirty="0">
+                <a:solidFill>
+                  <a:srgbClr val="5C6475"/>
+                </a:solidFill>
+              </a:rPr>
+              <a:t>UC35–37  Formações: criação, atribuição, conclusão</a:t>
+            </a:r>
+          </a:p>
+          <a:p>
+            <a:pPr lvl="1"/>
+            <a:r>
+              <a:rPr lang="pt-PT" sz="1000" dirty="0">
+                <a:solidFill>
+                  <a:srgbClr val="5C6475"/>
+                </a:solidFill>
+              </a:rPr>
+              <a:t>UC38–39  Upload de ficheiros e </a:t>
+            </a:r>
+            <a:r>
+              <a:rPr lang="pt-PT" sz="1000" dirty="0" err="1">
+                <a:solidFill>
+                  <a:srgbClr val="5C6475"/>
+                </a:solidFill>
+              </a:rPr>
+              <a:t>dashboard</a:t>
+            </a:r>
+            <a:r>
+              <a:rPr lang="pt-PT" sz="1000" dirty="0">
+                <a:solidFill>
+                  <a:srgbClr val="5C6475"/>
+                </a:solidFill>
+              </a:rPr>
+              <a:t> operacional</a:t>
+            </a:r>
+          </a:p>
+        </p:txBody>
+      </p:sp>
+    </p:spTree>
+    <p:extLst>
+      <p:ext uri="{BB962C8B-B14F-4D97-AF65-F5344CB8AC3E}">
+        <p14:creationId xmlns:p14="http://schemas.microsoft.com/office/powerpoint/2010/main" val="1575781085"/>
+      </p:ext>
+    </p:extLst>
+  </p:cSld>
+  <p:clrMapOvr>
+    <a:masterClrMapping/>
+  </p:clrMapOvr>
+  <p:transition spd="med">
+    <p:fade/>
+  </p:transition>
+</p:sld>
+</file>
+
+<file path=ppt/slides/slide8.xml><?xml version="1.0" encoding="utf-8"?>
+<p:sld xmlns:a="http://schemas.openxmlformats.org/drawingml/2006/main" xmlns:r="http://schemas.openxmlformats.org/officeDocument/2006/relationships" xmlns:p="http://schemas.openxmlformats.org/presentationml/2006/main">
+  <p:cSld>
+    <p:spTree>
+      <p:nvGrpSpPr>
+        <p:cNvPr id="1" name="">
+          <a:extLst>
+            <a:ext uri="{FF2B5EF4-FFF2-40B4-BE49-F238E27FC236}">
+              <a16:creationId xmlns:a16="http://schemas.microsoft.com/office/drawing/2014/main" id="{5A9A3D44-5919-2294-81BE-E3054CE4A41B}"/>
+            </a:ext>
+          </a:extLst>
+        </p:cNvPr>
+        <p:cNvGrpSpPr/>
+        <p:nvPr/>
+      </p:nvGrpSpPr>
+      <p:grpSpPr>
+        <a:xfrm>
+          <a:off x="0" y="0"/>
+          <a:ext cx="0" cy="0"/>
+          <a:chOff x="0" y="0"/>
+          <a:chExt cx="0" cy="0"/>
+        </a:xfrm>
+      </p:grpSpPr>
+      <p:sp>
+        <p:nvSpPr>
+          <p:cNvPr id="2" name="Título 1">
+            <a:extLst>
+              <a:ext uri="{FF2B5EF4-FFF2-40B4-BE49-F238E27FC236}">
+                <a16:creationId xmlns:a16="http://schemas.microsoft.com/office/drawing/2014/main" id="{63BCB11A-B661-1D9F-439E-0A0412921287}"/>
+              </a:ext>
+            </a:extLst>
+          </p:cNvPr>
+          <p:cNvSpPr>
+            <a:spLocks noGrp="1"/>
+          </p:cNvSpPr>
+          <p:nvPr>
+            <p:ph type="title"/>
+          </p:nvPr>
+        </p:nvSpPr>
+        <p:spPr/>
+        <p:txBody>
+          <a:bodyPr/>
+          <a:lstStyle/>
+          <a:p>
+            <a:r>
+              <a:rPr lang="pt-PT" dirty="0"/>
+              <a:t>Solução a implementar </a:t>
+            </a:r>
+            <a:r>
+              <a:rPr lang="pt-PT" sz="2000" dirty="0"/>
+              <a:t>(se aplicável já nesta fase)</a:t>
+            </a:r>
+            <a:endParaRPr lang="pt-PT" dirty="0"/>
+          </a:p>
+        </p:txBody>
+      </p:sp>
+      <p:sp>
+        <p:nvSpPr>
+          <p:cNvPr id="3" name="Marcador de Posição do Texto 2">
+            <a:extLst>
+              <a:ext uri="{FF2B5EF4-FFF2-40B4-BE49-F238E27FC236}">
+                <a16:creationId xmlns:a16="http://schemas.microsoft.com/office/drawing/2014/main" id="{41548714-21BC-F2A1-6633-0AD9950A7793}"/>
+              </a:ext>
+            </a:extLst>
+          </p:cNvPr>
+          <p:cNvSpPr>
+            <a:spLocks noGrp="1"/>
+          </p:cNvSpPr>
+          <p:nvPr>
+            <p:ph type="body" idx="1"/>
+          </p:nvPr>
+        </p:nvSpPr>
+        <p:spPr>
+          <a:xfrm>
+            <a:off x="685800" y="1714488"/>
+            <a:ext cx="8534399" cy="4597102"/>
+          </a:xfrm>
+        </p:spPr>
+        <p:txBody>
+          <a:bodyPr/>
+          <a:lstStyle/>
+          <a:p>
+            <a:pPr marL="114300" indent="0">
+              <a:buNone/>
+            </a:pPr>
+            <a:endParaRPr lang="pt-PT" sz="1000" dirty="0">
+              <a:solidFill>
+                <a:srgbClr val="5C6475"/>
+              </a:solidFill>
+            </a:endParaRPr>
+          </a:p>
+          <a:p>
+            <a:r>
+              <a:rPr lang="pt-PT" sz="1300" b="1" dirty="0">
+                <a:solidFill>
+                  <a:srgbClr val="1856B8"/>
+                </a:solidFill>
+              </a:rPr>
+              <a:t>Elementos de análise — User Stories (US01–US39)</a:t>
+            </a:r>
+          </a:p>
+          <a:p>
+            <a:pPr lvl="1"/>
+            <a:r>
+              <a:rPr lang="pt-PT" sz="1000" dirty="0">
+                <a:solidFill>
+                  <a:srgbClr val="5C6475"/>
+                </a:solidFill>
+              </a:rPr>
+              <a:t>Alta prioridade: autenticação, férias (submissão/aprovação), permissões, exportação XLSX,</a:t>
+            </a:r>
+          </a:p>
+          <a:p>
+            <a:pPr lvl="1"/>
+            <a:r>
+              <a:rPr lang="pt-PT" sz="1000" dirty="0">
+                <a:solidFill>
+                  <a:srgbClr val="5C6475"/>
+                </a:solidFill>
+              </a:rPr>
+              <a:t>memberships, gestão de utilizadores, crédito de saldo, auditoria de grants/revokes</a:t>
+            </a:r>
+          </a:p>
+          <a:p>
+            <a:pPr lvl="1"/>
+            <a:r>
+              <a:rPr lang="pt-PT" sz="1000" dirty="0">
+                <a:solidFill>
+                  <a:srgbClr val="5C6475"/>
+                </a:solidFill>
+              </a:rPr>
+              <a:t>Média prioridade: perfil, sessão, notificações, dashboard, configuração de dias extra</a:t>
+            </a:r>
+          </a:p>
+          <a:p>
+            <a:pPr lvl="1"/>
+            <a:r>
+              <a:rPr lang="pt-PT" sz="1000" dirty="0">
+                <a:solidFill>
+                  <a:srgbClr val="5C6475"/>
+                </a:solidFill>
+              </a:rPr>
+              <a:t>Baixa prioridade: formações (catálogo, atribuição, conclusão)</a:t>
+            </a:r>
+          </a:p>
+          <a:p>
+            <a:endParaRPr lang="pt-PT" sz="1000" dirty="0">
+              <a:solidFill>
+                <a:srgbClr val="5C6475"/>
+              </a:solidFill>
+            </a:endParaRPr>
+          </a:p>
+          <a:p>
+            <a:r>
+              <a:rPr lang="pt-PT" sz="1300" b="1" dirty="0">
+                <a:solidFill>
+                  <a:srgbClr val="1856B8"/>
+                </a:solidFill>
+              </a:rPr>
+              <a:t>Descrição técnica</a:t>
+            </a:r>
+          </a:p>
+          <a:p>
+            <a:pPr lvl="1"/>
+            <a:r>
+              <a:rPr lang="pt-PT" sz="1000" dirty="0">
+                <a:solidFill>
+                  <a:srgbClr val="5C6475"/>
+                </a:solidFill>
+              </a:rPr>
+              <a:t>Frontend — React + TypeScript + Vite: páginas por domínio, comunicação REST, cache local</a:t>
+            </a:r>
+          </a:p>
+          <a:p>
+            <a:pPr lvl="1"/>
+            <a:r>
+              <a:rPr lang="pt-PT" sz="1000" dirty="0">
+                <a:solidFill>
+                  <a:srgbClr val="5C6475"/>
+                </a:solidFill>
+              </a:rPr>
+              <a:t>Backend — Express + TypeScript: rotas por contexto, validação Zod, motor de autorização</a:t>
+            </a:r>
+          </a:p>
+          <a:p>
+            <a:pPr lvl="1"/>
+            <a:r>
+              <a:rPr lang="pt-PT" sz="1000" dirty="0">
+                <a:solidFill>
+                  <a:srgbClr val="5C6475"/>
+                </a:solidFill>
+              </a:rPr>
+              <a:t>Base de dados — PostgreSQL + Prisma: pedido, aprovação, permissão, auditoria, equipas</a:t>
+            </a:r>
+          </a:p>
+          <a:p>
+            <a:pPr lvl="1"/>
+            <a:r>
+              <a:rPr lang="pt-PT" sz="1000" dirty="0">
+                <a:solidFill>
+                  <a:srgbClr val="5C6475"/>
+                </a:solidFill>
+              </a:rPr>
+              <a:t>Autenticação — JWT + Microsoft OAuth: Bearer token validado em cada pedido autenticado</a:t>
+            </a:r>
+          </a:p>
+          <a:p>
+            <a:pPr lvl="1"/>
+            <a:r>
+              <a:rPr lang="pt-PT" sz="1000" dirty="0">
+                <a:solidFill>
+                  <a:srgbClr val="5C6475"/>
+                </a:solidFill>
+              </a:rPr>
+              <a:t>Testes — Vitest + Supertest + Playwright: cobertura unitária, integração e E2E</a:t>
+            </a:r>
+          </a:p>
+        </p:txBody>
+      </p:sp>
+    </p:spTree>
+    <p:extLst>
+      <p:ext uri="{BB962C8B-B14F-4D97-AF65-F5344CB8AC3E}">
+        <p14:creationId xmlns:p14="http://schemas.microsoft.com/office/powerpoint/2010/main" val="1590180005"/>
+      </p:ext>
+    </p:extLst>
+  </p:cSld>
+  <p:clrMapOvr>
+    <a:masterClrMapping/>
+  </p:clrMapOvr>
+  <p:transition spd="med">
+    <p:fade/>
+  </p:transition>
+</p:sld>
+</file>
+
+<file path=ppt/slides/slide9.xml><?xml version="1.0" encoding="utf-8"?>
+<p:sld xmlns:a="http://schemas.openxmlformats.org/drawingml/2006/main" xmlns:r="http://schemas.openxmlformats.org/officeDocument/2006/relationships" xmlns:p="http://schemas.openxmlformats.org/presentationml/2006/main">
+  <p:cSld>
+    <p:spTree>
+      <p:nvGrpSpPr>
+        <p:cNvPr id="1" name="Shape 87"/>
+        <p:cNvGrpSpPr/>
+        <p:nvPr/>
+      </p:nvGrpSpPr>
+      <p:grpSpPr>
+        <a:xfrm>
+          <a:off x="0" y="0"/>
+          <a:ext cx="0" cy="0"/>
+          <a:chOff x="0" y="0"/>
+          <a:chExt cx="0" cy="0"/>
+        </a:xfrm>
+      </p:grpSpPr>
+      <p:sp>
+        <p:nvSpPr>
+          <p:cNvPr id="88" name="Shape 88"/>
+          <p:cNvSpPr txBox="1">
+            <a:spLocks noGrp="1"/>
+          </p:cNvSpPr>
+          <p:nvPr>
+            <p:ph type="title"/>
+          </p:nvPr>
+        </p:nvSpPr>
+        <p:spPr>
+          <a:xfrm>
+            <a:off x="685800" y="1066799"/>
+            <a:ext cx="8534400" cy="5107757"/>
+          </a:xfrm>
+          <a:prstGeom prst="rect">
+            <a:avLst/>
+          </a:prstGeom>
+          <a:noFill/>
+          <a:ln>
+            <a:noFill/>
+          </a:ln>
+        </p:spPr>
+        <p:txBody>
+          <a:bodyPr wrap="square" lIns="90000" tIns="45700" rIns="91425" bIns="45700" anchor="t" anchorCtr="0">
+            <a:noAutofit/>
+          </a:bodyPr>
+          <a:lstStyle/>
+          <a:p>
+            <a:pPr marL="0" marR="0" algn="l" rtl="0" fontAlgn="t">
+              <a:spcBef>
+                <a:spcPts val="0"/>
+              </a:spcBef>
+              <a:spcAft>
+                <a:spcPts val="0"/>
+              </a:spcAft>
+            </a:pPr>
+            <a:r>
+              <a:rPr lang="pt-PT" dirty="0"/>
+              <a:t>Plano inicial (</a:t>
+            </a:r>
+            <a:r>
+              <a:rPr lang="pt-PT" sz="2400" b="0" dirty="0"/>
+              <a:t>ver </a:t>
+            </a:r>
+            <a:r>
+              <a:rPr lang="pt-PT" sz="2400" b="0" i="1" dirty="0" err="1"/>
+              <a:t>checklist</a:t>
+            </a:r>
+            <a:r>
+              <a:rPr lang="pt-PT" dirty="0"/>
+              <a:t>)</a:t>
+            </a:r>
+            <a:br>
+              <a:rPr lang="pt-PT" dirty="0"/>
+            </a:br>
+            <a:br>
+              <a:rPr lang="pt-PT" sz="1800" b="0" i="0" u="none" strike="noStrike" dirty="0">
+                <a:effectLst/>
+                <a:latin typeface="Arial" panose="020B0604020202020204" pitchFamily="34" charset="0"/>
+              </a:rPr>
+            </a:br>
+            <a:r>
+              <a:rPr lang="pt-PT" sz="1800" b="0" i="0" u="none" strike="noStrike" dirty="0">
+                <a:solidFill>
+                  <a:srgbClr val="000000"/>
+                </a:solidFill>
+                <a:effectLst/>
+                <a:latin typeface="Calibri" panose="020F0502020204030204" pitchFamily="34" charset="0"/>
+              </a:rPr>
+              <a:t> </a:t>
+            </a:r>
+            <a:br>
+              <a:rPr lang="pt-PT" sz="1800" b="0" i="0" u="none" strike="noStrike" dirty="0">
+                <a:effectLst/>
+                <a:latin typeface="Arial" panose="020B0604020202020204" pitchFamily="34" charset="0"/>
+              </a:rPr>
+            </a:br>
+            <a:r>
+              <a:rPr lang="pt-PT" sz="1800" b="0" i="0" u="none" strike="noStrike" dirty="0">
+                <a:solidFill>
+                  <a:srgbClr val="000000"/>
+                </a:solidFill>
+                <a:effectLst/>
+                <a:latin typeface="Calibri" panose="020F0502020204030204" pitchFamily="34" charset="0"/>
+              </a:rPr>
+              <a:t> </a:t>
+            </a:r>
+            <a:br>
+              <a:rPr lang="pt-PT" sz="1800" b="0" i="0" u="none" strike="noStrike" dirty="0">
+                <a:effectLst/>
+                <a:latin typeface="Arial" panose="020B0604020202020204" pitchFamily="34" charset="0"/>
+              </a:rPr>
+            </a:br>
+            <a:r>
+              <a:rPr lang="pt-PT" sz="1800" b="0" i="0" u="none" strike="noStrike" dirty="0">
+                <a:solidFill>
+                  <a:srgbClr val="000000"/>
+                </a:solidFill>
+                <a:effectLst/>
+                <a:latin typeface="Calibri" panose="020F0502020204030204" pitchFamily="34" charset="0"/>
+              </a:rPr>
+              <a:t> </a:t>
+            </a:r>
+            <a:br>
+              <a:rPr lang="pt-PT" sz="1800" b="0" i="0" u="none" strike="noStrike" dirty="0">
+                <a:effectLst/>
+                <a:latin typeface="Arial" panose="020B0604020202020204" pitchFamily="34" charset="0"/>
+              </a:rPr>
+            </a:br>
+            <a:r>
+              <a:rPr lang="pt-PT" sz="1800" b="0" i="0" u="none" strike="noStrike" dirty="0">
+                <a:solidFill>
+                  <a:srgbClr val="000000"/>
+                </a:solidFill>
+                <a:effectLst/>
+                <a:latin typeface="Calibri" panose="020F0502020204030204" pitchFamily="34" charset="0"/>
+              </a:rPr>
+              <a:t> </a:t>
+            </a:r>
+            <a:br>
+              <a:rPr lang="pt-PT" sz="1800" b="0" i="0" u="none" strike="noStrike" dirty="0">
+                <a:effectLst/>
+                <a:latin typeface="Arial" panose="020B0604020202020204" pitchFamily="34" charset="0"/>
+              </a:rPr>
+            </a:br>
+            <a:r>
+              <a:rPr lang="pt-PT" sz="1800" b="0" i="0" u="none" strike="noStrike" dirty="0">
+                <a:solidFill>
+                  <a:srgbClr val="000000"/>
+                </a:solidFill>
+                <a:effectLst/>
+                <a:latin typeface="Calibri" panose="020F0502020204030204" pitchFamily="34" charset="0"/>
+              </a:rPr>
+              <a:t> </a:t>
+            </a:r>
+            <a:br>
+              <a:rPr lang="pt-PT" sz="1800" b="0" i="0" u="none" strike="noStrike" dirty="0">
+                <a:effectLst/>
+                <a:latin typeface="Arial" panose="020B0604020202020204" pitchFamily="34" charset="0"/>
+              </a:rPr>
+            </a:br>
+            <a:r>
+              <a:rPr lang="pt-PT" sz="1800" b="0" i="0" u="none" strike="noStrike" dirty="0">
+                <a:solidFill>
+                  <a:srgbClr val="000000"/>
+                </a:solidFill>
+                <a:effectLst/>
+                <a:latin typeface="Calibri" panose="020F0502020204030204" pitchFamily="34" charset="0"/>
+              </a:rPr>
+              <a:t> </a:t>
+            </a:r>
+            <a:br>
+              <a:rPr lang="pt-PT" sz="1800" b="0" i="0" u="none" strike="noStrike" dirty="0">
+                <a:effectLst/>
+                <a:latin typeface="Arial" panose="020B0604020202020204" pitchFamily="34" charset="0"/>
+              </a:rPr>
+            </a:br>
+            <a:r>
+              <a:rPr lang="pt-PT" sz="1800" b="0" i="0" u="none" strike="noStrike" dirty="0">
+                <a:solidFill>
+                  <a:srgbClr val="000000"/>
+                </a:solidFill>
+                <a:effectLst/>
+                <a:latin typeface="Calibri" panose="020F0502020204030204" pitchFamily="34" charset="0"/>
+              </a:rPr>
+              <a:t> </a:t>
+            </a:r>
+            <a:br>
+              <a:rPr lang="pt-PT" sz="1800" b="0" i="0" u="none" strike="noStrike" dirty="0">
+                <a:effectLst/>
+                <a:latin typeface="Arial" panose="020B0604020202020204" pitchFamily="34" charset="0"/>
+              </a:rPr>
+            </a:br>
+            <a:r>
+              <a:rPr lang="pt-PT" sz="1800" b="0" i="0" u="none" strike="noStrike" dirty="0">
+                <a:solidFill>
+                  <a:srgbClr val="000000"/>
+                </a:solidFill>
+                <a:effectLst/>
+                <a:latin typeface="Calibri" panose="020F0502020204030204" pitchFamily="34" charset="0"/>
+              </a:rPr>
+              <a:t> </a:t>
+            </a:r>
+            <a:br>
+              <a:rPr lang="pt-PT" sz="1800" b="0" i="0" u="none" strike="noStrike" dirty="0">
+                <a:effectLst/>
+                <a:latin typeface="Arial" panose="020B0604020202020204" pitchFamily="34" charset="0"/>
+              </a:rPr>
+            </a:br>
+            <a:r>
+              <a:rPr lang="pt-PT" sz="1800" b="0" i="0" u="none" strike="noStrike" dirty="0">
+                <a:solidFill>
+                  <a:srgbClr val="000000"/>
+                </a:solidFill>
+                <a:effectLst/>
+                <a:latin typeface="Calibri" panose="020F0502020204030204" pitchFamily="34" charset="0"/>
+              </a:rPr>
+              <a:t> </a:t>
+            </a:r>
+            <a:br>
+              <a:rPr lang="pt-PT" sz="1800" b="0" i="0" u="none" strike="noStrike" dirty="0">
+                <a:effectLst/>
+                <a:latin typeface="Arial" panose="020B0604020202020204" pitchFamily="34" charset="0"/>
+              </a:rPr>
+            </a:br>
+            <a:r>
+              <a:rPr lang="pt-PT" sz="1800" b="0" i="0" u="none" strike="noStrike" dirty="0">
+                <a:solidFill>
+                  <a:srgbClr val="000000"/>
+                </a:solidFill>
+                <a:effectLst/>
+                <a:latin typeface="Calibri" panose="020F0502020204030204" pitchFamily="34" charset="0"/>
+              </a:rPr>
+              <a:t> </a:t>
+            </a:r>
+            <a:br>
+              <a:rPr lang="pt-PT" sz="1800" b="0" i="0" u="none" strike="noStrike" dirty="0">
+                <a:effectLst/>
+                <a:latin typeface="Arial" panose="020B0604020202020204" pitchFamily="34" charset="0"/>
+              </a:rPr>
+            </a:br>
+            <a:r>
+              <a:rPr lang="pt-PT" sz="1800" b="0" i="0" u="none" strike="noStrike" dirty="0">
+                <a:solidFill>
+                  <a:srgbClr val="000000"/>
+                </a:solidFill>
+                <a:effectLst/>
+                <a:latin typeface="Calibri" panose="020F0502020204030204" pitchFamily="34" charset="0"/>
+              </a:rPr>
+              <a:t> </a:t>
+            </a:r>
+            <a:br>
+              <a:rPr lang="pt-PT" sz="1800" b="0" i="0" u="none" strike="noStrike" dirty="0">
+                <a:effectLst/>
+                <a:latin typeface="Arial" panose="020B0604020202020204" pitchFamily="34" charset="0"/>
+              </a:rPr>
+            </a:br>
+            <a:r>
+              <a:rPr lang="pt-PT" sz="1800" b="0" i="0" u="none" strike="noStrike" dirty="0">
+                <a:solidFill>
+                  <a:srgbClr val="000000"/>
+                </a:solidFill>
+                <a:effectLst/>
+                <a:latin typeface="Calibri" panose="020F0502020204030204" pitchFamily="34" charset="0"/>
+              </a:rPr>
+              <a:t> </a:t>
+            </a:r>
+            <a:br>
+              <a:rPr lang="pt-PT" sz="1800" b="0" i="0" u="none" strike="noStrike" dirty="0">
+                <a:effectLst/>
+                <a:latin typeface="Arial" panose="020B0604020202020204" pitchFamily="34" charset="0"/>
+              </a:rPr>
+            </a:br>
+            <a:r>
+              <a:rPr lang="pt-PT" sz="1800" b="0" i="0" u="none" strike="noStrike" dirty="0">
+                <a:solidFill>
+                  <a:srgbClr val="000000"/>
+                </a:solidFill>
+                <a:effectLst/>
+                <a:latin typeface="Calibri" panose="020F0502020204030204" pitchFamily="34" charset="0"/>
+              </a:rPr>
+              <a:t> </a:t>
+            </a:r>
+            <a:br>
+              <a:rPr lang="pt-PT" sz="1800" b="0" i="0" u="none" strike="noStrike" dirty="0">
+                <a:effectLst/>
+                <a:latin typeface="Arial" panose="020B0604020202020204" pitchFamily="34" charset="0"/>
+              </a:rPr>
+            </a:br>
+            <a:r>
+              <a:rPr lang="pt-PT" sz="1800" b="0" i="0" u="none" strike="noStrike" dirty="0">
+                <a:solidFill>
+                  <a:srgbClr val="000000"/>
+                </a:solidFill>
+                <a:effectLst/>
+                <a:latin typeface="Calibri" panose="020F0502020204030204" pitchFamily="34" charset="0"/>
+              </a:rPr>
+              <a:t> </a:t>
+            </a:r>
+            <a:br>
+              <a:rPr lang="pt-PT" sz="1800" b="0" i="0" u="none" strike="noStrike" dirty="0">
+                <a:effectLst/>
+                <a:latin typeface="Arial" panose="020B0604020202020204" pitchFamily="34" charset="0"/>
+              </a:rPr>
+            </a:br>
+            <a:r>
+              <a:rPr lang="pt-PT" sz="1800" b="0" i="0" u="none" strike="noStrike" dirty="0">
+                <a:solidFill>
+                  <a:srgbClr val="000000"/>
+                </a:solidFill>
+                <a:effectLst/>
+                <a:latin typeface="Calibri" panose="020F0502020204030204" pitchFamily="34" charset="0"/>
+              </a:rPr>
+              <a:t> </a:t>
+            </a:r>
+            <a:br>
+              <a:rPr lang="pt-PT" sz="1800" b="0" i="0" u="none" strike="noStrike" dirty="0">
+                <a:effectLst/>
+                <a:latin typeface="Arial" panose="020B0604020202020204" pitchFamily="34" charset="0"/>
+              </a:rPr>
+            </a:br>
+            <a:r>
+              <a:rPr lang="pt-PT" sz="1800" b="0" i="0" u="none" strike="noStrike" dirty="0">
+                <a:solidFill>
+                  <a:srgbClr val="000000"/>
+                </a:solidFill>
+                <a:effectLst/>
+                <a:latin typeface="Calibri" panose="020F0502020204030204" pitchFamily="34" charset="0"/>
+              </a:rPr>
+              <a:t> </a:t>
+            </a:r>
+            <a:br>
+              <a:rPr lang="pt-PT" sz="1800" b="0" i="0" u="none" strike="noStrike" dirty="0">
+                <a:effectLst/>
+                <a:latin typeface="Arial" panose="020B0604020202020204" pitchFamily="34" charset="0"/>
+              </a:rPr>
+            </a:br>
+            <a:r>
+              <a:rPr lang="pt-PT" sz="1800" b="0" i="0" u="none" strike="noStrike" dirty="0">
+                <a:solidFill>
+                  <a:srgbClr val="000000"/>
+                </a:solidFill>
+                <a:effectLst/>
+                <a:latin typeface="Calibri" panose="020F0502020204030204" pitchFamily="34" charset="0"/>
+              </a:rPr>
+              <a:t> </a:t>
+            </a:r>
+            <a:br>
+              <a:rPr lang="pt-PT" sz="1800" b="0" i="0" u="none" strike="noStrike" dirty="0">
+                <a:effectLst/>
+                <a:latin typeface="Arial" panose="020B0604020202020204" pitchFamily="34" charset="0"/>
+              </a:rPr>
+            </a:br>
+            <a:r>
+              <a:rPr lang="pt-PT" sz="1800" b="0" i="0" u="none" strike="noStrike" dirty="0">
+                <a:solidFill>
+                  <a:srgbClr val="000000"/>
+                </a:solidFill>
+                <a:effectLst/>
+                <a:latin typeface="Calibri" panose="020F0502020204030204" pitchFamily="34" charset="0"/>
+              </a:rPr>
+              <a:t> </a:t>
+            </a:r>
+            <a:br>
+              <a:rPr lang="pt-PT" sz="1800" b="0" i="0" u="none" strike="noStrike" dirty="0">
+                <a:effectLst/>
+                <a:latin typeface="Arial" panose="020B0604020202020204" pitchFamily="34" charset="0"/>
+              </a:rPr>
+            </a:br>
+            <a:r>
+              <a:rPr lang="pt-PT" sz="1800" b="0" i="0" u="none" strike="noStrike" dirty="0">
+                <a:solidFill>
+                  <a:srgbClr val="000000"/>
+                </a:solidFill>
+                <a:effectLst/>
+                <a:latin typeface="Calibri" panose="020F0502020204030204" pitchFamily="34" charset="0"/>
+              </a:rPr>
+              <a:t> </a:t>
+            </a:r>
+            <a:br>
+              <a:rPr lang="pt-PT" sz="1800" b="0" i="0" u="none" strike="noStrike" dirty="0">
+                <a:effectLst/>
+                <a:latin typeface="Arial" panose="020B0604020202020204" pitchFamily="34" charset="0"/>
+              </a:rPr>
+            </a:br>
+            <a:r>
+              <a:rPr lang="pt-PT" sz="1800" b="0" i="0" u="none" strike="noStrike" dirty="0">
+                <a:solidFill>
+                  <a:srgbClr val="000000"/>
+                </a:solidFill>
+                <a:effectLst/>
+                <a:latin typeface="Calibri" panose="020F0502020204030204" pitchFamily="34" charset="0"/>
+              </a:rPr>
+              <a:t> </a:t>
+            </a:r>
+            <a:br>
+              <a:rPr lang="pt-PT" sz="1800" b="0" i="0" u="none" strike="noStrike" dirty="0">
+                <a:effectLst/>
+                <a:latin typeface="Arial" panose="020B0604020202020204" pitchFamily="34" charset="0"/>
+              </a:rPr>
+            </a:br>
+            <a:r>
+              <a:rPr lang="pt-PT" sz="1800" b="0" i="0" u="none" strike="noStrike" dirty="0">
+                <a:solidFill>
+                  <a:srgbClr val="000000"/>
+                </a:solidFill>
+                <a:effectLst/>
+                <a:latin typeface="Calibri" panose="020F0502020204030204" pitchFamily="34" charset="0"/>
+              </a:rPr>
+              <a:t> </a:t>
+            </a:r>
+            <a:br>
+              <a:rPr lang="pt-PT" sz="1800" b="0" i="0" u="none" strike="noStrike" dirty="0">
+                <a:effectLst/>
+                <a:latin typeface="Arial" panose="020B0604020202020204" pitchFamily="34" charset="0"/>
+              </a:rPr>
+            </a:br>
+            <a:r>
+              <a:rPr lang="pt-PT" sz="1800" b="0" i="0" u="none" strike="noStrike" dirty="0">
+                <a:solidFill>
+                  <a:srgbClr val="000000"/>
+                </a:solidFill>
+                <a:effectLst/>
+                <a:latin typeface="Calibri" panose="020F0502020204030204" pitchFamily="34" charset="0"/>
+              </a:rPr>
+              <a:t> </a:t>
+            </a:r>
+            <a:br>
+              <a:rPr lang="pt-PT" sz="1800" b="0" i="0" u="none" strike="noStrike" dirty="0">
+                <a:effectLst/>
+                <a:latin typeface="Arial" panose="020B0604020202020204" pitchFamily="34" charset="0"/>
+              </a:rPr>
+            </a:br>
+            <a:r>
+              <a:rPr lang="pt-PT" sz="1800" b="0" i="0" u="none" strike="noStrike" dirty="0">
+                <a:solidFill>
+                  <a:srgbClr val="000000"/>
+                </a:solidFill>
+                <a:effectLst/>
+                <a:latin typeface="Calibri" panose="020F0502020204030204" pitchFamily="34" charset="0"/>
+              </a:rPr>
+              <a:t> </a:t>
+            </a:r>
+            <a:br>
+              <a:rPr lang="pt-PT" sz="1800" b="0" i="0" u="none" strike="noStrike" dirty="0">
+                <a:effectLst/>
+                <a:latin typeface="Arial" panose="020B0604020202020204" pitchFamily="34" charset="0"/>
+              </a:rPr>
+            </a:br>
+            <a:r>
+              <a:rPr lang="pt-PT" sz="1800" b="0" i="0" u="none" strike="noStrike" dirty="0">
+                <a:solidFill>
+                  <a:srgbClr val="000000"/>
+                </a:solidFill>
+                <a:effectLst/>
+                <a:latin typeface="Calibri" panose="020F0502020204030204" pitchFamily="34" charset="0"/>
+              </a:rPr>
+              <a:t> </a:t>
+            </a:r>
+            <a:br>
+              <a:rPr lang="pt-PT" sz="1800" b="0" i="0" u="none" strike="noStrike" dirty="0">
+                <a:effectLst/>
+                <a:latin typeface="Arial" panose="020B0604020202020204" pitchFamily="34" charset="0"/>
+              </a:rPr>
+            </a:br>
+            <a:r>
+              <a:rPr lang="pt-PT" sz="1800" b="0" i="0" u="none" strike="noStrike" dirty="0">
+                <a:solidFill>
+                  <a:srgbClr val="000000"/>
+                </a:solidFill>
+                <a:effectLst/>
+                <a:latin typeface="Calibri" panose="020F0502020204030204" pitchFamily="34" charset="0"/>
+              </a:rPr>
+              <a:t> </a:t>
+            </a:r>
+            <a:br>
+              <a:rPr lang="pt-PT" sz="1800" b="0" i="0" u="none" strike="noStrike" dirty="0">
+                <a:effectLst/>
+                <a:latin typeface="Arial" panose="020B0604020202020204" pitchFamily="34" charset="0"/>
+              </a:rPr>
+            </a:br>
+            <a:r>
+              <a:rPr lang="pt-PT" sz="1800" b="0" i="0" u="none" strike="noStrike" dirty="0">
+                <a:solidFill>
+                  <a:srgbClr val="000000"/>
+                </a:solidFill>
+                <a:effectLst/>
+                <a:latin typeface="Calibri" panose="020F0502020204030204" pitchFamily="34" charset="0"/>
+              </a:rPr>
+              <a:t> </a:t>
+            </a:r>
+            <a:br>
+              <a:rPr lang="pt-PT" sz="1800" b="0" i="0" u="none" strike="noStrike" dirty="0">
+                <a:effectLst/>
+                <a:latin typeface="Arial" panose="020B0604020202020204" pitchFamily="34" charset="0"/>
+              </a:rPr>
+            </a:br>
+            <a:r>
+              <a:rPr lang="pt-PT" sz="1800" b="0" i="0" u="none" strike="noStrike" dirty="0">
+                <a:solidFill>
+                  <a:srgbClr val="000000"/>
+                </a:solidFill>
+                <a:effectLst/>
+                <a:latin typeface="Calibri" panose="020F0502020204030204" pitchFamily="34" charset="0"/>
+              </a:rPr>
+              <a:t> </a:t>
+            </a:r>
+            <a:br>
+              <a:rPr lang="pt-PT" sz="1800" b="0" i="0" u="none" strike="noStrike" dirty="0">
+                <a:effectLst/>
+                <a:latin typeface="Arial" panose="020B0604020202020204" pitchFamily="34" charset="0"/>
+              </a:rPr>
+            </a:br>
+            <a:r>
+              <a:rPr lang="pt-PT" sz="1800" b="0" i="0" u="none" strike="noStrike" dirty="0">
+                <a:solidFill>
+                  <a:srgbClr val="000000"/>
+                </a:solidFill>
+                <a:effectLst/>
+                <a:latin typeface="Calibri" panose="020F0502020204030204" pitchFamily="34" charset="0"/>
+              </a:rPr>
+              <a:t> </a:t>
+            </a:r>
+            <a:br>
+              <a:rPr lang="pt-PT" sz="1800" b="0" i="0" u="none" strike="noStrike" dirty="0">
+                <a:effectLst/>
+                <a:latin typeface="Arial" panose="020B0604020202020204" pitchFamily="34" charset="0"/>
+              </a:rPr>
+            </a:br>
+            <a:r>
+              <a:rPr lang="pt-PT" sz="1800" b="0" i="0" u="none" strike="noStrike" dirty="0">
+                <a:solidFill>
+                  <a:srgbClr val="000000"/>
+                </a:solidFill>
+                <a:effectLst/>
+                <a:latin typeface="Calibri" panose="020F0502020204030204" pitchFamily="34" charset="0"/>
+              </a:rPr>
+              <a:t> </a:t>
+            </a:r>
+            <a:br>
+              <a:rPr lang="pt-PT" sz="1800" b="0" i="0" u="none" strike="noStrike" dirty="0">
+                <a:effectLst/>
+                <a:latin typeface="Arial" panose="020B0604020202020204" pitchFamily="34" charset="0"/>
+              </a:rPr>
+            </a:br>
+            <a:endParaRPr lang="pt-PT" b="0" dirty="0">
+              <a:solidFill>
+                <a:schemeClr val="dk1"/>
+              </a:solidFill>
+            </a:endParaRPr>
+          </a:p>
+        </p:txBody>
+      </p:sp>
+      <p:sp>
+        <p:nvSpPr>
+          <p:cNvPr id="3" name="Marcador de Posição do Texto 2">
+            <a:extLst>
+              <a:ext uri="{FF2B5EF4-FFF2-40B4-BE49-F238E27FC236}">
+                <a16:creationId xmlns:a16="http://schemas.microsoft.com/office/drawing/2014/main" id="{237C9DBE-ABA0-974D-04B5-2BC87BDD8FB5}"/>
+              </a:ext>
+            </a:extLst>
+          </p:cNvPr>
+          <p:cNvSpPr>
+            <a:spLocks noGrp="1"/>
+          </p:cNvSpPr>
+          <p:nvPr>
+            <p:ph type="body" idx="1"/>
+          </p:nvPr>
+        </p:nvSpPr>
+        <p:spPr>
+          <a:xfrm>
+            <a:off x="685800" y="1714488"/>
+            <a:ext cx="8534399" cy="4597102"/>
+          </a:xfrm>
+        </p:spPr>
+        <p:txBody>
+          <a:bodyPr/>
+          <a:lstStyle/>
+          <a:p>
+            <a:r>
+              <a:rPr lang="pt-PT" sz="1100" dirty="0">
+                <a:solidFill>
+                  <a:srgbClr val="1A1A2E"/>
+                </a:solidFill>
+              </a:rPr>
+              <a:t>Plano detalhado disponível no ficheiro gantt_chart_pc2.xlsx (incluído na pasta PC2).</a:t>
+            </a:r>
+          </a:p>
+          <a:p>
+            <a:endParaRPr lang="pt-PT" sz="1100" dirty="0">
+              <a:solidFill>
+                <a:srgbClr val="1A1A2E"/>
+              </a:solidFill>
+            </a:endParaRPr>
+          </a:p>
+          <a:p>
+            <a:r>
+              <a:rPr lang="pt-PT" sz="1300" b="1" dirty="0">
+                <a:solidFill>
+                  <a:srgbClr val="1856B8"/>
+                </a:solidFill>
+              </a:rPr>
+              <a:t>Blocos do plano e estado atual</a:t>
+            </a:r>
+          </a:p>
+          <a:p>
+            <a:r>
+              <a:rPr lang="pt-PT" sz="1100" b="1" dirty="0">
+                <a:solidFill>
+                  <a:srgbClr val="0C2A59"/>
+                </a:solidFill>
+              </a:rPr>
+              <a:t>1. Iniciação e arranque  |  07/04 – 15/04  |  100%</a:t>
+            </a:r>
+          </a:p>
+          <a:p>
+            <a:pPr lvl="1"/>
+            <a:r>
+              <a:rPr lang="pt-PT" sz="1000" dirty="0">
+                <a:solidFill>
+                  <a:srgbClr val="5C6475"/>
+                </a:solidFill>
+              </a:rPr>
+              <a:t>Onboarding na Tlantic · Formação inicial · Levantamento macro do problema e stakeholders</a:t>
+            </a:r>
+          </a:p>
+          <a:p>
+            <a:r>
+              <a:rPr lang="pt-PT" sz="1100" b="1" dirty="0">
+                <a:solidFill>
+                  <a:srgbClr val="0C2A59"/>
+                </a:solidFill>
+              </a:rPr>
+              <a:t>2. Planeamento inicial  |  16/04 – 01/05  |  100%</a:t>
+            </a:r>
+          </a:p>
+          <a:p>
+            <a:pPr lvl="1"/>
+            <a:r>
+              <a:rPr lang="pt-PT" sz="1000" dirty="0">
+                <a:solidFill>
+                  <a:srgbClr val="5C6475"/>
+                </a:solidFill>
+              </a:rPr>
+              <a:t>Backlog inicial · Setup documental · Marco PC2 entregue</a:t>
+            </a:r>
+          </a:p>
+          <a:p>
+            <a:r>
+              <a:rPr lang="pt-PT" sz="1100" b="1" dirty="0">
+                <a:solidFill>
+                  <a:srgbClr val="0C2A59"/>
+                </a:solidFill>
+              </a:rPr>
+              <a:t>3. Análise, Desenho e Arquitetura  |  22/04 – 22/05  |  100%</a:t>
+            </a:r>
+          </a:p>
+          <a:p>
+            <a:pPr lvl="1"/>
+            <a:r>
+              <a:rPr lang="pt-PT" sz="1000" dirty="0">
+                <a:solidFill>
+                  <a:srgbClr val="5C6475"/>
+                </a:solidFill>
+              </a:rPr>
+              <a:t>Análise de requisitos por domínio (RBAC, férias, permissões, auditoria)</a:t>
+            </a:r>
+          </a:p>
+          <a:p>
+            <a:pPr lvl="1"/>
+            <a:r>
+              <a:rPr lang="pt-PT" sz="1000" dirty="0">
+                <a:solidFill>
+                  <a:srgbClr val="5C6475"/>
+                </a:solidFill>
+              </a:rPr>
+              <a:t>Desenho funcional · Use Cases · User Stories</a:t>
+            </a:r>
+          </a:p>
+          <a:p>
+            <a:pPr lvl="1"/>
+            <a:r>
+              <a:rPr lang="pt-PT" sz="1000" dirty="0">
+                <a:solidFill>
+                  <a:srgbClr val="5C6475"/>
+                </a:solidFill>
+              </a:rPr>
+              <a:t>Arquitetura técnica · Modelo de dados · Definição de API</a:t>
+            </a:r>
+          </a:p>
+          <a:p>
+            <a:pPr lvl="1"/>
+            <a:r>
+              <a:rPr lang="pt-PT" sz="1000" dirty="0">
+                <a:solidFill>
+                  <a:srgbClr val="5C6475"/>
+                </a:solidFill>
+              </a:rPr>
+              <a:t>Prototipagem UX e navegação da aplicação</a:t>
+            </a:r>
+          </a:p>
+          <a:p>
+            <a:r>
+              <a:rPr lang="pt-PT" sz="1100" b="1" dirty="0">
+                <a:solidFill>
+                  <a:srgbClr val="0C2A59"/>
+                </a:solidFill>
+              </a:rPr>
+              <a:t>4. Desenvolvimento da solução  |  22/04 – 12/06  |  Em curso</a:t>
+            </a:r>
+          </a:p>
+          <a:p>
+            <a:pPr lvl="1"/>
+            <a:r>
+              <a:rPr lang="pt-PT" sz="1000" dirty="0">
+                <a:solidFill>
+                  <a:srgbClr val="5C6475"/>
+                </a:solidFill>
+              </a:rPr>
+              <a:t>Implementação progressiva dos módulos do MVP e validação por testes</a:t>
+            </a:r>
+          </a:p>
+          <a:p>
+            <a:r>
+              <a:rPr lang="pt-PT" sz="1100" b="1" dirty="0">
+                <a:solidFill>
+                  <a:srgbClr val="0C2A59"/>
+                </a:solidFill>
+              </a:rPr>
+              <a:t>5. Consolidação e fecho  |  15/06 – 03/07  |  Planeado</a:t>
+            </a:r>
+          </a:p>
+          <a:p>
+            <a:pPr lvl="1"/>
+            <a:r>
+              <a:rPr lang="pt-PT" sz="1000" dirty="0">
+                <a:solidFill>
+                  <a:srgbClr val="5C6475"/>
+                </a:solidFill>
+              </a:rPr>
+              <a:t>Correção final · Estabilização · Preparação da apresentação e defesa</a:t>
+            </a:r>
+          </a:p>
+          <a:p>
+            <a:endParaRPr lang="pt-PT" sz="1000" dirty="0">
+              <a:solidFill>
+                <a:srgbClr val="5C6475"/>
+              </a:solidFill>
+            </a:endParaRPr>
+          </a:p>
+          <a:p>
+            <a:r>
+              <a:rPr lang="pt-PT" sz="1300" b="1" dirty="0">
+                <a:solidFill>
+                  <a:srgbClr val="1856B8"/>
+                </a:solidFill>
+              </a:rPr>
+              <a:t>Marcos validados</a:t>
+            </a:r>
+          </a:p>
+          <a:p>
+            <a:pPr lvl="1"/>
+            <a:r>
+              <a:rPr lang="pt-PT" sz="1000" dirty="0">
+                <a:solidFill>
+                  <a:srgbClr val="5C6475"/>
+                </a:solidFill>
+              </a:rPr>
+              <a:t>PC1 - Arranque  |  100%  |  Marco de arranque validado com orientador e supervisora</a:t>
+            </a:r>
+          </a:p>
+          <a:p>
+            <a:pPr lvl="1"/>
+            <a:r>
+              <a:rPr lang="pt-PT" sz="1000" dirty="0">
+                <a:solidFill>
+                  <a:srgbClr val="5C6475"/>
+                </a:solidFill>
+              </a:rPr>
+              <a:t>PC2 - Planeamento inicial  |  100%  |  Este ponto de controlo</a:t>
+            </a:r>
+          </a:p>
+        </p:txBody>
+      </p:sp>
+    </p:spTree>
   </p:cSld>
   <p:clrMapOvr>
     <a:masterClrMapping/>
@@ -14821,6 +16180,12 @@
 </file>
 
 <file path=customXml/item2.xml><?xml version="1.0" encoding="utf-8"?>
+<p:properties xmlns:p="http://schemas.microsoft.com/office/2006/metadata/properties" xmlns:xsi="http://www.w3.org/2001/XMLSchema-instance" xmlns:pc="http://schemas.microsoft.com/office/infopath/2007/PartnerControls">
+  <documentManagement/>
+</p:properties>
+</file>
+
+<file path=customXml/item3.xml><?xml version="1.0" encoding="utf-8"?>
 <ct:contentTypeSchema xmlns:ct="http://schemas.microsoft.com/office/2006/metadata/contentType" xmlns:ma="http://schemas.microsoft.com/office/2006/metadata/properties/metaAttributes" ct:_="" ma:_="" ma:contentTypeName="Documento" ma:contentTypeID="0x010100883D08A905528148BD52F20D46B37C46" ma:contentTypeVersion="3" ma:contentTypeDescription="Criar um novo documento." ma:contentTypeScope="" ma:versionID="d94727710e1efbdbb16af050ed520d76">
   <xsd:schema xmlns:xsd="http://www.w3.org/2001/XMLSchema" xmlns:xs="http://www.w3.org/2001/XMLSchema" xmlns:p="http://schemas.microsoft.com/office/2006/metadata/properties" xmlns:ns2="bb033ed8-b937-49d3-95fa-7472142d620e" targetNamespace="http://schemas.microsoft.com/office/2006/metadata/properties" ma:root="true" ma:fieldsID="234d9d22735c0423787a85d7e5d94fad" ns2:_="">
     <xsd:import namespace="bb033ed8-b937-49d3-95fa-7472142d620e"/>
@@ -14958,12 +16323,6 @@
 </ct:contentTypeSchema>
 </file>
 
-<file path=customXml/item3.xml><?xml version="1.0" encoding="utf-8"?>
-<p:properties xmlns:p="http://schemas.microsoft.com/office/2006/metadata/properties" xmlns:xsi="http://www.w3.org/2001/XMLSchema-instance" xmlns:pc="http://schemas.microsoft.com/office/infopath/2007/PartnerControls">
-  <documentManagement/>
-</p:properties>
-</file>
-
 <file path=customXml/itemProps1.xml><?xml version="1.0" encoding="utf-8"?>
 <ds:datastoreItem xmlns:ds="http://schemas.openxmlformats.org/officeDocument/2006/customXml" ds:itemID="{811D928F-9ABC-4A93-A3F4-87F56E258CE6}">
   <ds:schemaRefs>
@@ -14973,6 +16332,22 @@
 </file>
 
 <file path=customXml/itemProps2.xml><?xml version="1.0" encoding="utf-8"?>
+<ds:datastoreItem xmlns:ds="http://schemas.openxmlformats.org/officeDocument/2006/customXml" ds:itemID="{162841B3-EA1C-431C-943C-16DFF5CD3EAB}">
+  <ds:schemaRefs>
+    <ds:schemaRef ds:uri="http://purl.org/dc/elements/1.1/"/>
+    <ds:schemaRef ds:uri="http://schemas.microsoft.com/office/2006/metadata/properties"/>
+    <ds:schemaRef ds:uri="http://purl.org/dc/terms/"/>
+    <ds:schemaRef ds:uri="http://schemas.openxmlformats.org/package/2006/metadata/core-properties"/>
+    <ds:schemaRef ds:uri="ef9786d6-4f2c-4fbe-9caa-ddb5c41515a6"/>
+    <ds:schemaRef ds:uri="http://schemas.microsoft.com/office/2006/documentManagement/types"/>
+    <ds:schemaRef ds:uri="http://schemas.microsoft.com/office/infopath/2007/PartnerControls"/>
+    <ds:schemaRef ds:uri="http://www.w3.org/XML/1998/namespace"/>
+    <ds:schemaRef ds:uri="http://purl.org/dc/dcmitype/"/>
+  </ds:schemaRefs>
+</ds:datastoreItem>
+</file>
+
+<file path=customXml/itemProps3.xml><?xml version="1.0" encoding="utf-8"?>
 <ds:datastoreItem xmlns:ds="http://schemas.openxmlformats.org/officeDocument/2006/customXml" ds:itemID="{37BA14CF-B886-4406-9007-DB3D92F1EF92}">
   <ds:schemaRefs>
     <ds:schemaRef ds:uri="http://schemas.microsoft.com/office/2006/metadata/contentType"/>
@@ -14988,20 +16363,4 @@
     <ds:schemaRef ds:uri="http://schemas.microsoft.com/internal/obd"/>
   </ds:schemaRefs>
 </ds:datastoreItem>
-</file>
-
-<file path=customXml/itemProps3.xml><?xml version="1.0" encoding="utf-8"?>
-<ds:datastoreItem xmlns:ds="http://schemas.openxmlformats.org/officeDocument/2006/customXml" ds:itemID="{162841B3-EA1C-431C-943C-16DFF5CD3EAB}">
-  <ds:schemaRefs>
-    <ds:schemaRef ds:uri="http://purl.org/dc/elements/1.1/"/>
-    <ds:schemaRef ds:uri="http://schemas.microsoft.com/office/2006/metadata/properties"/>
-    <ds:schemaRef ds:uri="http://purl.org/dc/terms/"/>
-    <ds:schemaRef ds:uri="http://schemas.openxmlformats.org/package/2006/metadata/core-properties"/>
-    <ds:schemaRef ds:uri="ef9786d6-4f2c-4fbe-9caa-ddb5c41515a6"/>
-    <ds:schemaRef ds:uri="http://schemas.microsoft.com/office/2006/documentManagement/types"/>
-    <ds:schemaRef ds:uri="http://schemas.microsoft.com/office/infopath/2007/PartnerControls"/>
-    <ds:schemaRef ds:uri="http://www.w3.org/XML/1998/namespace"/>
-    <ds:schemaRef ds:uri="http://purl.org/dc/dcmitype/"/>
-  </ds:schemaRefs>
-</ds:datastoreItem>
 </file>